--- a/decks/stay-curious-lesson-v2.pptx
+++ b/decks/stay-curious-lesson-v2.pptx
@@ -16,6 +16,7 @@
     <p:sldId id="264" r:id="rId16"/>
     <p:sldId id="265" r:id="rId17"/>
     <p:sldId id="266" r:id="rId18"/>
+    <p:sldId id="267" r:id="rId19"/>
   </p:sldIdLst>
   <p:sldSz cx="12192000" cy="6858000" type="screen4x3"/>
   <p:notesSz cx="6858000" cy="9144000"/>
@@ -512,7 +513,7 @@
           <a:lstStyle/>
           <a:p>
             <a:r>
-              <a:t>This page and the next three are hidden. They stay in the deck for you and are skipped when you present.</a:t>
+              <a:t>This page is hidden and skipped when you present. The full plan, care notes and research are on the hidden pages at the end of the deck, if you want them.</a:t>
             </a:r>
           </a:p>
         </p:txBody>
@@ -1003,6 +1004,76 @@
           <a:p>
             <a:r>
               <a:t>3 MINUTES. Students write one small thing on their second card and keep it: a question to look up, a teacher to ask "why", a small new thing to try, an hour of nothing. Share the student page link. Mention that if school pressure feels constant, or they can't remember the last time they did something just for fun, a counselor is a good person to talk to.</a:t>
+            </a:r>
+          </a:p>
+        </p:txBody>
+      </p:sp>
+      <p:sp>
+        <p:nvSpPr>
+          <p:cNvPr id="4" name="Slide Number Placeholder 3"/>
+          <p:cNvSpPr>
+            <a:spLocks noGrp="1"/>
+          </p:cNvSpPr>
+          <p:nvPr>
+            <p:ph type="sldNum" idx="5" sz="quarter"/>
+          </p:nvPr>
+        </p:nvSpPr>
+        <p:spPr/>
+      </p:sp>
+    </p:spTree>
+  </p:cSld>
+  <p:clrMapOvr>
+    <a:masterClrMapping/>
+  </p:clrMapOvr>
+</p:notes>
+</file>
+
+<file path=ppt/notesSlides/notesSlide9.xml><?xml version="1.0" encoding="utf-8"?>
+<p:notes xmlns:a="http://schemas.openxmlformats.org/drawingml/2006/main" xmlns:p="http://schemas.openxmlformats.org/presentationml/2006/main" xmlns:r="http://schemas.openxmlformats.org/officeDocument/2006/relationships">
+  <p:cSld>
+    <p:spTree>
+      <p:nvGrpSpPr>
+        <p:cNvPr id="1" name=""/>
+        <p:cNvGrpSpPr/>
+        <p:nvPr/>
+      </p:nvGrpSpPr>
+      <p:grpSpPr>
+        <a:xfrm>
+          <a:off x="0" y="0"/>
+          <a:ext cx="0" cy="0"/>
+          <a:chOff x="0" y="0"/>
+          <a:chExt cx="0" cy="0"/>
+        </a:xfrm>
+      </p:grpSpPr>
+      <p:sp>
+        <p:nvSpPr>
+          <p:cNvPr id="2" name="Slide Image Placeholder 1"/>
+          <p:cNvSpPr>
+            <a:spLocks noGrp="1"/>
+          </p:cNvSpPr>
+          <p:nvPr>
+            <p:ph type="sldImg" idx="2"/>
+          </p:nvPr>
+        </p:nvSpPr>
+        <p:spPr/>
+      </p:sp>
+      <p:sp>
+        <p:nvSpPr>
+          <p:cNvPr id="3" name="Notes Placeholder 2"/>
+          <p:cNvSpPr>
+            <a:spLocks noGrp="1"/>
+          </p:cNvSpPr>
+          <p:nvPr>
+            <p:ph type="body" idx="3" sz="quarter"/>
+          </p:nvPr>
+        </p:nvSpPr>
+        <p:spPr/>
+        <p:txBody>
+          <a:bodyPr/>
+          <a:lstStyle/>
+          <a:p>
+            <a:r>
+              <a:t>If you want more: this page and the next three are hidden and skipped when you present.</a:t>
             </a:r>
           </a:p>
         </p:txBody>
@@ -4094,7 +4165,7 @@
                 </a:solidFill>
                 <a:latin typeface="Inter Tight"/>
               </a:rPr>
-              <a:t>TEACHER PAGE  ·  skipped when you present  ·  Lesson plan</a:t>
+              <a:t>TEACHER PAGE  ·  skipped when you present  ·  Before you start</a:t>
             </a:r>
           </a:p>
         </p:txBody>
@@ -4185,8 +4256,8 @@
         </p:nvSpPr>
         <p:spPr>
           <a:xfrm>
-            <a:off x="548640" y="1828800"/>
-            <a:ext cx="5120640" cy="4389120"/>
+            <a:off x="548640" y="2011680"/>
+            <a:ext cx="11064240" cy="4206240"/>
           </a:xfrm>
           <a:prstGeom prst="rect">
             <a:avLst/>
@@ -4201,43 +4272,43 @@
           <a:p>
             <a:pPr algn="l">
               <a:spcAft>
-                <a:spcPts val="675"/>
-              </a:spcAft>
-            </a:pPr>
-            <a:r>
-              <a:rPr sz="1100" b="1" i="0">
+                <a:spcPts val="900"/>
+              </a:spcAft>
+            </a:pPr>
+            <a:r>
+              <a:rPr sz="1200" b="1" i="0">
                 <a:solidFill>
                   <a:srgbClr val="0B2D5B"/>
                 </a:solidFill>
                 <a:latin typeface="Inter Tight"/>
               </a:rPr>
-              <a:t>GOAL</a:t>
-            </a:r>
-          </a:p>
-          <a:p>
-            <a:pPr algn="l">
-              <a:spcAft>
-                <a:spcPts val="675"/>
-              </a:spcAft>
-            </a:pPr>
-            <a:r>
-              <a:rPr sz="1500" b="0" i="0">
+              <a:t>BEFORE YOU START</a:t>
+            </a:r>
+          </a:p>
+          <a:p>
+            <a:pPr algn="l">
+              <a:spcAft>
+                <a:spcPts val="900"/>
+              </a:spcAft>
+            </a:pPr>
+            <a:r>
+              <a:rPr sz="2000" b="0" i="0">
                 <a:solidFill>
                   <a:srgbClr val="1C1B19"/>
                 </a:solidFill>
                 <a:latin typeface="Source Serif 4"/>
               </a:rPr>
-              <a:t>Students can name the difference between grinding for a grade and learning because they want to know, explain why curiosity matters for memory and for having something real to say, and pick one small way to feed their curiosity this week. Nobody is asked to share grades, college plans, or how much pressure they're under at home.</a:t>
-            </a:r>
-          </a:p>
-          <a:p>
-            <a:pPr algn="l">
-              <a:spcAft>
-                <a:spcPts val="675"/>
-              </a:spcAft>
-            </a:pPr>
-            <a:r>
-              <a:rPr sz="1500" b="0" i="0">
+              <a:t>Students learn the difference between grinding for a grade and learning because they want to know, and pick one small way to feed their curiosity this week. Bring sticky notes, share one thing you got curious about lately, and don't ask about GPAs or college lists.</a:t>
+            </a:r>
+          </a:p>
+          <a:p>
+            <a:pPr algn="l">
+              <a:spcAft>
+                <a:spcPts val="900"/>
+              </a:spcAft>
+            </a:pPr>
+            <a:r>
+              <a:rPr sz="2000" b="0" i="0">
                 <a:solidFill>
                   <a:srgbClr val="1C1B19"/>
                 </a:solidFill>
@@ -4249,277 +4320,33 @@
           <a:p>
             <a:pPr algn="l">
               <a:spcAft>
-                <a:spcPts val="675"/>
-              </a:spcAft>
-            </a:pPr>
-            <a:r>
-              <a:rPr sz="1100" b="1" i="0">
+                <a:spcPts val="900"/>
+              </a:spcAft>
+            </a:pPr>
+            <a:r>
+              <a:rPr sz="1200" b="1" i="0">
                 <a:solidFill>
                   <a:srgbClr val="0B2D5B"/>
                 </a:solidFill>
                 <a:latin typeface="Inter Tight"/>
               </a:rPr>
-              <a:t>MATERIALS</a:t>
-            </a:r>
-          </a:p>
-          <a:p>
-            <a:pPr algn="l">
-              <a:spcAft>
-                <a:spcPts val="675"/>
-              </a:spcAft>
-            </a:pPr>
-            <a:r>
-              <a:rPr sz="1500" b="0" i="0">
+              <a:t>EVERY STUDENT IN THE ROOM</a:t>
+            </a:r>
+          </a:p>
+          <a:p>
+            <a:pPr algn="l">
+              <a:spcAft>
+                <a:spcPts val="900"/>
+              </a:spcAft>
+            </a:pPr>
+            <a:r>
+              <a:rPr sz="2000" b="0" i="0">
                 <a:solidFill>
                   <a:srgbClr val="1C1B19"/>
                 </a:solidFill>
                 <a:latin typeface="Source Serif 4"/>
               </a:rPr>
-              <a:t>Sticky notes or index cards, two per student</a:t>
-            </a:r>
-          </a:p>
-          <a:p>
-            <a:pPr algn="l">
-              <a:spcAft>
-                <a:spcPts val="675"/>
-              </a:spcAft>
-            </a:pPr>
-            <a:r>
-              <a:rPr sz="1500" b="0" i="0">
-                <a:solidFill>
-                  <a:srgbClr val="1C1B19"/>
-                </a:solidFill>
-                <a:latin typeface="Source Serif 4"/>
-              </a:rPr>
-              <a:t>A board or chart paper with two columns: Grind and Curiosity</a:t>
-            </a:r>
-          </a:p>
-          <a:p>
-            <a:pPr algn="l">
-              <a:spcAft>
-                <a:spcPts val="675"/>
-              </a:spcAft>
-            </a:pPr>
-            <a:r>
-              <a:rPr sz="1500" b="0" i="0">
-                <a:solidFill>
-                  <a:srgbClr val="1C1B19"/>
-                </a:solidFill>
-                <a:latin typeface="Source Serif 4"/>
-              </a:rPr>
-              <a:t>The student page link (last slide) to share after advisory</a:t>
-            </a:r>
-          </a:p>
-        </p:txBody>
-      </p:sp>
-      <p:sp>
-        <p:nvSpPr>
-          <p:cNvPr id="7" name="TextBox 6"/>
-          <p:cNvSpPr txBox="1"/>
-          <p:nvPr/>
-        </p:nvSpPr>
-        <p:spPr>
-          <a:xfrm>
-            <a:off x="6126480" y="1828800"/>
-            <a:ext cx="5486400" cy="4389120"/>
-          </a:xfrm>
-          <a:prstGeom prst="rect">
-            <a:avLst/>
-          </a:prstGeom>
-          <a:noFill/>
-        </p:spPr>
-        <p:txBody>
-          <a:bodyPr wrap="square" anchor="t" lIns="0" rIns="0" tIns="0" bIns="0">
-            <a:spAutoFit/>
-          </a:bodyPr>
-          <a:lstStyle/>
-          <a:p>
-            <a:pPr algn="l">
-              <a:spcAft>
-                <a:spcPts val="630"/>
-              </a:spcAft>
-            </a:pPr>
-            <a:r>
-              <a:rPr sz="1100" b="1" i="0">
-                <a:solidFill>
-                  <a:srgbClr val="0B2D5B"/>
-                </a:solidFill>
-                <a:latin typeface="Inter Tight"/>
-              </a:rPr>
-              <a:t>FLOW</a:t>
-            </a:r>
-          </a:p>
-          <a:p>
-            <a:pPr algn="l">
-              <a:spcAft>
-                <a:spcPts val="630"/>
-              </a:spcAft>
-            </a:pPr>
-            <a:r>
-              <a:rPr sz="1300" b="1" i="0">
-                <a:solidFill>
-                  <a:srgbClr val="F47B20"/>
-                </a:solidFill>
-                <a:latin typeface="Inter Tight"/>
-              </a:rPr>
-              <a:t>4 min   </a:t>
-            </a:r>
-            <a:r>
-              <a:rPr sz="1400" b="0" i="0">
-                <a:solidFill>
-                  <a:srgbClr val="1C1B19"/>
-                </a:solidFill>
-                <a:latin typeface="Source Serif 4"/>
-              </a:rPr>
-              <a:t>Rabbit holes: what did you last look up just because?</a:t>
-            </a:r>
-          </a:p>
-          <a:p>
-            <a:pPr algn="l">
-              <a:spcAft>
-                <a:spcPts val="630"/>
-              </a:spcAft>
-            </a:pPr>
-            <a:r>
-              <a:rPr sz="1300" b="1" i="0">
-                <a:solidFill>
-                  <a:srgbClr val="F47B20"/>
-                </a:solidFill>
-                <a:latin typeface="Inter Tight"/>
-              </a:rPr>
-              <a:t>5 min   </a:t>
-            </a:r>
-            <a:r>
-              <a:rPr sz="1400" b="0" i="0">
-                <a:solidFill>
-                  <a:srgbClr val="1C1B19"/>
-                </a:solidFill>
-                <a:latin typeface="Source Serif 4"/>
-              </a:rPr>
-              <a:t>Grind or curiosity? (sort the cards)</a:t>
-            </a:r>
-          </a:p>
-          <a:p>
-            <a:pPr algn="l">
-              <a:spcAft>
-                <a:spcPts val="630"/>
-              </a:spcAft>
-            </a:pPr>
-            <a:r>
-              <a:rPr sz="1300" b="1" i="0">
-                <a:solidFill>
-                  <a:srgbClr val="F47B20"/>
-                </a:solidFill>
-                <a:latin typeface="Inter Tight"/>
-              </a:rPr>
-              <a:t>4 min   </a:t>
-            </a:r>
-            <a:r>
-              <a:rPr sz="1400" b="0" i="0">
-                <a:solidFill>
-                  <a:srgbClr val="1C1B19"/>
-                </a:solidFill>
-                <a:latin typeface="Source Serif 4"/>
-              </a:rPr>
-              <a:t>Why curiosity matters: memory and the teen brain</a:t>
-            </a:r>
-          </a:p>
-          <a:p>
-            <a:pPr algn="l">
-              <a:spcAft>
-                <a:spcPts val="630"/>
-              </a:spcAft>
-            </a:pPr>
-            <a:r>
-              <a:rPr sz="1300" b="1" i="0">
-                <a:solidFill>
-                  <a:srgbClr val="F47B20"/>
-                </a:solidFill>
-                <a:latin typeface="Inter Tight"/>
-              </a:rPr>
-              <a:t>4 min   </a:t>
-            </a:r>
-            <a:r>
-              <a:rPr sz="1400" b="0" i="0">
-                <a:solidFill>
-                  <a:srgbClr val="1C1B19"/>
-                </a:solidFill>
-                <a:latin typeface="Source Serif 4"/>
-              </a:rPr>
-              <a:t>Something to say: two seniors</a:t>
-            </a:r>
-          </a:p>
-          <a:p>
-            <a:pPr algn="l">
-              <a:spcAft>
-                <a:spcPts val="630"/>
-              </a:spcAft>
-            </a:pPr>
-            <a:r>
-              <a:rPr sz="1300" b="1" i="0">
-                <a:solidFill>
-                  <a:srgbClr val="F47B20"/>
-                </a:solidFill>
-                <a:latin typeface="Inter Tight"/>
-              </a:rPr>
-              <a:t>3 min   </a:t>
-            </a:r>
-            <a:r>
-              <a:rPr sz="1400" b="0" i="0">
-                <a:solidFill>
-                  <a:srgbClr val="1C1B19"/>
-                </a:solidFill>
-                <a:latin typeface="Source Serif 4"/>
-              </a:rPr>
-              <a:t>Pick one, privately, and the student page link</a:t>
-            </a:r>
-          </a:p>
-          <a:p>
-            <a:pPr algn="l">
-              <a:spcAft>
-                <a:spcPts val="630"/>
-              </a:spcAft>
-            </a:pPr>
-            <a:r>
-              <a:rPr sz="1400" b="0" i="0">
-                <a:solidFill>
-                  <a:srgbClr val="1C1B19"/>
-                </a:solidFill>
-                <a:latin typeface="Source Serif 4"/>
-              </a:rPr>
-              <a:t/>
-            </a:r>
-          </a:p>
-          <a:p>
-            <a:pPr algn="l">
-              <a:spcAft>
-                <a:spcPts val="630"/>
-              </a:spcAft>
-            </a:pPr>
-            <a:r>
-              <a:rPr sz="1100" b="1" i="0">
-                <a:solidFill>
-                  <a:srgbClr val="0B2D5B"/>
-                </a:solidFill>
-                <a:latin typeface="Inter Tight"/>
-              </a:rPr>
-              <a:t>SHORT ON TIME (10-MINUTE CHECK-IN)</a:t>
-            </a:r>
-          </a:p>
-          <a:p>
-            <a:pPr algn="l">
-              <a:spcAft>
-                <a:spcPts val="630"/>
-              </a:spcAft>
-            </a:pPr>
-            <a:r>
-              <a:rPr sz="1400" b="0" i="0">
-                <a:solidFill>
-                  <a:srgbClr val="1C1B19"/>
-                </a:solidFill>
-                <a:latin typeface="Source Serif 4"/>
-              </a:rPr>
-              <a:t>Rabbit holes go-around (3), the grind loop slide (3), pick one small way to feed curiosity this week (3), share the link (1).</a:t>
+              <a:t>Curiosity doesn't need money, and for some families grades are how sacrifice gets honored, so don't set curiosity against family; gaming lore, cars and a faith question all count.</a:t>
             </a:r>
           </a:p>
         </p:txBody>
@@ -4533,6 +4360,1692 @@
 </file>
 
 <file path=ppt/slides/slide10.xml><?xml version="1.0" encoding="utf-8"?>
+<p:sld xmlns:a="http://schemas.openxmlformats.org/drawingml/2006/main" xmlns:p="http://schemas.openxmlformats.org/presentationml/2006/main" xmlns:r="http://schemas.openxmlformats.org/officeDocument/2006/relationships" show="0">
+  <p:cSld>
+    <p:bg>
+      <p:bgPr>
+        <a:solidFill>
+          <a:srgbClr val="EEEBE4"/>
+        </a:solidFill>
+        <a:effectLst/>
+      </p:bgPr>
+    </p:bg>
+    <p:spTree>
+      <p:nvGrpSpPr>
+        <p:cNvPr id="1" name=""/>
+        <p:cNvGrpSpPr/>
+        <p:nvPr/>
+      </p:nvGrpSpPr>
+      <p:grpSpPr/>
+      <p:sp>
+        <p:nvSpPr>
+          <p:cNvPr id="2" name="Rectangle 1"/>
+          <p:cNvSpPr/>
+          <p:nvPr/>
+        </p:nvSpPr>
+        <p:spPr>
+          <a:xfrm>
+            <a:off x="0" y="0"/>
+            <a:ext cx="12191695" cy="384048"/>
+          </a:xfrm>
+          <a:prstGeom prst="rect">
+            <a:avLst/>
+          </a:prstGeom>
+          <a:solidFill>
+            <a:srgbClr val="0B2D5B"/>
+          </a:solidFill>
+          <a:ln>
+            <a:noFill/>
+          </a:ln>
+          <a:effectLst/>
+        </p:spPr>
+        <p:style>
+          <a:lnRef idx="1">
+            <a:schemeClr val="accent1"/>
+          </a:lnRef>
+          <a:fillRef idx="3">
+            <a:schemeClr val="accent1"/>
+          </a:fillRef>
+          <a:effectRef idx="2">
+            <a:schemeClr val="accent1"/>
+          </a:effectRef>
+          <a:fontRef idx="minor">
+            <a:schemeClr val="lt1"/>
+          </a:fontRef>
+        </p:style>
+        <p:txBody>
+          <a:bodyPr rtlCol="0" anchor="ctr"/>
+          <a:lstStyle/>
+          <a:p>
+            <a:pPr algn="ctr"/>
+          </a:p>
+        </p:txBody>
+      </p:sp>
+      <p:sp>
+        <p:nvSpPr>
+          <p:cNvPr id="3" name="TextBox 2"/>
+          <p:cNvSpPr txBox="1"/>
+          <p:nvPr/>
+        </p:nvSpPr>
+        <p:spPr>
+          <a:xfrm>
+            <a:off x="548640" y="100584"/>
+            <a:ext cx="10972800" cy="274320"/>
+          </a:xfrm>
+          <a:prstGeom prst="rect">
+            <a:avLst/>
+          </a:prstGeom>
+          <a:noFill/>
+        </p:spPr>
+        <p:txBody>
+          <a:bodyPr wrap="square" anchor="t" lIns="0" rIns="0" tIns="0" bIns="0">
+            <a:spAutoFit/>
+          </a:bodyPr>
+          <a:lstStyle/>
+          <a:p>
+            <a:pPr algn="l">
+              <a:spcAft>
+                <a:spcPts val="495"/>
+              </a:spcAft>
+            </a:pPr>
+            <a:r>
+              <a:rPr sz="1100" b="1" i="0">
+                <a:solidFill>
+                  <a:srgbClr val="FFFFFF"/>
+                </a:solidFill>
+                <a:latin typeface="Inter Tight"/>
+              </a:rPr>
+              <a:t>TEACHER PAGE  ·  skipped when you present  ·  Before you teach</a:t>
+            </a:r>
+          </a:p>
+        </p:txBody>
+      </p:sp>
+      <p:sp>
+        <p:nvSpPr>
+          <p:cNvPr id="4" name="TextBox 3"/>
+          <p:cNvSpPr txBox="1"/>
+          <p:nvPr/>
+        </p:nvSpPr>
+        <p:spPr>
+          <a:xfrm>
+            <a:off x="548640" y="685800"/>
+            <a:ext cx="10972800" cy="640080"/>
+          </a:xfrm>
+          <a:prstGeom prst="rect">
+            <a:avLst/>
+          </a:prstGeom>
+          <a:noFill/>
+        </p:spPr>
+        <p:txBody>
+          <a:bodyPr wrap="square" anchor="t" lIns="0" rIns="0" tIns="0" bIns="0">
+            <a:spAutoFit/>
+          </a:bodyPr>
+          <a:lstStyle/>
+          <a:p>
+            <a:pPr algn="l">
+              <a:spcAft>
+                <a:spcPts val="1350"/>
+              </a:spcAft>
+            </a:pPr>
+            <a:r>
+              <a:rPr sz="3000" b="1" i="0">
+                <a:solidFill>
+                  <a:srgbClr val="1C1B19"/>
+                </a:solidFill>
+                <a:latin typeface="Source Serif 4"/>
+              </a:rPr>
+              <a:t>Before you teach</a:t>
+            </a:r>
+          </a:p>
+        </p:txBody>
+      </p:sp>
+      <p:sp>
+        <p:nvSpPr>
+          <p:cNvPr id="5" name="TextBox 4"/>
+          <p:cNvSpPr txBox="1"/>
+          <p:nvPr/>
+        </p:nvSpPr>
+        <p:spPr>
+          <a:xfrm>
+            <a:off x="548640" y="1463040"/>
+            <a:ext cx="5394960" cy="4937760"/>
+          </a:xfrm>
+          <a:prstGeom prst="rect">
+            <a:avLst/>
+          </a:prstGeom>
+          <a:noFill/>
+        </p:spPr>
+        <p:txBody>
+          <a:bodyPr wrap="square" anchor="t" lIns="0" rIns="0" tIns="0" bIns="0">
+            <a:spAutoFit/>
+          </a:bodyPr>
+          <a:lstStyle/>
+          <a:p>
+            <a:pPr algn="l">
+              <a:spcAft>
+                <a:spcPts val="585"/>
+              </a:spcAft>
+            </a:pPr>
+            <a:r>
+              <a:rPr sz="1500" b="1" i="0">
+                <a:solidFill>
+                  <a:srgbClr val="1C1B19"/>
+                </a:solidFill>
+                <a:latin typeface="Source Serif 4"/>
+              </a:rPr>
+              <a:t>Grades still matter, and that's okay to say.</a:t>
+            </a:r>
+          </a:p>
+          <a:p>
+            <a:pPr algn="l">
+              <a:spcAft>
+                <a:spcPts val="585"/>
+              </a:spcAft>
+            </a:pPr>
+            <a:r>
+              <a:rPr sz="1300" b="0" i="0">
+                <a:solidFill>
+                  <a:srgbClr val="1C1B19"/>
+                </a:solidFill>
+                <a:latin typeface="Source Serif 4"/>
+              </a:rPr>
+              <a:t>This lesson isn't anti-grades or anti-college. Students who need scholarships, or whose families have sacrificed for their education, can feel judged by "stop grinding" talk. Frame it as making room for both.</a:t>
+            </a:r>
+          </a:p>
+          <a:p>
+            <a:pPr algn="l">
+              <a:spcAft>
+                <a:spcPts val="585"/>
+              </a:spcAft>
+            </a:pPr>
+            <a:r>
+              <a:rPr sz="1300" b="0" i="0">
+                <a:solidFill>
+                  <a:srgbClr val="1C1B19"/>
+                </a:solidFill>
+                <a:latin typeface="Source Serif 4"/>
+              </a:rPr>
+              <a:t/>
+            </a:r>
+          </a:p>
+          <a:p>
+            <a:pPr algn="l">
+              <a:spcAft>
+                <a:spcPts val="585"/>
+              </a:spcAft>
+            </a:pPr>
+            <a:r>
+              <a:rPr sz="1500" b="1" i="0">
+                <a:solidFill>
+                  <a:srgbClr val="1C1B19"/>
+                </a:solidFill>
+                <a:latin typeface="Source Serif 4"/>
+              </a:rPr>
+              <a:t>Don't ask about college lists or GPAs.</a:t>
+            </a:r>
+          </a:p>
+          <a:p>
+            <a:pPr algn="l">
+              <a:spcAft>
+                <a:spcPts val="585"/>
+              </a:spcAft>
+            </a:pPr>
+            <a:r>
+              <a:rPr sz="1300" b="0" i="0">
+                <a:solidFill>
+                  <a:srgbClr val="1C1B19"/>
+                </a:solidFill>
+                <a:latin typeface="Source Serif 4"/>
+              </a:rPr>
+              <a:t>Comparing in a small circle is exactly the pressure this lesson is about. Keep examples general and invented.</a:t>
+            </a:r>
+          </a:p>
+          <a:p>
+            <a:pPr algn="l">
+              <a:spcAft>
+                <a:spcPts val="585"/>
+              </a:spcAft>
+            </a:pPr>
+            <a:r>
+              <a:rPr sz="1300" b="0" i="0">
+                <a:solidFill>
+                  <a:srgbClr val="1C1B19"/>
+                </a:solidFill>
+                <a:latin typeface="Source Serif 4"/>
+              </a:rPr>
+              <a:t/>
+            </a:r>
+          </a:p>
+          <a:p>
+            <a:pPr algn="l">
+              <a:spcAft>
+                <a:spcPts val="585"/>
+              </a:spcAft>
+            </a:pPr>
+            <a:r>
+              <a:rPr sz="1500" b="1" i="0">
+                <a:solidFill>
+                  <a:srgbClr val="1C1B19"/>
+                </a:solidFill>
+                <a:latin typeface="Source Serif 4"/>
+              </a:rPr>
+              <a:t>Watch for students who are running on empty.</a:t>
+            </a:r>
+          </a:p>
+          <a:p>
+            <a:pPr algn="l">
+              <a:spcAft>
+                <a:spcPts val="585"/>
+              </a:spcAft>
+            </a:pPr>
+            <a:r>
+              <a:rPr sz="1300" b="0" i="0">
+                <a:solidFill>
+                  <a:srgbClr val="1C1B19"/>
+                </a:solidFill>
+                <a:latin typeface="Source Serif 4"/>
+              </a:rPr>
+              <a:t>Some students describe a schedule with no slack at all, little sleep, or feeling numb about things they used to enjoy. That's worth a quiet check-in after advisory and a same-day note to a counselor if it sounds serious. Disclosures go to a counselor. No screening questions in the group.</a:t>
+            </a:r>
+          </a:p>
+          <a:p>
+            <a:pPr algn="l">
+              <a:spcAft>
+                <a:spcPts val="585"/>
+              </a:spcAft>
+            </a:pPr>
+            <a:r>
+              <a:rPr sz="1300" b="0" i="0">
+                <a:solidFill>
+                  <a:srgbClr val="1C1B19"/>
+                </a:solidFill>
+                <a:latin typeface="Source Serif 4"/>
+              </a:rPr>
+              <a:t/>
+            </a:r>
+          </a:p>
+        </p:txBody>
+      </p:sp>
+      <p:sp>
+        <p:nvSpPr>
+          <p:cNvPr id="6" name="TextBox 5"/>
+          <p:cNvSpPr txBox="1"/>
+          <p:nvPr/>
+        </p:nvSpPr>
+        <p:spPr>
+          <a:xfrm>
+            <a:off x="6217920" y="1463040"/>
+            <a:ext cx="5394960" cy="4937760"/>
+          </a:xfrm>
+          <a:prstGeom prst="rect">
+            <a:avLst/>
+          </a:prstGeom>
+          <a:noFill/>
+        </p:spPr>
+        <p:txBody>
+          <a:bodyPr wrap="square" anchor="t" lIns="0" rIns="0" tIns="0" bIns="0">
+            <a:spAutoFit/>
+          </a:bodyPr>
+          <a:lstStyle/>
+          <a:p>
+            <a:pPr algn="l">
+              <a:spcAft>
+                <a:spcPts val="585"/>
+              </a:spcAft>
+            </a:pPr>
+            <a:r>
+              <a:rPr sz="1500" b="1" i="0">
+                <a:solidFill>
+                  <a:srgbClr val="1C1B19"/>
+                </a:solidFill>
+                <a:latin typeface="Source Serif 4"/>
+              </a:rPr>
+              <a:t>Curiosity can look different.</a:t>
+            </a:r>
+          </a:p>
+          <a:p>
+            <a:pPr algn="l">
+              <a:spcAft>
+                <a:spcPts val="585"/>
+              </a:spcAft>
+            </a:pPr>
+            <a:r>
+              <a:rPr sz="1300" b="0" i="0">
+                <a:solidFill>
+                  <a:srgbClr val="1C1B19"/>
+                </a:solidFill>
+                <a:latin typeface="Source Serif 4"/>
+              </a:rPr>
+              <a:t>For some students it's gaming lore, sneakers, cooking, a sport's stats, car repair, a faith question, or a younger sibling's homework. Treat all of it as real curiosity. The point is wanting to know, not the topic.</a:t>
+            </a:r>
+          </a:p>
+          <a:p>
+            <a:pPr algn="l">
+              <a:spcAft>
+                <a:spcPts val="585"/>
+              </a:spcAft>
+            </a:pPr>
+            <a:r>
+              <a:rPr sz="1300" b="0" i="0">
+                <a:solidFill>
+                  <a:srgbClr val="1C1B19"/>
+                </a:solidFill>
+                <a:latin typeface="Source Serif 4"/>
+              </a:rPr>
+              <a:t/>
+            </a:r>
+          </a:p>
+          <a:p>
+            <a:pPr algn="l">
+              <a:spcAft>
+                <a:spcPts val="585"/>
+              </a:spcAft>
+            </a:pPr>
+            <a:r>
+              <a:rPr sz="1500" b="1" i="0">
+                <a:solidFill>
+                  <a:srgbClr val="1C1B19"/>
+                </a:solidFill>
+                <a:latin typeface="Source Serif 4"/>
+              </a:rPr>
+              <a:t>Be honest about admissions.</a:t>
+            </a:r>
+          </a:p>
+          <a:p>
+            <a:pPr algn="l">
+              <a:spcAft>
+                <a:spcPts val="585"/>
+              </a:spcAft>
+            </a:pPr>
+            <a:r>
+              <a:rPr sz="1300" b="0" i="0">
+                <a:solidFill>
+                  <a:srgbClr val="1C1B19"/>
+                </a:solidFill>
+                <a:latin typeface="Source Serif 4"/>
+              </a:rPr>
+              <a:t>Say what the evidence supports: many admissions deans endorsed the Turning the Tide report asking for depth and genuine interest over long lists. Don't promise that curiosity gets anyone into a particular school.</a:t>
+            </a:r>
+          </a:p>
+          <a:p>
+            <a:pPr algn="l">
+              <a:spcAft>
+                <a:spcPts val="585"/>
+              </a:spcAft>
+            </a:pPr>
+            <a:r>
+              <a:rPr sz="1300" b="0" i="0">
+                <a:solidFill>
+                  <a:srgbClr val="1C1B19"/>
+                </a:solidFill>
+                <a:latin typeface="Source Serif 4"/>
+              </a:rPr>
+              <a:t/>
+            </a:r>
+          </a:p>
+          <a:p>
+            <a:pPr algn="l">
+              <a:spcAft>
+                <a:spcPts val="585"/>
+              </a:spcAft>
+            </a:pPr>
+            <a:r>
+              <a:rPr sz="1500" b="1" i="0">
+                <a:solidFill>
+                  <a:srgbClr val="1C1B19"/>
+                </a:solidFill>
+                <a:latin typeface="Source Serif 4"/>
+              </a:rPr>
+              <a:t>Model it.</a:t>
+            </a:r>
+          </a:p>
+          <a:p>
+            <a:pPr algn="l">
+              <a:spcAft>
+                <a:spcPts val="585"/>
+              </a:spcAft>
+            </a:pPr>
+            <a:r>
+              <a:rPr sz="1300" b="0" i="0">
+                <a:solidFill>
+                  <a:srgbClr val="1C1B19"/>
+                </a:solidFill>
+                <a:latin typeface="Source Serif 4"/>
+              </a:rPr>
+              <a:t>Share one thing you got curious about recently, outside your subject. Students take the permission more seriously when an adult goes first.</a:t>
+            </a:r>
+          </a:p>
+          <a:p>
+            <a:pPr algn="l">
+              <a:spcAft>
+                <a:spcPts val="585"/>
+              </a:spcAft>
+            </a:pPr>
+            <a:r>
+              <a:rPr sz="1300" b="0" i="0">
+                <a:solidFill>
+                  <a:srgbClr val="1C1B19"/>
+                </a:solidFill>
+                <a:latin typeface="Source Serif 4"/>
+              </a:rPr>
+              <a:t/>
+            </a:r>
+          </a:p>
+        </p:txBody>
+      </p:sp>
+    </p:spTree>
+  </p:cSld>
+  <p:clrMapOvr>
+    <a:masterClrMapping/>
+  </p:clrMapOvr>
+</p:sld>
+</file>
+
+<file path=ppt/slides/slide11.xml><?xml version="1.0" encoding="utf-8"?>
+<p:sld xmlns:a="http://schemas.openxmlformats.org/drawingml/2006/main" xmlns:p="http://schemas.openxmlformats.org/presentationml/2006/main" xmlns:r="http://schemas.openxmlformats.org/officeDocument/2006/relationships" show="0">
+  <p:cSld>
+    <p:bg>
+      <p:bgPr>
+        <a:solidFill>
+          <a:srgbClr val="EEEBE4"/>
+        </a:solidFill>
+        <a:effectLst/>
+      </p:bgPr>
+    </p:bg>
+    <p:spTree>
+      <p:nvGrpSpPr>
+        <p:cNvPr id="1" name=""/>
+        <p:cNvGrpSpPr/>
+        <p:nvPr/>
+      </p:nvGrpSpPr>
+      <p:grpSpPr/>
+      <p:sp>
+        <p:nvSpPr>
+          <p:cNvPr id="2" name="Rectangle 1"/>
+          <p:cNvSpPr/>
+          <p:nvPr/>
+        </p:nvSpPr>
+        <p:spPr>
+          <a:xfrm>
+            <a:off x="0" y="0"/>
+            <a:ext cx="12191695" cy="384048"/>
+          </a:xfrm>
+          <a:prstGeom prst="rect">
+            <a:avLst/>
+          </a:prstGeom>
+          <a:solidFill>
+            <a:srgbClr val="0B2D5B"/>
+          </a:solidFill>
+          <a:ln>
+            <a:noFill/>
+          </a:ln>
+          <a:effectLst/>
+        </p:spPr>
+        <p:style>
+          <a:lnRef idx="1">
+            <a:schemeClr val="accent1"/>
+          </a:lnRef>
+          <a:fillRef idx="3">
+            <a:schemeClr val="accent1"/>
+          </a:fillRef>
+          <a:effectRef idx="2">
+            <a:schemeClr val="accent1"/>
+          </a:effectRef>
+          <a:fontRef idx="minor">
+            <a:schemeClr val="lt1"/>
+          </a:fontRef>
+        </p:style>
+        <p:txBody>
+          <a:bodyPr rtlCol="0" anchor="ctr"/>
+          <a:lstStyle/>
+          <a:p>
+            <a:pPr algn="ctr"/>
+          </a:p>
+        </p:txBody>
+      </p:sp>
+      <p:sp>
+        <p:nvSpPr>
+          <p:cNvPr id="3" name="TextBox 2"/>
+          <p:cNvSpPr txBox="1"/>
+          <p:nvPr/>
+        </p:nvSpPr>
+        <p:spPr>
+          <a:xfrm>
+            <a:off x="548640" y="100584"/>
+            <a:ext cx="10972800" cy="274320"/>
+          </a:xfrm>
+          <a:prstGeom prst="rect">
+            <a:avLst/>
+          </a:prstGeom>
+          <a:noFill/>
+        </p:spPr>
+        <p:txBody>
+          <a:bodyPr wrap="square" anchor="t" lIns="0" rIns="0" tIns="0" bIns="0">
+            <a:spAutoFit/>
+          </a:bodyPr>
+          <a:lstStyle/>
+          <a:p>
+            <a:pPr algn="l">
+              <a:spcAft>
+                <a:spcPts val="495"/>
+              </a:spcAft>
+            </a:pPr>
+            <a:r>
+              <a:rPr sz="1100" b="1" i="0">
+                <a:solidFill>
+                  <a:srgbClr val="FFFFFF"/>
+                </a:solidFill>
+                <a:latin typeface="Inter Tight"/>
+              </a:rPr>
+              <a:t>TEACHER PAGE  ·  skipped when you present  ·  Every student in the room</a:t>
+            </a:r>
+          </a:p>
+        </p:txBody>
+      </p:sp>
+      <p:sp>
+        <p:nvSpPr>
+          <p:cNvPr id="4" name="TextBox 3"/>
+          <p:cNvSpPr txBox="1"/>
+          <p:nvPr/>
+        </p:nvSpPr>
+        <p:spPr>
+          <a:xfrm>
+            <a:off x="548640" y="685800"/>
+            <a:ext cx="10972800" cy="640080"/>
+          </a:xfrm>
+          <a:prstGeom prst="rect">
+            <a:avLst/>
+          </a:prstGeom>
+          <a:noFill/>
+        </p:spPr>
+        <p:txBody>
+          <a:bodyPr wrap="square" anchor="t" lIns="0" rIns="0" tIns="0" bIns="0">
+            <a:spAutoFit/>
+          </a:bodyPr>
+          <a:lstStyle/>
+          <a:p>
+            <a:pPr algn="l">
+              <a:spcAft>
+                <a:spcPts val="1350"/>
+              </a:spcAft>
+            </a:pPr>
+            <a:r>
+              <a:rPr sz="3000" b="1" i="0">
+                <a:solidFill>
+                  <a:srgbClr val="1C1B19"/>
+                </a:solidFill>
+                <a:latin typeface="Source Serif 4"/>
+              </a:rPr>
+              <a:t>Every student in the room</a:t>
+            </a:r>
+          </a:p>
+        </p:txBody>
+      </p:sp>
+      <p:sp>
+        <p:nvSpPr>
+          <p:cNvPr id="5" name="TextBox 4"/>
+          <p:cNvSpPr txBox="1"/>
+          <p:nvPr/>
+        </p:nvSpPr>
+        <p:spPr>
+          <a:xfrm>
+            <a:off x="548640" y="1325880"/>
+            <a:ext cx="10972800" cy="365760"/>
+          </a:xfrm>
+          <a:prstGeom prst="rect">
+            <a:avLst/>
+          </a:prstGeom>
+          <a:noFill/>
+        </p:spPr>
+        <p:txBody>
+          <a:bodyPr wrap="square" anchor="t" lIns="0" rIns="0" tIns="0" bIns="0">
+            <a:spAutoFit/>
+          </a:bodyPr>
+          <a:lstStyle/>
+          <a:p>
+            <a:pPr algn="l">
+              <a:spcAft>
+                <a:spcPts val="630"/>
+              </a:spcAft>
+            </a:pPr>
+            <a:r>
+              <a:rPr sz="1400" b="0" i="0">
+                <a:solidFill>
+                  <a:srgbClr val="5D5A54"/>
+                </a:solidFill>
+                <a:latin typeface="Inter Tight"/>
+              </a:rPr>
+              <a:t>Culture, family, identity, ability and money: what to keep in mind for this topic.</a:t>
+            </a:r>
+          </a:p>
+        </p:txBody>
+      </p:sp>
+      <p:sp>
+        <p:nvSpPr>
+          <p:cNvPr id="6" name="TextBox 5"/>
+          <p:cNvSpPr txBox="1"/>
+          <p:nvPr/>
+        </p:nvSpPr>
+        <p:spPr>
+          <a:xfrm>
+            <a:off x="548640" y="1828800"/>
+            <a:ext cx="5394960" cy="4572000"/>
+          </a:xfrm>
+          <a:prstGeom prst="rect">
+            <a:avLst/>
+          </a:prstGeom>
+          <a:noFill/>
+        </p:spPr>
+        <p:txBody>
+          <a:bodyPr wrap="square" anchor="t" lIns="0" rIns="0" tIns="0" bIns="0">
+            <a:spAutoFit/>
+          </a:bodyPr>
+          <a:lstStyle/>
+          <a:p>
+            <a:pPr algn="l">
+              <a:spcAft>
+                <a:spcPts val="585"/>
+              </a:spcAft>
+            </a:pPr>
+            <a:r>
+              <a:rPr sz="1500" b="1" i="0">
+                <a:solidFill>
+                  <a:srgbClr val="1C1B19"/>
+                </a:solidFill>
+                <a:latin typeface="Source Serif 4"/>
+              </a:rPr>
+              <a:t>Money and time aren't equal.</a:t>
+            </a:r>
+          </a:p>
+          <a:p>
+            <a:pPr algn="l">
+              <a:spcAft>
+                <a:spcPts val="585"/>
+              </a:spcAft>
+            </a:pPr>
+            <a:r>
+              <a:rPr sz="1300" b="0" i="0">
+                <a:solidFill>
+                  <a:srgbClr val="1C1B19"/>
+                </a:solidFill>
+                <a:latin typeface="Source Serif 4"/>
+              </a:rPr>
+              <a:t>Some students work after school, care for siblings, or can't afford camps and lessons. Curiosity doesn't need money: a library card, a question list, a free online course, a conversation with a grandparent. Keep every suggestion free.</a:t>
+            </a:r>
+          </a:p>
+          <a:p>
+            <a:pPr algn="l">
+              <a:spcAft>
+                <a:spcPts val="585"/>
+              </a:spcAft>
+            </a:pPr>
+            <a:r>
+              <a:rPr sz="1300" b="0" i="0">
+                <a:solidFill>
+                  <a:srgbClr val="1C1B19"/>
+                </a:solidFill>
+                <a:latin typeface="Source Serif 4"/>
+              </a:rPr>
+              <a:t/>
+            </a:r>
+          </a:p>
+          <a:p>
+            <a:pPr algn="l">
+              <a:spcAft>
+                <a:spcPts val="585"/>
+              </a:spcAft>
+            </a:pPr>
+            <a:r>
+              <a:rPr sz="1500" b="1" i="0">
+                <a:solidFill>
+                  <a:srgbClr val="1C1B19"/>
+                </a:solidFill>
+                <a:latin typeface="Source Serif 4"/>
+              </a:rPr>
+              <a:t>Family expectations vary.</a:t>
+            </a:r>
+          </a:p>
+          <a:p>
+            <a:pPr algn="l">
+              <a:spcAft>
+                <a:spcPts val="585"/>
+              </a:spcAft>
+            </a:pPr>
+            <a:r>
+              <a:rPr sz="1300" b="0" i="0">
+                <a:solidFill>
+                  <a:srgbClr val="1C1B19"/>
+                </a:solidFill>
+                <a:latin typeface="Source Serif 4"/>
+              </a:rPr>
+              <a:t>In some families, academic achievement is how love and sacrifice get honored. Don't set curiosity against family. Say students can carry both, and that a counselor can help with a family conversation if they want one.</a:t>
+            </a:r>
+          </a:p>
+          <a:p>
+            <a:pPr algn="l">
+              <a:spcAft>
+                <a:spcPts val="585"/>
+              </a:spcAft>
+            </a:pPr>
+            <a:r>
+              <a:rPr sz="1300" b="0" i="0">
+                <a:solidFill>
+                  <a:srgbClr val="1C1B19"/>
+                </a:solidFill>
+                <a:latin typeface="Source Serif 4"/>
+              </a:rPr>
+              <a:t/>
+            </a:r>
+          </a:p>
+          <a:p>
+            <a:pPr algn="l">
+              <a:spcAft>
+                <a:spcPts val="585"/>
+              </a:spcAft>
+            </a:pPr>
+            <a:r>
+              <a:rPr sz="1500" b="1" i="0">
+                <a:solidFill>
+                  <a:srgbClr val="1C1B19"/>
+                </a:solidFill>
+                <a:latin typeface="Source Serif 4"/>
+              </a:rPr>
+              <a:t>Not every family has one path.</a:t>
+            </a:r>
+          </a:p>
+          <a:p>
+            <a:pPr algn="l">
+              <a:spcAft>
+                <a:spcPts val="585"/>
+              </a:spcAft>
+            </a:pPr>
+            <a:r>
+              <a:rPr sz="1300" b="0" i="0">
+                <a:solidFill>
+                  <a:srgbClr val="1C1B19"/>
+                </a:solidFill>
+                <a:latin typeface="Source Serif 4"/>
+              </a:rPr>
+              <a:t>Some students are headed to college, some to work, the military, a trade, or a family business. Curiosity matters for all of them. Avoid making college the only finish line in your examples.</a:t>
+            </a:r>
+          </a:p>
+          <a:p>
+            <a:pPr algn="l">
+              <a:spcAft>
+                <a:spcPts val="585"/>
+              </a:spcAft>
+            </a:pPr>
+            <a:r>
+              <a:rPr sz="1300" b="0" i="0">
+                <a:solidFill>
+                  <a:srgbClr val="1C1B19"/>
+                </a:solidFill>
+                <a:latin typeface="Source Serif 4"/>
+              </a:rPr>
+              <a:t/>
+            </a:r>
+          </a:p>
+        </p:txBody>
+      </p:sp>
+      <p:sp>
+        <p:nvSpPr>
+          <p:cNvPr id="7" name="TextBox 6"/>
+          <p:cNvSpPr txBox="1"/>
+          <p:nvPr/>
+        </p:nvSpPr>
+        <p:spPr>
+          <a:xfrm>
+            <a:off x="6217920" y="1828800"/>
+            <a:ext cx="5394960" cy="4572000"/>
+          </a:xfrm>
+          <a:prstGeom prst="rect">
+            <a:avLst/>
+          </a:prstGeom>
+          <a:noFill/>
+        </p:spPr>
+        <p:txBody>
+          <a:bodyPr wrap="square" anchor="t" lIns="0" rIns="0" tIns="0" bIns="0">
+            <a:spAutoFit/>
+          </a:bodyPr>
+          <a:lstStyle/>
+          <a:p>
+            <a:pPr algn="l">
+              <a:spcAft>
+                <a:spcPts val="585"/>
+              </a:spcAft>
+            </a:pPr>
+            <a:r>
+              <a:rPr sz="1500" b="1" i="0">
+                <a:solidFill>
+                  <a:srgbClr val="1C1B19"/>
+                </a:solidFill>
+                <a:latin typeface="Source Serif 4"/>
+              </a:rPr>
+              <a:t>Neurodivergent students.</a:t>
+            </a:r>
+          </a:p>
+          <a:p>
+            <a:pPr algn="l">
+              <a:spcAft>
+                <a:spcPts val="585"/>
+              </a:spcAft>
+            </a:pPr>
+            <a:r>
+              <a:rPr sz="1300" b="0" i="0">
+                <a:solidFill>
+                  <a:srgbClr val="1C1B19"/>
+                </a:solidFill>
+                <a:latin typeface="Source Serif 4"/>
+              </a:rPr>
+              <a:t>Students with ADHD often have intense, deep interests that school treats as distractions. Name those interests as curiosity. Students with a learning plan may already spend extra hours on schoolwork; protecting free time matters even more for them.</a:t>
+            </a:r>
+          </a:p>
+          <a:p>
+            <a:pPr algn="l">
+              <a:spcAft>
+                <a:spcPts val="585"/>
+              </a:spcAft>
+            </a:pPr>
+            <a:r>
+              <a:rPr sz="1300" b="0" i="0">
+                <a:solidFill>
+                  <a:srgbClr val="1C1B19"/>
+                </a:solidFill>
+                <a:latin typeface="Source Serif 4"/>
+              </a:rPr>
+              <a:t/>
+            </a:r>
+          </a:p>
+          <a:p>
+            <a:pPr algn="l">
+              <a:spcAft>
+                <a:spcPts val="585"/>
+              </a:spcAft>
+            </a:pPr>
+            <a:r>
+              <a:rPr sz="1500" b="1" i="0">
+                <a:solidFill>
+                  <a:srgbClr val="1C1B19"/>
+                </a:solidFill>
+                <a:latin typeface="Source Serif 4"/>
+              </a:rPr>
+              <a:t>Identity and belonging.</a:t>
+            </a:r>
+          </a:p>
+          <a:p>
+            <a:pPr algn="l">
+              <a:spcAft>
+                <a:spcPts val="585"/>
+              </a:spcAft>
+            </a:pPr>
+            <a:r>
+              <a:rPr sz="1300" b="0" i="0">
+                <a:solidFill>
+                  <a:srgbClr val="1C1B19"/>
+                </a:solidFill>
+                <a:latin typeface="Source Serif 4"/>
+              </a:rPr>
+              <a:t>Students of color, LGBTQ+ students, and students new to the country may follow curiosity about their own history, language or community. Treat that as real intellectual curiosity, not a side interest.</a:t>
+            </a:r>
+          </a:p>
+          <a:p>
+            <a:pPr algn="l">
+              <a:spcAft>
+                <a:spcPts val="585"/>
+              </a:spcAft>
+            </a:pPr>
+            <a:r>
+              <a:rPr sz="1300" b="0" i="0">
+                <a:solidFill>
+                  <a:srgbClr val="1C1B19"/>
+                </a:solidFill>
+                <a:latin typeface="Source Serif 4"/>
+              </a:rPr>
+              <a:t/>
+            </a:r>
+          </a:p>
+          <a:p>
+            <a:pPr algn="l">
+              <a:spcAft>
+                <a:spcPts val="585"/>
+              </a:spcAft>
+            </a:pPr>
+            <a:r>
+              <a:rPr sz="1500" b="1" i="0">
+                <a:solidFill>
+                  <a:srgbClr val="1C1B19"/>
+                </a:solidFill>
+                <a:latin typeface="Source Serif 4"/>
+              </a:rPr>
+              <a:t>Language.</a:t>
+            </a:r>
+          </a:p>
+          <a:p>
+            <a:pPr algn="l">
+              <a:spcAft>
+                <a:spcPts val="585"/>
+              </a:spcAft>
+            </a:pPr>
+            <a:r>
+              <a:rPr sz="1300" b="0" i="0">
+                <a:solidFill>
+                  <a:srgbClr val="1C1B19"/>
+                </a:solidFill>
+                <a:latin typeface="Source Serif 4"/>
+              </a:rPr>
+              <a:t>English learners may be curious about plenty and quiet in English. Let them write their rabbit-hole card in any language, or draw it.</a:t>
+            </a:r>
+          </a:p>
+          <a:p>
+            <a:pPr algn="l">
+              <a:spcAft>
+                <a:spcPts val="585"/>
+              </a:spcAft>
+            </a:pPr>
+            <a:r>
+              <a:rPr sz="1300" b="0" i="0">
+                <a:solidFill>
+                  <a:srgbClr val="1C1B19"/>
+                </a:solidFill>
+                <a:latin typeface="Source Serif 4"/>
+              </a:rPr>
+              <a:t/>
+            </a:r>
+          </a:p>
+        </p:txBody>
+      </p:sp>
+    </p:spTree>
+  </p:cSld>
+  <p:clrMapOvr>
+    <a:masterClrMapping/>
+  </p:clrMapOvr>
+</p:sld>
+</file>
+
+<file path=ppt/slides/slide12.xml><?xml version="1.0" encoding="utf-8"?>
+<p:sld xmlns:a="http://schemas.openxmlformats.org/drawingml/2006/main" xmlns:p="http://schemas.openxmlformats.org/presentationml/2006/main" xmlns:r="http://schemas.openxmlformats.org/officeDocument/2006/relationships" show="0">
+  <p:cSld>
+    <p:bg>
+      <p:bgPr>
+        <a:solidFill>
+          <a:srgbClr val="EEEBE4"/>
+        </a:solidFill>
+        <a:effectLst/>
+      </p:bgPr>
+    </p:bg>
+    <p:spTree>
+      <p:nvGrpSpPr>
+        <p:cNvPr id="1" name=""/>
+        <p:cNvGrpSpPr/>
+        <p:nvPr/>
+      </p:nvGrpSpPr>
+      <p:grpSpPr/>
+      <p:sp>
+        <p:nvSpPr>
+          <p:cNvPr id="2" name="Rectangle 1"/>
+          <p:cNvSpPr/>
+          <p:nvPr/>
+        </p:nvSpPr>
+        <p:spPr>
+          <a:xfrm>
+            <a:off x="0" y="0"/>
+            <a:ext cx="12191695" cy="384048"/>
+          </a:xfrm>
+          <a:prstGeom prst="rect">
+            <a:avLst/>
+          </a:prstGeom>
+          <a:solidFill>
+            <a:srgbClr val="0B2D5B"/>
+          </a:solidFill>
+          <a:ln>
+            <a:noFill/>
+          </a:ln>
+          <a:effectLst/>
+        </p:spPr>
+        <p:style>
+          <a:lnRef idx="1">
+            <a:schemeClr val="accent1"/>
+          </a:lnRef>
+          <a:fillRef idx="3">
+            <a:schemeClr val="accent1"/>
+          </a:fillRef>
+          <a:effectRef idx="2">
+            <a:schemeClr val="accent1"/>
+          </a:effectRef>
+          <a:fontRef idx="minor">
+            <a:schemeClr val="lt1"/>
+          </a:fontRef>
+        </p:style>
+        <p:txBody>
+          <a:bodyPr rtlCol="0" anchor="ctr"/>
+          <a:lstStyle/>
+          <a:p>
+            <a:pPr algn="ctr"/>
+          </a:p>
+        </p:txBody>
+      </p:sp>
+      <p:sp>
+        <p:nvSpPr>
+          <p:cNvPr id="3" name="TextBox 2"/>
+          <p:cNvSpPr txBox="1"/>
+          <p:nvPr/>
+        </p:nvSpPr>
+        <p:spPr>
+          <a:xfrm>
+            <a:off x="548640" y="100584"/>
+            <a:ext cx="10972800" cy="274320"/>
+          </a:xfrm>
+          <a:prstGeom prst="rect">
+            <a:avLst/>
+          </a:prstGeom>
+          <a:noFill/>
+        </p:spPr>
+        <p:txBody>
+          <a:bodyPr wrap="square" anchor="t" lIns="0" rIns="0" tIns="0" bIns="0">
+            <a:spAutoFit/>
+          </a:bodyPr>
+          <a:lstStyle/>
+          <a:p>
+            <a:pPr algn="l">
+              <a:spcAft>
+                <a:spcPts val="495"/>
+              </a:spcAft>
+            </a:pPr>
+            <a:r>
+              <a:rPr sz="1100" b="1" i="0">
+                <a:solidFill>
+                  <a:srgbClr val="FFFFFF"/>
+                </a:solidFill>
+                <a:latin typeface="Inter Tight"/>
+              </a:rPr>
+              <a:t>TEACHER PAGE  ·  skipped when you present  ·  Background</a:t>
+            </a:r>
+          </a:p>
+        </p:txBody>
+      </p:sp>
+      <p:sp>
+        <p:nvSpPr>
+          <p:cNvPr id="4" name="TextBox 3"/>
+          <p:cNvSpPr txBox="1"/>
+          <p:nvPr/>
+        </p:nvSpPr>
+        <p:spPr>
+          <a:xfrm>
+            <a:off x="548640" y="685800"/>
+            <a:ext cx="10972800" cy="640080"/>
+          </a:xfrm>
+          <a:prstGeom prst="rect">
+            <a:avLst/>
+          </a:prstGeom>
+          <a:noFill/>
+        </p:spPr>
+        <p:txBody>
+          <a:bodyPr wrap="square" anchor="t" lIns="0" rIns="0" tIns="0" bIns="0">
+            <a:spAutoFit/>
+          </a:bodyPr>
+          <a:lstStyle/>
+          <a:p>
+            <a:pPr algn="l">
+              <a:spcAft>
+                <a:spcPts val="1350"/>
+              </a:spcAft>
+            </a:pPr>
+            <a:r>
+              <a:rPr sz="3000" b="1" i="0">
+                <a:solidFill>
+                  <a:srgbClr val="1C1B19"/>
+                </a:solidFill>
+                <a:latin typeface="Source Serif 4"/>
+              </a:rPr>
+              <a:t>What the research says</a:t>
+            </a:r>
+          </a:p>
+        </p:txBody>
+      </p:sp>
+      <p:sp>
+        <p:nvSpPr>
+          <p:cNvPr id="5" name="TextBox 4"/>
+          <p:cNvSpPr txBox="1"/>
+          <p:nvPr/>
+        </p:nvSpPr>
+        <p:spPr>
+          <a:xfrm>
+            <a:off x="548640" y="1463040"/>
+            <a:ext cx="5394960" cy="4937760"/>
+          </a:xfrm>
+          <a:prstGeom prst="rect">
+            <a:avLst/>
+          </a:prstGeom>
+          <a:noFill/>
+        </p:spPr>
+        <p:txBody>
+          <a:bodyPr wrap="square" anchor="t" lIns="0" rIns="0" tIns="0" bIns="0">
+            <a:spAutoFit/>
+          </a:bodyPr>
+          <a:lstStyle/>
+          <a:p>
+            <a:pPr algn="l">
+              <a:spcAft>
+                <a:spcPts val="585"/>
+              </a:spcAft>
+            </a:pPr>
+            <a:r>
+              <a:rPr sz="1300" b="0" i="0">
+                <a:solidFill>
+                  <a:srgbClr val="1C1B19"/>
+                </a:solidFill>
+                <a:latin typeface="Source Serif 4"/>
+              </a:rPr>
+              <a:t>When people were curious about a trivia question, they remembered the answer better, and also remembered unrelated faces shown while they were curious. Brain scans showed the reward and memory systems working together.</a:t>
+            </a:r>
+          </a:p>
+          <a:p>
+            <a:pPr algn="l">
+              <a:spcAft>
+                <a:spcPts val="585"/>
+              </a:spcAft>
+            </a:pPr>
+            <a:r>
+              <a:rPr sz="1050" b="0" i="0">
+                <a:solidFill>
+                  <a:srgbClr val="5D5A54"/>
+                </a:solidFill>
+                <a:latin typeface="Inter Tight"/>
+              </a:rPr>
+              <a:t>Gruber, Gelman &amp; Ranganath, Neuron, 2014</a:t>
+            </a:r>
+          </a:p>
+          <a:p>
+            <a:pPr algn="l">
+              <a:spcAft>
+                <a:spcPts val="585"/>
+              </a:spcAft>
+            </a:pPr>
+            <a:r>
+              <a:rPr sz="1300" b="0" i="0">
+                <a:solidFill>
+                  <a:srgbClr val="1C1B19"/>
+                </a:solidFill>
+                <a:latin typeface="Source Serif 4"/>
+              </a:rPr>
+              <a:t>In a meta-analysis, intellectual curiosity predicted academic performance about as strongly as conscientiousness, on top of intelligence.</a:t>
+            </a:r>
+          </a:p>
+          <a:p>
+            <a:pPr algn="l">
+              <a:spcAft>
+                <a:spcPts val="585"/>
+              </a:spcAft>
+            </a:pPr>
+            <a:r>
+              <a:rPr sz="1050" b="0" i="0">
+                <a:solidFill>
+                  <a:srgbClr val="5D5A54"/>
+                </a:solidFill>
+                <a:latin typeface="Inter Tight"/>
+              </a:rPr>
+              <a:t>von Stumm, Hell &amp; Chamorro-Premuzic, Perspectives on Psychological Science, 2011</a:t>
+            </a:r>
+          </a:p>
+          <a:p>
+            <a:pPr algn="l">
+              <a:spcAft>
+                <a:spcPts val="585"/>
+              </a:spcAft>
+            </a:pPr>
+            <a:r>
+              <a:rPr sz="1300" b="0" i="0">
+                <a:solidFill>
+                  <a:srgbClr val="1C1B19"/>
+                </a:solidFill>
+                <a:latin typeface="Source Serif 4"/>
+              </a:rPr>
+              <a:t>Adolescence is a period of heightened sensitivity to novelty and reward and flexible goal pursuit, which researchers describe as an opportunity for learning and exploration.</a:t>
+            </a:r>
+          </a:p>
+          <a:p>
+            <a:pPr algn="l">
+              <a:spcAft>
+                <a:spcPts val="585"/>
+              </a:spcAft>
+            </a:pPr>
+            <a:r>
+              <a:rPr sz="1050" b="0" i="0">
+                <a:solidFill>
+                  <a:srgbClr val="5D5A54"/>
+                </a:solidFill>
+                <a:latin typeface="Inter Tight"/>
+              </a:rPr>
+              <a:t>Crone &amp; Dahl, Nature Reviews Neuroscience, 2012; Dahl et al., Nature, 2018</a:t>
+            </a:r>
+          </a:p>
+          <a:p>
+            <a:pPr algn="l">
+              <a:spcAft>
+                <a:spcPts val="585"/>
+              </a:spcAft>
+            </a:pPr>
+            <a:r>
+              <a:rPr sz="1300" b="0" i="0">
+                <a:solidFill>
+                  <a:srgbClr val="1C1B19"/>
+                </a:solidFill>
+                <a:latin typeface="Source Serif 4"/>
+              </a:rPr>
+              <a:t>Students at high-pressure schools often describe "doing school": managing grades and activities in ways that crowd out engagement and learning.</a:t>
+            </a:r>
+          </a:p>
+          <a:p>
+            <a:pPr algn="l">
+              <a:spcAft>
+                <a:spcPts val="585"/>
+              </a:spcAft>
+            </a:pPr>
+            <a:r>
+              <a:rPr sz="1050" b="0" i="0">
+                <a:solidFill>
+                  <a:srgbClr val="5D5A54"/>
+                </a:solidFill>
+                <a:latin typeface="Inter Tight"/>
+              </a:rPr>
+              <a:t>Pope, "Doing School", Yale University Press, 2001</a:t>
+            </a:r>
+          </a:p>
+        </p:txBody>
+      </p:sp>
+      <p:sp>
+        <p:nvSpPr>
+          <p:cNvPr id="6" name="TextBox 5"/>
+          <p:cNvSpPr txBox="1"/>
+          <p:nvPr/>
+        </p:nvSpPr>
+        <p:spPr>
+          <a:xfrm>
+            <a:off x="6217920" y="1463040"/>
+            <a:ext cx="5394960" cy="4937760"/>
+          </a:xfrm>
+          <a:prstGeom prst="rect">
+            <a:avLst/>
+          </a:prstGeom>
+          <a:noFill/>
+        </p:spPr>
+        <p:txBody>
+          <a:bodyPr wrap="square" anchor="t" lIns="0" rIns="0" tIns="0" bIns="0">
+            <a:spAutoFit/>
+          </a:bodyPr>
+          <a:lstStyle/>
+          <a:p>
+            <a:pPr algn="l">
+              <a:spcAft>
+                <a:spcPts val="585"/>
+              </a:spcAft>
+            </a:pPr>
+            <a:r>
+              <a:rPr sz="1300" b="0" i="0">
+                <a:solidFill>
+                  <a:srgbClr val="1C1B19"/>
+                </a:solidFill>
+                <a:latin typeface="Source Serif 4"/>
+              </a:rPr>
+              <a:t>Students at high-achieving schools have been identified as an at-risk group, with higher rates of anxiety, depression and substance use than national norms, linked partly to achievement pressure.</a:t>
+            </a:r>
+          </a:p>
+          <a:p>
+            <a:pPr algn="l">
+              <a:spcAft>
+                <a:spcPts val="585"/>
+              </a:spcAft>
+            </a:pPr>
+            <a:r>
+              <a:rPr sz="1050" b="0" i="0">
+                <a:solidFill>
+                  <a:srgbClr val="5D5A54"/>
+                </a:solidFill>
+                <a:latin typeface="Inter Tight"/>
+              </a:rPr>
+              <a:t>Luthar, Kumar &amp; Zillmer, American Psychologist, 2020</a:t>
+            </a:r>
+          </a:p>
+          <a:p>
+            <a:pPr algn="l">
+              <a:spcAft>
+                <a:spcPts val="585"/>
+              </a:spcAft>
+            </a:pPr>
+            <a:r>
+              <a:rPr sz="1300" b="0" i="0">
+                <a:solidFill>
+                  <a:srgbClr val="1C1B19"/>
+                </a:solidFill>
+                <a:latin typeface="Source Serif 4"/>
+              </a:rPr>
+              <a:t>A report endorsed by dozens of college admissions deans urged admissions to value meaningful, sustained engagement over long activity lists.</a:t>
+            </a:r>
+          </a:p>
+          <a:p>
+            <a:pPr algn="l">
+              <a:spcAft>
+                <a:spcPts val="585"/>
+              </a:spcAft>
+            </a:pPr>
+            <a:r>
+              <a:rPr sz="1050" b="0" i="0">
+                <a:solidFill>
+                  <a:srgbClr val="5D5A54"/>
+                </a:solidFill>
+                <a:latin typeface="Inter Tight"/>
+              </a:rPr>
+              <a:t>Making Caring Common, Harvard Graduate School of Education, Turning the Tide, 2016</a:t>
+            </a:r>
+          </a:p>
+          <a:p>
+            <a:pPr algn="l">
+              <a:spcAft>
+                <a:spcPts val="585"/>
+              </a:spcAft>
+            </a:pPr>
+            <a:r>
+              <a:rPr sz="1300" b="0" i="0">
+                <a:solidFill>
+                  <a:srgbClr val="1C1B19"/>
+                </a:solidFill>
+                <a:latin typeface="Source Serif 4"/>
+              </a:rPr>
+              <a:t>Teens build initiative most in voluntary activities they care about, where they are focused and motivated at the same time.</a:t>
+            </a:r>
+          </a:p>
+          <a:p>
+            <a:pPr algn="l">
+              <a:spcAft>
+                <a:spcPts val="585"/>
+              </a:spcAft>
+            </a:pPr>
+            <a:r>
+              <a:rPr sz="1050" b="0" i="0">
+                <a:solidFill>
+                  <a:srgbClr val="5D5A54"/>
+                </a:solidFill>
+                <a:latin typeface="Inter Tight"/>
+              </a:rPr>
+              <a:t>Larson, American Psychologist, 2000</a:t>
+            </a:r>
+          </a:p>
+        </p:txBody>
+      </p:sp>
+    </p:spTree>
+  </p:cSld>
+  <p:clrMapOvr>
+    <a:masterClrMapping/>
+  </p:clrMapOvr>
+</p:sld>
+</file>
+
+<file path=ppt/slides/slide2.xml><?xml version="1.0" encoding="utf-8"?>
+<p:sld xmlns:a="http://schemas.openxmlformats.org/drawingml/2006/main" xmlns:p="http://schemas.openxmlformats.org/presentationml/2006/main" xmlns:r="http://schemas.openxmlformats.org/officeDocument/2006/relationships">
+  <p:cSld>
+    <p:bg>
+      <p:bgPr>
+        <a:solidFill>
+          <a:srgbClr val="0B2D5B"/>
+        </a:solidFill>
+        <a:effectLst/>
+      </p:bgPr>
+    </p:bg>
+    <p:spTree>
+      <p:nvGrpSpPr>
+        <p:cNvPr id="1" name=""/>
+        <p:cNvGrpSpPr/>
+        <p:nvPr/>
+      </p:nvGrpSpPr>
+      <p:grpSpPr/>
+      <p:sp>
+        <p:nvSpPr>
+          <p:cNvPr id="2" name="Rectangle 1"/>
+          <p:cNvSpPr/>
+          <p:nvPr/>
+        </p:nvSpPr>
+        <p:spPr>
+          <a:xfrm>
+            <a:off x="548640" y="502920"/>
+            <a:ext cx="457200" cy="54864"/>
+          </a:xfrm>
+          <a:prstGeom prst="rect">
+            <a:avLst/>
+          </a:prstGeom>
+          <a:solidFill>
+            <a:srgbClr val="F47B20"/>
+          </a:solidFill>
+          <a:ln>
+            <a:noFill/>
+          </a:ln>
+          <a:effectLst/>
+        </p:spPr>
+        <p:style>
+          <a:lnRef idx="1">
+            <a:schemeClr val="accent1"/>
+          </a:lnRef>
+          <a:fillRef idx="3">
+            <a:schemeClr val="accent1"/>
+          </a:fillRef>
+          <a:effectRef idx="2">
+            <a:schemeClr val="accent1"/>
+          </a:effectRef>
+          <a:fontRef idx="minor">
+            <a:schemeClr val="lt1"/>
+          </a:fontRef>
+        </p:style>
+        <p:txBody>
+          <a:bodyPr rtlCol="0" anchor="ctr"/>
+          <a:lstStyle/>
+          <a:p>
+            <a:pPr algn="ctr"/>
+          </a:p>
+        </p:txBody>
+      </p:sp>
+      <p:sp>
+        <p:nvSpPr>
+          <p:cNvPr id="3" name="TextBox 2"/>
+          <p:cNvSpPr txBox="1"/>
+          <p:nvPr/>
+        </p:nvSpPr>
+        <p:spPr>
+          <a:xfrm>
+            <a:off x="1143000" y="393192"/>
+            <a:ext cx="8229600" cy="274320"/>
+          </a:xfrm>
+          <a:prstGeom prst="rect">
+            <a:avLst/>
+          </a:prstGeom>
+          <a:noFill/>
+        </p:spPr>
+        <p:txBody>
+          <a:bodyPr wrap="square" anchor="t" lIns="0" rIns="0" tIns="0" bIns="0">
+            <a:spAutoFit/>
+          </a:bodyPr>
+          <a:lstStyle/>
+          <a:p>
+            <a:pPr algn="l">
+              <a:spcAft>
+                <a:spcPts val="540"/>
+              </a:spcAft>
+            </a:pPr>
+            <a:r>
+              <a:rPr sz="1200" b="1" i="0">
+                <a:solidFill>
+                  <a:srgbClr val="5D5A54"/>
+                </a:solidFill>
+                <a:latin typeface="Inter Tight"/>
+              </a:rPr>
+              <a:t>STAY CURIOUS</a:t>
+            </a:r>
+          </a:p>
+        </p:txBody>
+      </p:sp>
+      <p:sp>
+        <p:nvSpPr>
+          <p:cNvPr id="4" name="TextBox 3"/>
+          <p:cNvSpPr txBox="1"/>
+          <p:nvPr/>
+        </p:nvSpPr>
+        <p:spPr>
+          <a:xfrm>
+            <a:off x="8229600" y="6400800"/>
+            <a:ext cx="3410712" cy="274320"/>
+          </a:xfrm>
+          <a:prstGeom prst="rect">
+            <a:avLst/>
+          </a:prstGeom>
+          <a:noFill/>
+        </p:spPr>
+        <p:txBody>
+          <a:bodyPr wrap="square" anchor="t" lIns="0" rIns="0" tIns="0" bIns="0">
+            <a:spAutoFit/>
+          </a:bodyPr>
+          <a:lstStyle/>
+          <a:p>
+            <a:pPr algn="r">
+              <a:spcAft>
+                <a:spcPts val="450"/>
+              </a:spcAft>
+            </a:pPr>
+            <a:r>
+              <a:rPr sz="1000" b="0" i="0">
+                <a:solidFill>
+                  <a:srgbClr val="5D5A54"/>
+                </a:solidFill>
+                <a:latin typeface="Inter Tight"/>
+              </a:rPr>
+              <a:t>Beaver Counseling</a:t>
+            </a:r>
+          </a:p>
+        </p:txBody>
+      </p:sp>
+      <p:sp>
+        <p:nvSpPr>
+          <p:cNvPr id="5" name="TextBox 4"/>
+          <p:cNvSpPr txBox="1"/>
+          <p:nvPr/>
+        </p:nvSpPr>
+        <p:spPr>
+          <a:xfrm>
+            <a:off x="822960" y="2011680"/>
+            <a:ext cx="10515600" cy="1463040"/>
+          </a:xfrm>
+          <a:prstGeom prst="rect">
+            <a:avLst/>
+          </a:prstGeom>
+          <a:noFill/>
+        </p:spPr>
+        <p:txBody>
+          <a:bodyPr wrap="square" anchor="b" lIns="0" rIns="0" tIns="0" bIns="0">
+            <a:spAutoFit/>
+          </a:bodyPr>
+          <a:lstStyle/>
+          <a:p>
+            <a:pPr algn="l">
+              <a:spcAft>
+                <a:spcPts val="2700"/>
+              </a:spcAft>
+            </a:pPr>
+            <a:r>
+              <a:rPr sz="6000" b="1" i="0">
+                <a:solidFill>
+                  <a:srgbClr val="FFFFFF"/>
+                </a:solidFill>
+                <a:latin typeface="Source Serif 4"/>
+              </a:rPr>
+              <a:t>Stay Curious</a:t>
+            </a:r>
+          </a:p>
+        </p:txBody>
+      </p:sp>
+      <p:sp>
+        <p:nvSpPr>
+          <p:cNvPr id="6" name="TextBox 5"/>
+          <p:cNvSpPr txBox="1"/>
+          <p:nvPr/>
+        </p:nvSpPr>
+        <p:spPr>
+          <a:xfrm>
+            <a:off x="822960" y="3611880"/>
+            <a:ext cx="10515600" cy="914400"/>
+          </a:xfrm>
+          <a:prstGeom prst="rect">
+            <a:avLst/>
+          </a:prstGeom>
+          <a:noFill/>
+        </p:spPr>
+        <p:txBody>
+          <a:bodyPr wrap="square" anchor="t" lIns="0" rIns="0" tIns="0" bIns="0">
+            <a:spAutoFit/>
+          </a:bodyPr>
+          <a:lstStyle/>
+          <a:p>
+            <a:pPr algn="l">
+              <a:spcAft>
+                <a:spcPts val="1080"/>
+              </a:spcAft>
+            </a:pPr>
+            <a:r>
+              <a:rPr sz="2400" b="0" i="1">
+                <a:solidFill>
+                  <a:srgbClr val="E8E4DA"/>
+                </a:solidFill>
+                <a:latin typeface="Source Serif 4"/>
+              </a:rPr>
+              <a:t>The grind gets you points. Curiosity gets you something to say.</a:t>
+            </a:r>
+          </a:p>
+        </p:txBody>
+      </p:sp>
+      <p:sp>
+        <p:nvSpPr>
+          <p:cNvPr id="7" name="TextBox 6"/>
+          <p:cNvSpPr txBox="1"/>
+          <p:nvPr/>
+        </p:nvSpPr>
+        <p:spPr>
+          <a:xfrm>
+            <a:off x="822960" y="6035040"/>
+            <a:ext cx="7315200" cy="365760"/>
+          </a:xfrm>
+          <a:prstGeom prst="rect">
+            <a:avLst/>
+          </a:prstGeom>
+          <a:noFill/>
+        </p:spPr>
+        <p:txBody>
+          <a:bodyPr wrap="square" anchor="t" lIns="0" rIns="0" tIns="0" bIns="0">
+            <a:spAutoFit/>
+          </a:bodyPr>
+          <a:lstStyle/>
+          <a:p>
+            <a:pPr algn="l">
+              <a:spcAft>
+                <a:spcPts val="585"/>
+              </a:spcAft>
+            </a:pPr>
+            <a:r>
+              <a:rPr sz="1300" b="0" i="0">
+                <a:solidFill>
+                  <a:srgbClr val="E8E4DA"/>
+                </a:solidFill>
+                <a:latin typeface="Inter Tight"/>
+              </a:rPr>
+              <a:t>Beaver Upper School · Counseling</a:t>
+            </a:r>
+          </a:p>
+        </p:txBody>
+      </p:sp>
+    </p:spTree>
+  </p:cSld>
+  <p:clrMapOvr>
+    <a:masterClrMapping/>
+  </p:clrMapOvr>
+</p:sld>
+</file>
+
+<file path=ppt/slides/slide3.xml><?xml version="1.0" encoding="utf-8"?>
 <p:sld xmlns:a="http://schemas.openxmlformats.org/drawingml/2006/main" xmlns:p="http://schemas.openxmlformats.org/presentationml/2006/main" xmlns:r="http://schemas.openxmlformats.org/officeDocument/2006/relationships">
   <p:cSld>
     <p:bg>
@@ -4628,7 +6141,7 @@
                 </a:solidFill>
                 <a:latin typeface="Inter Tight"/>
               </a:rPr>
-              <a:t>SOMETHING TO SAY</a:t>
+              <a:t>RABBIT HOLES</a:t>
             </a:r>
           </a:p>
         </p:txBody>
@@ -4674,64 +6187,23 @@
       </p:sp>
       <p:sp>
         <p:nvSpPr>
-          <p:cNvPr id="5" name="TextBox 4"/>
-          <p:cNvSpPr txBox="1"/>
-          <p:nvPr/>
-        </p:nvSpPr>
-        <p:spPr>
-          <a:xfrm>
-            <a:off x="822960" y="1005840"/>
-            <a:ext cx="10515600" cy="914400"/>
-          </a:xfrm>
-          <a:prstGeom prst="rect">
-            <a:avLst/>
-          </a:prstGeom>
-          <a:noFill/>
-        </p:spPr>
-        <p:txBody>
-          <a:bodyPr wrap="square" anchor="t" lIns="0" rIns="0" tIns="0" bIns="0">
-            <a:spAutoFit/>
-          </a:bodyPr>
-          <a:lstStyle/>
-          <a:p>
-            <a:pPr algn="l">
-              <a:spcAft>
-                <a:spcPts val="1530"/>
-              </a:spcAft>
-            </a:pPr>
-            <a:r>
-              <a:rPr sz="3400" b="1" i="0">
-                <a:solidFill>
-                  <a:srgbClr val="1C1B19"/>
-                </a:solidFill>
-                <a:latin typeface="Source Serif 4"/>
-              </a:rPr>
-              <a:t>Two seniors. Who has more to say?</a:t>
-            </a:r>
-          </a:p>
-        </p:txBody>
-      </p:sp>
-      <p:sp>
-        <p:nvSpPr>
-          <p:cNvPr id="6" name="Rectangle 5"/>
+          <p:cNvPr id="5" name="Rectangle 4"/>
           <p:cNvSpPr/>
           <p:nvPr/>
         </p:nvSpPr>
         <p:spPr>
           <a:xfrm>
-            <a:off x="822960" y="2103120"/>
-            <a:ext cx="3322320" cy="3840480"/>
+            <a:off x="822960" y="1371600"/>
+            <a:ext cx="73152" cy="3566160"/>
           </a:xfrm>
           <a:prstGeom prst="rect">
             <a:avLst/>
           </a:prstGeom>
           <a:solidFill>
-            <a:srgbClr val="FFFFFF"/>
+            <a:srgbClr val="F47B20"/>
           </a:solidFill>
-          <a:ln w="15875">
-            <a:solidFill>
-              <a:srgbClr val="D8D2C6"/>
-            </a:solidFill>
+          <a:ln>
+            <a:noFill/>
           </a:ln>
           <a:effectLst/>
         </p:spPr>
@@ -4759,14 +6231,53 @@
       </p:sp>
       <p:sp>
         <p:nvSpPr>
+          <p:cNvPr id="6" name="TextBox 5"/>
+          <p:cNvSpPr txBox="1"/>
+          <p:nvPr/>
+        </p:nvSpPr>
+        <p:spPr>
+          <a:xfrm>
+            <a:off x="1188720" y="1371600"/>
+            <a:ext cx="10058400" cy="3566160"/>
+          </a:xfrm>
+          <a:prstGeom prst="rect">
+            <a:avLst/>
+          </a:prstGeom>
+          <a:noFill/>
+        </p:spPr>
+        <p:txBody>
+          <a:bodyPr wrap="square" anchor="ctr" lIns="0" rIns="0" tIns="0" bIns="0">
+            <a:spAutoFit/>
+          </a:bodyPr>
+          <a:lstStyle/>
+          <a:p>
+            <a:pPr algn="l">
+              <a:spcAft>
+                <a:spcPts val="1800"/>
+              </a:spcAft>
+            </a:pPr>
+            <a:r>
+              <a:rPr sz="4000" b="0" i="1">
+                <a:solidFill>
+                  <a:srgbClr val="1C1B19"/>
+                </a:solidFill>
+                <a:latin typeface="Source Serif 4"/>
+              </a:rPr>
+              <a:t>What's the last thing you looked up just because you wanted to know?</a:t>
+            </a:r>
+          </a:p>
+        </p:txBody>
+      </p:sp>
+      <p:sp>
+        <p:nvSpPr>
           <p:cNvPr id="7" name="TextBox 6"/>
           <p:cNvSpPr txBox="1"/>
           <p:nvPr/>
         </p:nvSpPr>
         <p:spPr>
           <a:xfrm>
-            <a:off x="1051560" y="2286000"/>
-            <a:ext cx="2865120" cy="365760"/>
+            <a:off x="1188720" y="5120640"/>
+            <a:ext cx="10058400" cy="914400"/>
           </a:xfrm>
           <a:prstGeom prst="rect">
             <a:avLst/>
@@ -4781,304 +6292,17 @@
           <a:p>
             <a:pPr algn="l">
               <a:spcAft>
-                <a:spcPts val="585"/>
-              </a:spcAft>
-            </a:pPr>
-            <a:r>
-              <a:rPr sz="1300" b="1" i="0">
-                <a:solidFill>
-                  <a:srgbClr val="0B2D5B"/>
+                <a:spcPts val="810"/>
+              </a:spcAft>
+            </a:pPr>
+            <a:r>
+              <a:rPr sz="1800" b="0" i="0">
+                <a:solidFill>
+                  <a:srgbClr val="5D5A54"/>
                 </a:solidFill>
                 <a:latin typeface="Inter Tight"/>
               </a:rPr>
-              <a:t>JORDAN</a:t>
-            </a:r>
-          </a:p>
-        </p:txBody>
-      </p:sp>
-      <p:sp>
-        <p:nvSpPr>
-          <p:cNvPr id="8" name="TextBox 7"/>
-          <p:cNvSpPr txBox="1"/>
-          <p:nvPr/>
-        </p:nvSpPr>
-        <p:spPr>
-          <a:xfrm>
-            <a:off x="1051560" y="2743200"/>
-            <a:ext cx="2865120" cy="3017520"/>
-          </a:xfrm>
-          <a:prstGeom prst="rect">
-            <a:avLst/>
-          </a:prstGeom>
-          <a:noFill/>
-        </p:spPr>
-        <p:txBody>
-          <a:bodyPr wrap="square" anchor="t" lIns="0" rIns="0" tIns="0" bIns="0">
-            <a:spAutoFit/>
-          </a:bodyPr>
-          <a:lstStyle/>
-          <a:p>
-            <a:pPr algn="l">
-              <a:spcAft>
-                <a:spcPts val="810"/>
-              </a:spcAft>
-            </a:pPr>
-            <a:r>
-              <a:rPr sz="1800" b="0" i="0">
-                <a:solidFill>
-                  <a:srgbClr val="1C1B19"/>
-                </a:solidFill>
-                <a:latin typeface="Source Serif 4"/>
-              </a:rPr>
-              <a:t>Eleven activities, officer in four. Hasn't kept any longer than a year. Asked about a favorite, Jordan pauses.</a:t>
-            </a:r>
-          </a:p>
-        </p:txBody>
-      </p:sp>
-      <p:sp>
-        <p:nvSpPr>
-          <p:cNvPr id="9" name="Rectangle 8"/>
-          <p:cNvSpPr/>
-          <p:nvPr/>
-        </p:nvSpPr>
-        <p:spPr>
-          <a:xfrm>
-            <a:off x="4419600" y="2103120"/>
-            <a:ext cx="3322320" cy="3840480"/>
-          </a:xfrm>
-          <a:prstGeom prst="rect">
-            <a:avLst/>
-          </a:prstGeom>
-          <a:solidFill>
-            <a:srgbClr val="FFFFFF"/>
-          </a:solidFill>
-          <a:ln w="15875">
-            <a:solidFill>
-              <a:srgbClr val="D8D2C6"/>
-            </a:solidFill>
-          </a:ln>
-          <a:effectLst/>
-        </p:spPr>
-        <p:style>
-          <a:lnRef idx="1">
-            <a:schemeClr val="accent1"/>
-          </a:lnRef>
-          <a:fillRef idx="3">
-            <a:schemeClr val="accent1"/>
-          </a:fillRef>
-          <a:effectRef idx="2">
-            <a:schemeClr val="accent1"/>
-          </a:effectRef>
-          <a:fontRef idx="minor">
-            <a:schemeClr val="lt1"/>
-          </a:fontRef>
-        </p:style>
-        <p:txBody>
-          <a:bodyPr rtlCol="0" anchor="ctr"/>
-          <a:lstStyle/>
-          <a:p>
-            <a:pPr algn="ctr"/>
-          </a:p>
-        </p:txBody>
-      </p:sp>
-      <p:sp>
-        <p:nvSpPr>
-          <p:cNvPr id="10" name="TextBox 9"/>
-          <p:cNvSpPr txBox="1"/>
-          <p:nvPr/>
-        </p:nvSpPr>
-        <p:spPr>
-          <a:xfrm>
-            <a:off x="4648200" y="2286000"/>
-            <a:ext cx="2865120" cy="365760"/>
-          </a:xfrm>
-          <a:prstGeom prst="rect">
-            <a:avLst/>
-          </a:prstGeom>
-          <a:noFill/>
-        </p:spPr>
-        <p:txBody>
-          <a:bodyPr wrap="square" anchor="t" lIns="0" rIns="0" tIns="0" bIns="0">
-            <a:spAutoFit/>
-          </a:bodyPr>
-          <a:lstStyle/>
-          <a:p>
-            <a:pPr algn="l">
-              <a:spcAft>
-                <a:spcPts val="585"/>
-              </a:spcAft>
-            </a:pPr>
-            <a:r>
-              <a:rPr sz="1300" b="1" i="0">
-                <a:solidFill>
-                  <a:srgbClr val="0B2D5B"/>
-                </a:solidFill>
-                <a:latin typeface="Inter Tight"/>
-              </a:rPr>
-              <a:t>PRIYA</a:t>
-            </a:r>
-          </a:p>
-        </p:txBody>
-      </p:sp>
-      <p:sp>
-        <p:nvSpPr>
-          <p:cNvPr id="11" name="TextBox 10"/>
-          <p:cNvSpPr txBox="1"/>
-          <p:nvPr/>
-        </p:nvSpPr>
-        <p:spPr>
-          <a:xfrm>
-            <a:off x="4648200" y="2743200"/>
-            <a:ext cx="2865120" cy="3017520"/>
-          </a:xfrm>
-          <a:prstGeom prst="rect">
-            <a:avLst/>
-          </a:prstGeom>
-          <a:noFill/>
-        </p:spPr>
-        <p:txBody>
-          <a:bodyPr wrap="square" anchor="t" lIns="0" rIns="0" tIns="0" bIns="0">
-            <a:spAutoFit/>
-          </a:bodyPr>
-          <a:lstStyle/>
-          <a:p>
-            <a:pPr algn="l">
-              <a:spcAft>
-                <a:spcPts val="810"/>
-              </a:spcAft>
-            </a:pPr>
-            <a:r>
-              <a:rPr sz="1800" b="0" i="0">
-                <a:solidFill>
-                  <a:srgbClr val="1C1B19"/>
-                </a:solidFill>
-                <a:latin typeface="Source Serif 4"/>
-              </a:rPr>
-              <a:t>Two activities. Has spent three years restoring old bikes with her uncle and now fixes them for kids in her building.</a:t>
-            </a:r>
-          </a:p>
-        </p:txBody>
-      </p:sp>
-      <p:sp>
-        <p:nvSpPr>
-          <p:cNvPr id="12" name="Rectangle 11"/>
-          <p:cNvSpPr/>
-          <p:nvPr/>
-        </p:nvSpPr>
-        <p:spPr>
-          <a:xfrm>
-            <a:off x="8016239" y="2103120"/>
-            <a:ext cx="3322320" cy="3840480"/>
-          </a:xfrm>
-          <a:prstGeom prst="rect">
-            <a:avLst/>
-          </a:prstGeom>
-          <a:solidFill>
-            <a:srgbClr val="FFFFFF"/>
-          </a:solidFill>
-          <a:ln w="15875">
-            <a:solidFill>
-              <a:srgbClr val="D8D2C6"/>
-            </a:solidFill>
-          </a:ln>
-          <a:effectLst/>
-        </p:spPr>
-        <p:style>
-          <a:lnRef idx="1">
-            <a:schemeClr val="accent1"/>
-          </a:lnRef>
-          <a:fillRef idx="3">
-            <a:schemeClr val="accent1"/>
-          </a:fillRef>
-          <a:effectRef idx="2">
-            <a:schemeClr val="accent1"/>
-          </a:effectRef>
-          <a:fontRef idx="minor">
-            <a:schemeClr val="lt1"/>
-          </a:fontRef>
-        </p:style>
-        <p:txBody>
-          <a:bodyPr rtlCol="0" anchor="ctr"/>
-          <a:lstStyle/>
-          <a:p>
-            <a:pPr algn="ctr"/>
-          </a:p>
-        </p:txBody>
-      </p:sp>
-      <p:sp>
-        <p:nvSpPr>
-          <p:cNvPr id="13" name="TextBox 12"/>
-          <p:cNvSpPr txBox="1"/>
-          <p:nvPr/>
-        </p:nvSpPr>
-        <p:spPr>
-          <a:xfrm>
-            <a:off x="8244839" y="2286000"/>
-            <a:ext cx="2865120" cy="365760"/>
-          </a:xfrm>
-          <a:prstGeom prst="rect">
-            <a:avLst/>
-          </a:prstGeom>
-          <a:noFill/>
-        </p:spPr>
-        <p:txBody>
-          <a:bodyPr wrap="square" anchor="t" lIns="0" rIns="0" tIns="0" bIns="0">
-            <a:spAutoFit/>
-          </a:bodyPr>
-          <a:lstStyle/>
-          <a:p>
-            <a:pPr algn="l">
-              <a:spcAft>
-                <a:spcPts val="585"/>
-              </a:spcAft>
-            </a:pPr>
-            <a:r>
-              <a:rPr sz="1300" b="1" i="0">
-                <a:solidFill>
-                  <a:srgbClr val="0B2D5B"/>
-                </a:solidFill>
-                <a:latin typeface="Inter Tight"/>
-              </a:rPr>
-              <a:t>YOU</a:t>
-            </a:r>
-          </a:p>
-        </p:txBody>
-      </p:sp>
-      <p:sp>
-        <p:nvSpPr>
-          <p:cNvPr id="14" name="TextBox 13"/>
-          <p:cNvSpPr txBox="1"/>
-          <p:nvPr/>
-        </p:nvSpPr>
-        <p:spPr>
-          <a:xfrm>
-            <a:off x="8244839" y="2743200"/>
-            <a:ext cx="2865120" cy="3017520"/>
-          </a:xfrm>
-          <a:prstGeom prst="rect">
-            <a:avLst/>
-          </a:prstGeom>
-          <a:noFill/>
-        </p:spPr>
-        <p:txBody>
-          <a:bodyPr wrap="square" anchor="t" lIns="0" rIns="0" tIns="0" bIns="0">
-            <a:spAutoFit/>
-          </a:bodyPr>
-          <a:lstStyle/>
-          <a:p>
-            <a:pPr algn="l">
-              <a:spcAft>
-                <a:spcPts val="810"/>
-              </a:spcAft>
-            </a:pPr>
-            <a:r>
-              <a:rPr sz="1800" b="0" i="0">
-                <a:solidFill>
-                  <a:srgbClr val="1C1B19"/>
-                </a:solidFill>
-                <a:latin typeface="Source Serif 4"/>
-              </a:rPr>
-              <a:t>What's one thing you'd want to still be doing in two years, even if no one ever saw it?</a:t>
+              <a:t>One word or a few. Pass is fine.</a:t>
             </a:r>
           </a:p>
         </p:txBody>
@@ -5091,7 +6315,7 @@
 </p:sld>
 </file>
 
-<file path=ppt/slides/slide11.xml><?xml version="1.0" encoding="utf-8"?>
+<file path=ppt/slides/slide4.xml><?xml version="1.0" encoding="utf-8"?>
 <p:sld xmlns:a="http://schemas.openxmlformats.org/drawingml/2006/main" xmlns:p="http://schemas.openxmlformats.org/presentationml/2006/main" xmlns:r="http://schemas.openxmlformats.org/officeDocument/2006/relationships">
   <p:cSld>
     <p:bg>
@@ -5187,7 +6411,7 @@
                 </a:solidFill>
                 <a:latin typeface="Inter Tight"/>
               </a:rPr>
-              <a:t>BEFORE YOU GO</a:t>
+              <a:t>SORT IT</a:t>
             </a:r>
           </a:p>
         </p:txBody>
@@ -5239,7 +6463,7 @@
         </p:nvSpPr>
         <p:spPr>
           <a:xfrm>
-            <a:off x="822960" y="1188720"/>
+            <a:off x="822960" y="1005840"/>
             <a:ext cx="10515600" cy="914400"/>
           </a:xfrm>
           <a:prstGeom prst="rect">
@@ -5255,70 +6479,31 @@
           <a:p>
             <a:pPr algn="l">
               <a:spcAft>
-                <a:spcPts val="1620"/>
-              </a:spcAft>
-            </a:pPr>
-            <a:r>
-              <a:rPr sz="3600" b="1" i="0">
+                <a:spcPts val="1530"/>
+              </a:spcAft>
+            </a:pPr>
+            <a:r>
+              <a:rPr sz="3400" b="1" i="0">
                 <a:solidFill>
                   <a:srgbClr val="1C1B19"/>
                 </a:solidFill>
                 <a:latin typeface="Source Serif 4"/>
               </a:rPr>
-              <a:t>Feed one question this week.</a:t>
-            </a:r>
-          </a:p>
-        </p:txBody>
-      </p:sp>
-      <p:sp>
-        <p:nvSpPr>
-          <p:cNvPr id="6" name="TextBox 5"/>
-          <p:cNvSpPr txBox="1"/>
-          <p:nvPr/>
-        </p:nvSpPr>
-        <p:spPr>
-          <a:xfrm>
-            <a:off x="822960" y="2286000"/>
-            <a:ext cx="10515600" cy="1463040"/>
-          </a:xfrm>
-          <a:prstGeom prst="rect">
-            <a:avLst/>
-          </a:prstGeom>
-          <a:noFill/>
-        </p:spPr>
-        <p:txBody>
-          <a:bodyPr wrap="square" anchor="t" lIns="0" rIns="0" tIns="0" bIns="0">
-            <a:spAutoFit/>
-          </a:bodyPr>
-          <a:lstStyle/>
-          <a:p>
-            <a:pPr algn="l">
-              <a:spcAft>
-                <a:spcPts val="1080"/>
-              </a:spcAft>
-            </a:pPr>
-            <a:r>
-              <a:rPr sz="2400" b="0" i="0">
-                <a:solidFill>
-                  <a:srgbClr val="1C1B19"/>
-                </a:solidFill>
-                <a:latin typeface="Source Serif 4"/>
-              </a:rPr>
-              <a:t>Pick one from the student page. Keep it to yourself.</a:t>
-            </a:r>
-          </a:p>
-        </p:txBody>
-      </p:sp>
-      <p:sp>
-        <p:nvSpPr>
-          <p:cNvPr id="7" name="Rectangle 6"/>
+              <a:t>Grind or curiosity?</a:t>
+            </a:r>
+          </a:p>
+        </p:txBody>
+      </p:sp>
+      <p:sp>
+        <p:nvSpPr>
+          <p:cNvPr id="6" name="Rectangle 5"/>
           <p:cNvSpPr/>
           <p:nvPr/>
         </p:nvSpPr>
         <p:spPr>
           <a:xfrm>
-            <a:off x="822960" y="4023360"/>
-            <a:ext cx="10515600" cy="1371600"/>
+            <a:off x="822960" y="2103120"/>
+            <a:ext cx="5120640" cy="3931920"/>
           </a:xfrm>
           <a:prstGeom prst="rect">
             <a:avLst/>
@@ -5328,7 +6513,7 @@
           </a:solidFill>
           <a:ln w="15875">
             <a:solidFill>
-              <a:srgbClr val="1C1B19"/>
+              <a:srgbClr val="D8D2C6"/>
             </a:solidFill>
           </a:ln>
           <a:effectLst/>
@@ -5357,14 +6542,53 @@
       </p:sp>
       <p:sp>
         <p:nvSpPr>
+          <p:cNvPr id="7" name="TextBox 6"/>
+          <p:cNvSpPr txBox="1"/>
+          <p:nvPr/>
+        </p:nvSpPr>
+        <p:spPr>
+          <a:xfrm>
+            <a:off x="1097280" y="2286000"/>
+            <a:ext cx="4572000" cy="457200"/>
+          </a:xfrm>
+          <a:prstGeom prst="rect">
+            <a:avLst/>
+          </a:prstGeom>
+          <a:noFill/>
+        </p:spPr>
+        <p:txBody>
+          <a:bodyPr wrap="square" anchor="t" lIns="0" rIns="0" tIns="0" bIns="0">
+            <a:spAutoFit/>
+          </a:bodyPr>
+          <a:lstStyle/>
+          <a:p>
+            <a:pPr algn="l">
+              <a:spcAft>
+                <a:spcPts val="585"/>
+              </a:spcAft>
+            </a:pPr>
+            <a:r>
+              <a:rPr sz="1300" b="1" i="0">
+                <a:solidFill>
+                  <a:srgbClr val="0B2D5B"/>
+                </a:solidFill>
+                <a:latin typeface="Inter Tight"/>
+              </a:rPr>
+              <a:t>GRIND</a:t>
+            </a:r>
+          </a:p>
+        </p:txBody>
+      </p:sp>
+      <p:sp>
+        <p:nvSpPr>
           <p:cNvPr id="8" name="TextBox 7"/>
           <p:cNvSpPr txBox="1"/>
           <p:nvPr/>
         </p:nvSpPr>
         <p:spPr>
           <a:xfrm>
-            <a:off x="1097280" y="4206240"/>
-            <a:ext cx="10058400" cy="365760"/>
+            <a:off x="1097280" y="2788920"/>
+            <a:ext cx="4572000" cy="3108960"/>
           </a:xfrm>
           <a:prstGeom prst="rect">
             <a:avLst/>
@@ -5379,105 +6603,90 @@
           <a:p>
             <a:pPr algn="l">
               <a:spcAft>
-                <a:spcPts val="540"/>
-              </a:spcAft>
-            </a:pPr>
-            <a:r>
-              <a:rPr sz="1200" b="1" i="0">
-                <a:solidFill>
-                  <a:srgbClr val="0B2D5B"/>
-                </a:solidFill>
-                <a:latin typeface="Inter Tight"/>
-              </a:rPr>
-              <a:t>STUDENT PAGE</a:t>
-            </a:r>
-          </a:p>
-        </p:txBody>
-      </p:sp>
-      <p:sp>
-        <p:nvSpPr>
-          <p:cNvPr id="9" name="TextBox 8"/>
-          <p:cNvSpPr txBox="1"/>
-          <p:nvPr/>
-        </p:nvSpPr>
-        <p:spPr>
-          <a:xfrm>
-            <a:off x="1097280" y="4617720"/>
-            <a:ext cx="10058400" cy="640080"/>
-          </a:xfrm>
-          <a:prstGeom prst="rect">
-            <a:avLst/>
-          </a:prstGeom>
-          <a:noFill/>
-        </p:spPr>
-        <p:txBody>
-          <a:bodyPr wrap="square" anchor="t" lIns="0" rIns="0" tIns="0" bIns="0">
-            <a:spAutoFit/>
-          </a:bodyPr>
-          <a:lstStyle/>
-          <a:p>
-            <a:pPr algn="l">
-              <a:spcAft>
-                <a:spcPts val="900"/>
-              </a:spcAft>
-            </a:pPr>
-            <a:r>
-              <a:rPr sz="2000" b="0" i="0">
+                <a:spcPts val="855"/>
+              </a:spcAft>
+            </a:pPr>
+            <a:r>
+              <a:rPr sz="1900" b="0" i="0">
                 <a:solidFill>
                   <a:srgbClr val="1C1B19"/>
                 </a:solidFill>
-                <a:latin typeface="Inter Tight"/>
-              </a:rPr>
-              <a:t>https://rmwtoolkit.github.io/bcds-toolkit/stay-curious-high-school.html</a:t>
-            </a:r>
-          </a:p>
-        </p:txBody>
-      </p:sp>
-    </p:spTree>
-  </p:cSld>
-  <p:clrMapOvr>
-    <a:masterClrMapping/>
-  </p:clrMapOvr>
-</p:sld>
-</file>
-
-<file path=ppt/slides/slide2.xml><?xml version="1.0" encoding="utf-8"?>
-<p:sld xmlns:a="http://schemas.openxmlformats.org/drawingml/2006/main" xmlns:p="http://schemas.openxmlformats.org/presentationml/2006/main" xmlns:r="http://schemas.openxmlformats.org/officeDocument/2006/relationships" show="0">
-  <p:cSld>
-    <p:bg>
-      <p:bgPr>
-        <a:solidFill>
-          <a:srgbClr val="EEEBE4"/>
-        </a:solidFill>
-        <a:effectLst/>
-      </p:bgPr>
-    </p:bg>
-    <p:spTree>
-      <p:nvGrpSpPr>
-        <p:cNvPr id="1" name=""/>
-        <p:cNvGrpSpPr/>
-        <p:nvPr/>
-      </p:nvGrpSpPr>
-      <p:grpSpPr/>
-      <p:sp>
-        <p:nvSpPr>
-          <p:cNvPr id="2" name="Rectangle 1"/>
+                <a:latin typeface="Source Serif 4"/>
+              </a:rPr>
+              <a:t>Studying only what's on the test</a:t>
+            </a:r>
+          </a:p>
+          <a:p>
+            <a:pPr algn="l">
+              <a:spcAft>
+                <a:spcPts val="855"/>
+              </a:spcAft>
+            </a:pPr>
+            <a:r>
+              <a:rPr sz="1900" b="0" i="0">
+                <a:solidFill>
+                  <a:srgbClr val="1C1B19"/>
+                </a:solidFill>
+                <a:latin typeface="Source Serif 4"/>
+              </a:rPr>
+              <a:t>Joining a club for the résumé</a:t>
+            </a:r>
+          </a:p>
+          <a:p>
+            <a:pPr algn="l">
+              <a:spcAft>
+                <a:spcPts val="855"/>
+              </a:spcAft>
+            </a:pPr>
+            <a:r>
+              <a:rPr sz="1900" b="0" i="0">
+                <a:solidFill>
+                  <a:srgbClr val="1C1B19"/>
+                </a:solidFill>
+                <a:latin typeface="Source Serif 4"/>
+              </a:rPr>
+              <a:t>Asking "will this be graded?"</a:t>
+            </a:r>
+          </a:p>
+          <a:p>
+            <a:pPr algn="l">
+              <a:spcAft>
+                <a:spcPts val="855"/>
+              </a:spcAft>
+            </a:pPr>
+            <a:r>
+              <a:rPr sz="1900" b="0" i="0">
+                <a:solidFill>
+                  <a:srgbClr val="1C1B19"/>
+                </a:solidFill>
+                <a:latin typeface="Source Serif 4"/>
+              </a:rPr>
+              <a:t>Picking the easy A</a:t>
+            </a:r>
+          </a:p>
+        </p:txBody>
+      </p:sp>
+      <p:sp>
+        <p:nvSpPr>
+          <p:cNvPr id="9" name="Rectangle 8"/>
           <p:cNvSpPr/>
           <p:nvPr/>
         </p:nvSpPr>
         <p:spPr>
           <a:xfrm>
-            <a:off x="0" y="0"/>
-            <a:ext cx="12191695" cy="384048"/>
+            <a:off x="6309360" y="2103120"/>
+            <a:ext cx="5120640" cy="3931920"/>
           </a:xfrm>
           <a:prstGeom prst="rect">
             <a:avLst/>
           </a:prstGeom>
           <a:solidFill>
-            <a:srgbClr val="0B2D5B"/>
+            <a:srgbClr val="FFFFFF"/>
           </a:solidFill>
-          <a:ln>
-            <a:noFill/>
+          <a:ln w="15875">
+            <a:solidFill>
+              <a:srgbClr val="D8D2C6"/>
+            </a:solidFill>
           </a:ln>
           <a:effectLst/>
         </p:spPr>
@@ -5505,14 +6714,14 @@
       </p:sp>
       <p:sp>
         <p:nvSpPr>
-          <p:cNvPr id="3" name="TextBox 2"/>
+          <p:cNvPr id="10" name="TextBox 9"/>
           <p:cNvSpPr txBox="1"/>
           <p:nvPr/>
         </p:nvSpPr>
         <p:spPr>
           <a:xfrm>
-            <a:off x="548640" y="100584"/>
-            <a:ext cx="10972800" cy="274320"/>
+            <a:off x="6583680" y="2286000"/>
+            <a:ext cx="4572000" cy="457200"/>
           </a:xfrm>
           <a:prstGeom prst="rect">
             <a:avLst/>
@@ -5527,31 +6736,31 @@
           <a:p>
             <a:pPr algn="l">
               <a:spcAft>
-                <a:spcPts val="495"/>
-              </a:spcAft>
-            </a:pPr>
-            <a:r>
-              <a:rPr sz="1100" b="1" i="0">
-                <a:solidFill>
-                  <a:srgbClr val="FFFFFF"/>
+                <a:spcPts val="585"/>
+              </a:spcAft>
+            </a:pPr>
+            <a:r>
+              <a:rPr sz="1300" b="1" i="0">
+                <a:solidFill>
+                  <a:srgbClr val="0B2D5B"/>
                 </a:solidFill>
                 <a:latin typeface="Inter Tight"/>
               </a:rPr>
-              <a:t>TEACHER PAGE  ·  skipped when you present  ·  Before you teach</a:t>
-            </a:r>
-          </a:p>
-        </p:txBody>
-      </p:sp>
-      <p:sp>
-        <p:nvSpPr>
-          <p:cNvPr id="4" name="TextBox 3"/>
+              <a:t>CURIOSITY</a:t>
+            </a:r>
+          </a:p>
+        </p:txBody>
+      </p:sp>
+      <p:sp>
+        <p:nvSpPr>
+          <p:cNvPr id="11" name="TextBox 10"/>
           <p:cNvSpPr txBox="1"/>
           <p:nvPr/>
         </p:nvSpPr>
         <p:spPr>
           <a:xfrm>
-            <a:off x="548640" y="685800"/>
-            <a:ext cx="10972800" cy="640080"/>
+            <a:off x="6583680" y="2788920"/>
+            <a:ext cx="4572000" cy="3108960"/>
           </a:xfrm>
           <a:prstGeom prst="rect">
             <a:avLst/>
@@ -5566,351 +6775,65 @@
           <a:p>
             <a:pPr algn="l">
               <a:spcAft>
-                <a:spcPts val="1350"/>
-              </a:spcAft>
-            </a:pPr>
-            <a:r>
-              <a:rPr sz="3000" b="1" i="0">
+                <a:spcPts val="855"/>
+              </a:spcAft>
+            </a:pPr>
+            <a:r>
+              <a:rPr sz="1900" b="0" i="0">
                 <a:solidFill>
                   <a:srgbClr val="1C1B19"/>
                 </a:solidFill>
                 <a:latin typeface="Source Serif 4"/>
               </a:rPr>
-              <a:t>Before you teach</a:t>
-            </a:r>
-          </a:p>
-        </p:txBody>
-      </p:sp>
-      <p:sp>
-        <p:nvSpPr>
-          <p:cNvPr id="5" name="TextBox 4"/>
-          <p:cNvSpPr txBox="1"/>
-          <p:nvPr/>
-        </p:nvSpPr>
-        <p:spPr>
-          <a:xfrm>
-            <a:off x="548640" y="1463040"/>
-            <a:ext cx="5394960" cy="4937760"/>
-          </a:xfrm>
-          <a:prstGeom prst="rect">
-            <a:avLst/>
-          </a:prstGeom>
-          <a:noFill/>
-        </p:spPr>
-        <p:txBody>
-          <a:bodyPr wrap="square" anchor="t" lIns="0" rIns="0" tIns="0" bIns="0">
-            <a:spAutoFit/>
-          </a:bodyPr>
-          <a:lstStyle/>
-          <a:p>
-            <a:pPr algn="l">
-              <a:spcAft>
-                <a:spcPts val="585"/>
-              </a:spcAft>
-            </a:pPr>
-            <a:r>
-              <a:rPr sz="1500" b="1" i="0">
+              <a:t>Asking "why does that work?"</a:t>
+            </a:r>
+          </a:p>
+          <a:p>
+            <a:pPr algn="l">
+              <a:spcAft>
+                <a:spcPts val="855"/>
+              </a:spcAft>
+            </a:pPr>
+            <a:r>
+              <a:rPr sz="1900" b="0" i="0">
                 <a:solidFill>
                   <a:srgbClr val="1C1B19"/>
                 </a:solidFill>
                 <a:latin typeface="Source Serif 4"/>
               </a:rPr>
-              <a:t>Grades still matter, and that's okay to say.</a:t>
-            </a:r>
-          </a:p>
-          <a:p>
-            <a:pPr algn="l">
-              <a:spcAft>
-                <a:spcPts val="585"/>
-              </a:spcAft>
-            </a:pPr>
-            <a:r>
-              <a:rPr sz="1300" b="0" i="0">
+              <a:t>Reading past the assignment</a:t>
+            </a:r>
+          </a:p>
+          <a:p>
+            <a:pPr algn="l">
+              <a:spcAft>
+                <a:spcPts val="855"/>
+              </a:spcAft>
+            </a:pPr>
+            <a:r>
+              <a:rPr sz="1900" b="0" i="0">
                 <a:solidFill>
                   <a:srgbClr val="1C1B19"/>
                 </a:solidFill>
                 <a:latin typeface="Source Serif 4"/>
               </a:rPr>
-              <a:t>This lesson isn't anti-grades or anti-college. Students who need scholarships, or whose families have sacrificed for their education, can feel judged by "stop grinding" talk. Frame it as making room for both.</a:t>
-            </a:r>
-          </a:p>
-          <a:p>
-            <a:pPr algn="l">
-              <a:spcAft>
-                <a:spcPts val="585"/>
-              </a:spcAft>
-            </a:pPr>
-            <a:r>
-              <a:rPr sz="1300" b="0" i="0">
+              <a:t>Sticking with a hobby for years</a:t>
+            </a:r>
+          </a:p>
+          <a:p>
+            <a:pPr algn="l">
+              <a:spcAft>
+                <a:spcPts val="855"/>
+              </a:spcAft>
+            </a:pPr>
+            <a:r>
+              <a:rPr sz="1900" b="0" i="0">
                 <a:solidFill>
                   <a:srgbClr val="1C1B19"/>
                 </a:solidFill>
                 <a:latin typeface="Source Serif 4"/>
               </a:rPr>
-              <a:t/>
-            </a:r>
-          </a:p>
-          <a:p>
-            <a:pPr algn="l">
-              <a:spcAft>
-                <a:spcPts val="585"/>
-              </a:spcAft>
-            </a:pPr>
-            <a:r>
-              <a:rPr sz="1500" b="1" i="0">
-                <a:solidFill>
-                  <a:srgbClr val="1C1B19"/>
-                </a:solidFill>
-                <a:latin typeface="Source Serif 4"/>
-              </a:rPr>
-              <a:t>Don't ask about college lists or GPAs.</a:t>
-            </a:r>
-          </a:p>
-          <a:p>
-            <a:pPr algn="l">
-              <a:spcAft>
-                <a:spcPts val="585"/>
-              </a:spcAft>
-            </a:pPr>
-            <a:r>
-              <a:rPr sz="1300" b="0" i="0">
-                <a:solidFill>
-                  <a:srgbClr val="1C1B19"/>
-                </a:solidFill>
-                <a:latin typeface="Source Serif 4"/>
-              </a:rPr>
-              <a:t>Comparing in a small circle is exactly the pressure this lesson is about. Keep examples general and invented.</a:t>
-            </a:r>
-          </a:p>
-          <a:p>
-            <a:pPr algn="l">
-              <a:spcAft>
-                <a:spcPts val="585"/>
-              </a:spcAft>
-            </a:pPr>
-            <a:r>
-              <a:rPr sz="1300" b="0" i="0">
-                <a:solidFill>
-                  <a:srgbClr val="1C1B19"/>
-                </a:solidFill>
-                <a:latin typeface="Source Serif 4"/>
-              </a:rPr>
-              <a:t/>
-            </a:r>
-          </a:p>
-          <a:p>
-            <a:pPr algn="l">
-              <a:spcAft>
-                <a:spcPts val="585"/>
-              </a:spcAft>
-            </a:pPr>
-            <a:r>
-              <a:rPr sz="1500" b="1" i="0">
-                <a:solidFill>
-                  <a:srgbClr val="1C1B19"/>
-                </a:solidFill>
-                <a:latin typeface="Source Serif 4"/>
-              </a:rPr>
-              <a:t>Watch for students who are running on empty.</a:t>
-            </a:r>
-          </a:p>
-          <a:p>
-            <a:pPr algn="l">
-              <a:spcAft>
-                <a:spcPts val="585"/>
-              </a:spcAft>
-            </a:pPr>
-            <a:r>
-              <a:rPr sz="1300" b="0" i="0">
-                <a:solidFill>
-                  <a:srgbClr val="1C1B19"/>
-                </a:solidFill>
-                <a:latin typeface="Source Serif 4"/>
-              </a:rPr>
-              <a:t>Some students describe a schedule with no slack at all, little sleep, or feeling numb about things they used to enjoy. That's worth a quiet check-in after advisory and a same-day note to a counselor if it sounds serious. Disclosures go to a counselor. No screening questions in the group.</a:t>
-            </a:r>
-          </a:p>
-          <a:p>
-            <a:pPr algn="l">
-              <a:spcAft>
-                <a:spcPts val="585"/>
-              </a:spcAft>
-            </a:pPr>
-            <a:r>
-              <a:rPr sz="1300" b="0" i="0">
-                <a:solidFill>
-                  <a:srgbClr val="1C1B19"/>
-                </a:solidFill>
-                <a:latin typeface="Source Serif 4"/>
-              </a:rPr>
-              <a:t/>
-            </a:r>
-          </a:p>
-        </p:txBody>
-      </p:sp>
-      <p:sp>
-        <p:nvSpPr>
-          <p:cNvPr id="6" name="TextBox 5"/>
-          <p:cNvSpPr txBox="1"/>
-          <p:nvPr/>
-        </p:nvSpPr>
-        <p:spPr>
-          <a:xfrm>
-            <a:off x="6217920" y="1463040"/>
-            <a:ext cx="5394960" cy="4937760"/>
-          </a:xfrm>
-          <a:prstGeom prst="rect">
-            <a:avLst/>
-          </a:prstGeom>
-          <a:noFill/>
-        </p:spPr>
-        <p:txBody>
-          <a:bodyPr wrap="square" anchor="t" lIns="0" rIns="0" tIns="0" bIns="0">
-            <a:spAutoFit/>
-          </a:bodyPr>
-          <a:lstStyle/>
-          <a:p>
-            <a:pPr algn="l">
-              <a:spcAft>
-                <a:spcPts val="585"/>
-              </a:spcAft>
-            </a:pPr>
-            <a:r>
-              <a:rPr sz="1500" b="1" i="0">
-                <a:solidFill>
-                  <a:srgbClr val="1C1B19"/>
-                </a:solidFill>
-                <a:latin typeface="Source Serif 4"/>
-              </a:rPr>
-              <a:t>Curiosity can look different.</a:t>
-            </a:r>
-          </a:p>
-          <a:p>
-            <a:pPr algn="l">
-              <a:spcAft>
-                <a:spcPts val="585"/>
-              </a:spcAft>
-            </a:pPr>
-            <a:r>
-              <a:rPr sz="1300" b="0" i="0">
-                <a:solidFill>
-                  <a:srgbClr val="1C1B19"/>
-                </a:solidFill>
-                <a:latin typeface="Source Serif 4"/>
-              </a:rPr>
-              <a:t>For some students it's gaming lore, sneakers, cooking, a sport's stats, car repair, a faith question, or a younger sibling's homework. Treat all of it as real curiosity. The point is wanting to know, not the topic.</a:t>
-            </a:r>
-          </a:p>
-          <a:p>
-            <a:pPr algn="l">
-              <a:spcAft>
-                <a:spcPts val="585"/>
-              </a:spcAft>
-            </a:pPr>
-            <a:r>
-              <a:rPr sz="1300" b="0" i="0">
-                <a:solidFill>
-                  <a:srgbClr val="1C1B19"/>
-                </a:solidFill>
-                <a:latin typeface="Source Serif 4"/>
-              </a:rPr>
-              <a:t/>
-            </a:r>
-          </a:p>
-          <a:p>
-            <a:pPr algn="l">
-              <a:spcAft>
-                <a:spcPts val="585"/>
-              </a:spcAft>
-            </a:pPr>
-            <a:r>
-              <a:rPr sz="1500" b="1" i="0">
-                <a:solidFill>
-                  <a:srgbClr val="1C1B19"/>
-                </a:solidFill>
-                <a:latin typeface="Source Serif 4"/>
-              </a:rPr>
-              <a:t>Be honest about admissions.</a:t>
-            </a:r>
-          </a:p>
-          <a:p>
-            <a:pPr algn="l">
-              <a:spcAft>
-                <a:spcPts val="585"/>
-              </a:spcAft>
-            </a:pPr>
-            <a:r>
-              <a:rPr sz="1300" b="0" i="0">
-                <a:solidFill>
-                  <a:srgbClr val="1C1B19"/>
-                </a:solidFill>
-                <a:latin typeface="Source Serif 4"/>
-              </a:rPr>
-              <a:t>Say what the evidence supports: many admissions deans endorsed the Turning the Tide report asking for depth and genuine interest over long lists. Don't promise that curiosity gets anyone into a particular school.</a:t>
-            </a:r>
-          </a:p>
-          <a:p>
-            <a:pPr algn="l">
-              <a:spcAft>
-                <a:spcPts val="585"/>
-              </a:spcAft>
-            </a:pPr>
-            <a:r>
-              <a:rPr sz="1300" b="0" i="0">
-                <a:solidFill>
-                  <a:srgbClr val="1C1B19"/>
-                </a:solidFill>
-                <a:latin typeface="Source Serif 4"/>
-              </a:rPr>
-              <a:t/>
-            </a:r>
-          </a:p>
-          <a:p>
-            <a:pPr algn="l">
-              <a:spcAft>
-                <a:spcPts val="585"/>
-              </a:spcAft>
-            </a:pPr>
-            <a:r>
-              <a:rPr sz="1500" b="1" i="0">
-                <a:solidFill>
-                  <a:srgbClr val="1C1B19"/>
-                </a:solidFill>
-                <a:latin typeface="Source Serif 4"/>
-              </a:rPr>
-              <a:t>Model it.</a:t>
-            </a:r>
-          </a:p>
-          <a:p>
-            <a:pPr algn="l">
-              <a:spcAft>
-                <a:spcPts val="585"/>
-              </a:spcAft>
-            </a:pPr>
-            <a:r>
-              <a:rPr sz="1300" b="0" i="0">
-                <a:solidFill>
-                  <a:srgbClr val="1C1B19"/>
-                </a:solidFill>
-                <a:latin typeface="Source Serif 4"/>
-              </a:rPr>
-              <a:t>Share one thing you got curious about recently, outside your subject. Students take the permission more seriously when an adult goes first.</a:t>
-            </a:r>
-          </a:p>
-          <a:p>
-            <a:pPr algn="l">
-              <a:spcAft>
-                <a:spcPts val="585"/>
-              </a:spcAft>
-            </a:pPr>
-            <a:r>
-              <a:rPr sz="1300" b="0" i="0">
-                <a:solidFill>
-                  <a:srgbClr val="1C1B19"/>
-                </a:solidFill>
-                <a:latin typeface="Source Serif 4"/>
-              </a:rPr>
-              <a:t/>
+              <a:t>Trying something you might be bad at</a:t>
             </a:r>
           </a:p>
         </p:txBody>
@@ -5923,13 +6846,13 @@
 </p:sld>
 </file>
 
-<file path=ppt/slides/slide3.xml><?xml version="1.0" encoding="utf-8"?>
-<p:sld xmlns:a="http://schemas.openxmlformats.org/drawingml/2006/main" xmlns:p="http://schemas.openxmlformats.org/presentationml/2006/main" xmlns:r="http://schemas.openxmlformats.org/officeDocument/2006/relationships" show="0">
+<file path=ppt/slides/slide5.xml><?xml version="1.0" encoding="utf-8"?>
+<p:sld xmlns:a="http://schemas.openxmlformats.org/drawingml/2006/main" xmlns:p="http://schemas.openxmlformats.org/presentationml/2006/main" xmlns:r="http://schemas.openxmlformats.org/officeDocument/2006/relationships">
   <p:cSld>
     <p:bg>
       <p:bgPr>
         <a:solidFill>
-          <a:srgbClr val="EEEBE4"/>
+          <a:srgbClr val="F7F4EE"/>
         </a:solidFill>
         <a:effectLst/>
       </p:bgPr>
@@ -5949,14 +6872,14 @@
         </p:nvSpPr>
         <p:spPr>
           <a:xfrm>
-            <a:off x="0" y="0"/>
-            <a:ext cx="12191695" cy="384048"/>
+            <a:off x="548640" y="502920"/>
+            <a:ext cx="457200" cy="54864"/>
           </a:xfrm>
           <a:prstGeom prst="rect">
             <a:avLst/>
           </a:prstGeom>
           <a:solidFill>
-            <a:srgbClr val="0B2D5B"/>
+            <a:srgbClr val="F47B20"/>
           </a:solidFill>
           <a:ln>
             <a:noFill/>
@@ -5993,8 +6916,8 @@
         </p:nvSpPr>
         <p:spPr>
           <a:xfrm>
-            <a:off x="548640" y="100584"/>
-            <a:ext cx="10972800" cy="274320"/>
+            <a:off x="1143000" y="393192"/>
+            <a:ext cx="8229600" cy="274320"/>
           </a:xfrm>
           <a:prstGeom prst="rect">
             <a:avLst/>
@@ -6009,17 +6932,17 @@
           <a:p>
             <a:pPr algn="l">
               <a:spcAft>
-                <a:spcPts val="495"/>
-              </a:spcAft>
-            </a:pPr>
-            <a:r>
-              <a:rPr sz="1100" b="1" i="0">
-                <a:solidFill>
-                  <a:srgbClr val="FFFFFF"/>
+                <a:spcPts val="540"/>
+              </a:spcAft>
+            </a:pPr>
+            <a:r>
+              <a:rPr sz="1200" b="1" i="0">
+                <a:solidFill>
+                  <a:srgbClr val="5D5A54"/>
                 </a:solidFill>
                 <a:latin typeface="Inter Tight"/>
               </a:rPr>
-              <a:t>TEACHER PAGE  ·  skipped when you present  ·  Every student in the room</a:t>
+              <a:t>HOW IT SQUEEZES OUT</a:t>
             </a:r>
           </a:p>
         </p:txBody>
@@ -6032,8 +6955,8 @@
         </p:nvSpPr>
         <p:spPr>
           <a:xfrm>
-            <a:off x="548640" y="685800"/>
-            <a:ext cx="10972800" cy="640080"/>
+            <a:off x="8229600" y="6400800"/>
+            <a:ext cx="3410712" cy="274320"/>
           </a:xfrm>
           <a:prstGeom prst="rect">
             <a:avLst/>
@@ -6046,19 +6969,19 @@
           </a:bodyPr>
           <a:lstStyle/>
           <a:p>
-            <a:pPr algn="l">
-              <a:spcAft>
-                <a:spcPts val="1350"/>
-              </a:spcAft>
-            </a:pPr>
-            <a:r>
-              <a:rPr sz="3000" b="1" i="0">
-                <a:solidFill>
-                  <a:srgbClr val="1C1B19"/>
-                </a:solidFill>
-                <a:latin typeface="Source Serif 4"/>
-              </a:rPr>
-              <a:t>Every student in the room</a:t>
+            <a:pPr algn="r">
+              <a:spcAft>
+                <a:spcPts val="450"/>
+              </a:spcAft>
+            </a:pPr>
+            <a:r>
+              <a:rPr sz="1000" b="0" i="0">
+                <a:solidFill>
+                  <a:srgbClr val="5D5A54"/>
+                </a:solidFill>
+                <a:latin typeface="Inter Tight"/>
+              </a:rPr>
+              <a:t>Beaver Counseling</a:t>
             </a:r>
           </a:p>
         </p:txBody>
@@ -6071,8 +6994,8 @@
         </p:nvSpPr>
         <p:spPr>
           <a:xfrm>
-            <a:off x="548640" y="1325880"/>
-            <a:ext cx="10972800" cy="365760"/>
+            <a:off x="822960" y="1005840"/>
+            <a:ext cx="10515600" cy="914400"/>
           </a:xfrm>
           <a:prstGeom prst="rect">
             <a:avLst/>
@@ -6087,400 +7010,42 @@
           <a:p>
             <a:pPr algn="l">
               <a:spcAft>
-                <a:spcPts val="630"/>
-              </a:spcAft>
-            </a:pPr>
-            <a:r>
-              <a:rPr sz="1400" b="0" i="0">
-                <a:solidFill>
-                  <a:srgbClr val="5D5A54"/>
-                </a:solidFill>
-                <a:latin typeface="Inter Tight"/>
-              </a:rPr>
-              <a:t>Culture, family, identity, ability and money: what to keep in mind for this topic.</a:t>
-            </a:r>
-          </a:p>
-        </p:txBody>
-      </p:sp>
-      <p:sp>
-        <p:nvSpPr>
-          <p:cNvPr id="6" name="TextBox 5"/>
-          <p:cNvSpPr txBox="1"/>
-          <p:nvPr/>
-        </p:nvSpPr>
-        <p:spPr>
-          <a:xfrm>
-            <a:off x="548640" y="1828800"/>
-            <a:ext cx="5394960" cy="4572000"/>
-          </a:xfrm>
-          <a:prstGeom prst="rect">
-            <a:avLst/>
-          </a:prstGeom>
-          <a:noFill/>
-        </p:spPr>
-        <p:txBody>
-          <a:bodyPr wrap="square" anchor="t" lIns="0" rIns="0" tIns="0" bIns="0">
-            <a:spAutoFit/>
-          </a:bodyPr>
-          <a:lstStyle/>
-          <a:p>
-            <a:pPr algn="l">
-              <a:spcAft>
-                <a:spcPts val="585"/>
-              </a:spcAft>
-            </a:pPr>
-            <a:r>
-              <a:rPr sz="1500" b="1" i="0">
+                <a:spcPts val="1530"/>
+              </a:spcAft>
+            </a:pPr>
+            <a:r>
+              <a:rPr sz="3400" b="1" i="0">
                 <a:solidFill>
                   <a:srgbClr val="1C1B19"/>
                 </a:solidFill>
                 <a:latin typeface="Source Serif 4"/>
               </a:rPr>
-              <a:t>Money and time aren't equal.</a:t>
-            </a:r>
-          </a:p>
-          <a:p>
-            <a:pPr algn="l">
-              <a:spcAft>
-                <a:spcPts val="585"/>
-              </a:spcAft>
-            </a:pPr>
-            <a:r>
-              <a:rPr sz="1300" b="0" i="0">
-                <a:solidFill>
-                  <a:srgbClr val="1C1B19"/>
-                </a:solidFill>
-                <a:latin typeface="Source Serif 4"/>
-              </a:rPr>
-              <a:t>Some students work after school, care for siblings, or can't afford camps and lessons. Curiosity doesn't need money: a library card, a question list, a free online course, a conversation with a grandparent. Keep every suggestion free.</a:t>
-            </a:r>
-          </a:p>
-          <a:p>
-            <a:pPr algn="l">
-              <a:spcAft>
-                <a:spcPts val="585"/>
-              </a:spcAft>
-            </a:pPr>
-            <a:r>
-              <a:rPr sz="1300" b="0" i="0">
-                <a:solidFill>
-                  <a:srgbClr val="1C1B19"/>
-                </a:solidFill>
-                <a:latin typeface="Source Serif 4"/>
-              </a:rPr>
-              <a:t/>
-            </a:r>
-          </a:p>
-          <a:p>
-            <a:pPr algn="l">
-              <a:spcAft>
-                <a:spcPts val="585"/>
-              </a:spcAft>
-            </a:pPr>
-            <a:r>
-              <a:rPr sz="1500" b="1" i="0">
-                <a:solidFill>
-                  <a:srgbClr val="1C1B19"/>
-                </a:solidFill>
-                <a:latin typeface="Source Serif 4"/>
-              </a:rPr>
-              <a:t>Family expectations vary.</a:t>
-            </a:r>
-          </a:p>
-          <a:p>
-            <a:pPr algn="l">
-              <a:spcAft>
-                <a:spcPts val="585"/>
-              </a:spcAft>
-            </a:pPr>
-            <a:r>
-              <a:rPr sz="1300" b="0" i="0">
-                <a:solidFill>
-                  <a:srgbClr val="1C1B19"/>
-                </a:solidFill>
-                <a:latin typeface="Source Serif 4"/>
-              </a:rPr>
-              <a:t>In some families, academic achievement is how love and sacrifice get honored. Don't set curiosity against family. Say students can carry both, and that a counselor can help with a family conversation if they want one.</a:t>
-            </a:r>
-          </a:p>
-          <a:p>
-            <a:pPr algn="l">
-              <a:spcAft>
-                <a:spcPts val="585"/>
-              </a:spcAft>
-            </a:pPr>
-            <a:r>
-              <a:rPr sz="1300" b="0" i="0">
-                <a:solidFill>
-                  <a:srgbClr val="1C1B19"/>
-                </a:solidFill>
-                <a:latin typeface="Source Serif 4"/>
-              </a:rPr>
-              <a:t/>
-            </a:r>
-          </a:p>
-          <a:p>
-            <a:pPr algn="l">
-              <a:spcAft>
-                <a:spcPts val="585"/>
-              </a:spcAft>
-            </a:pPr>
-            <a:r>
-              <a:rPr sz="1500" b="1" i="0">
-                <a:solidFill>
-                  <a:srgbClr val="1C1B19"/>
-                </a:solidFill>
-                <a:latin typeface="Source Serif 4"/>
-              </a:rPr>
-              <a:t>Not every family has one path.</a:t>
-            </a:r>
-          </a:p>
-          <a:p>
-            <a:pPr algn="l">
-              <a:spcAft>
-                <a:spcPts val="585"/>
-              </a:spcAft>
-            </a:pPr>
-            <a:r>
-              <a:rPr sz="1300" b="0" i="0">
-                <a:solidFill>
-                  <a:srgbClr val="1C1B19"/>
-                </a:solidFill>
-                <a:latin typeface="Source Serif 4"/>
-              </a:rPr>
-              <a:t>Some students are headed to college, some to work, the military, a trade, or a family business. Curiosity matters for all of them. Avoid making college the only finish line in your examples.</a:t>
-            </a:r>
-          </a:p>
-          <a:p>
-            <a:pPr algn="l">
-              <a:spcAft>
-                <a:spcPts val="585"/>
-              </a:spcAft>
-            </a:pPr>
-            <a:r>
-              <a:rPr sz="1300" b="0" i="0">
-                <a:solidFill>
-                  <a:srgbClr val="1C1B19"/>
-                </a:solidFill>
-                <a:latin typeface="Source Serif 4"/>
-              </a:rPr>
-              <a:t/>
-            </a:r>
-          </a:p>
-        </p:txBody>
-      </p:sp>
-      <p:sp>
-        <p:nvSpPr>
-          <p:cNvPr id="7" name="TextBox 6"/>
-          <p:cNvSpPr txBox="1"/>
-          <p:nvPr/>
-        </p:nvSpPr>
-        <p:spPr>
-          <a:xfrm>
-            <a:off x="6217920" y="1828800"/>
-            <a:ext cx="5394960" cy="4572000"/>
-          </a:xfrm>
-          <a:prstGeom prst="rect">
-            <a:avLst/>
-          </a:prstGeom>
-          <a:noFill/>
-        </p:spPr>
-        <p:txBody>
-          <a:bodyPr wrap="square" anchor="t" lIns="0" rIns="0" tIns="0" bIns="0">
-            <a:spAutoFit/>
-          </a:bodyPr>
-          <a:lstStyle/>
-          <a:p>
-            <a:pPr algn="l">
-              <a:spcAft>
-                <a:spcPts val="585"/>
-              </a:spcAft>
-            </a:pPr>
-            <a:r>
-              <a:rPr sz="1500" b="1" i="0">
-                <a:solidFill>
-                  <a:srgbClr val="1C1B19"/>
-                </a:solidFill>
-                <a:latin typeface="Source Serif 4"/>
-              </a:rPr>
-              <a:t>Neurodivergent students.</a:t>
-            </a:r>
-          </a:p>
-          <a:p>
-            <a:pPr algn="l">
-              <a:spcAft>
-                <a:spcPts val="585"/>
-              </a:spcAft>
-            </a:pPr>
-            <a:r>
-              <a:rPr sz="1300" b="0" i="0">
-                <a:solidFill>
-                  <a:srgbClr val="1C1B19"/>
-                </a:solidFill>
-                <a:latin typeface="Source Serif 4"/>
-              </a:rPr>
-              <a:t>Students with ADHD often have intense, deep interests that school treats as distractions. Name those interests as curiosity. Students with a learning plan may already spend extra hours on schoolwork; protecting free time matters even more for them.</a:t>
-            </a:r>
-          </a:p>
-          <a:p>
-            <a:pPr algn="l">
-              <a:spcAft>
-                <a:spcPts val="585"/>
-              </a:spcAft>
-            </a:pPr>
-            <a:r>
-              <a:rPr sz="1300" b="0" i="0">
-                <a:solidFill>
-                  <a:srgbClr val="1C1B19"/>
-                </a:solidFill>
-                <a:latin typeface="Source Serif 4"/>
-              </a:rPr>
-              <a:t/>
-            </a:r>
-          </a:p>
-          <a:p>
-            <a:pPr algn="l">
-              <a:spcAft>
-                <a:spcPts val="585"/>
-              </a:spcAft>
-            </a:pPr>
-            <a:r>
-              <a:rPr sz="1500" b="1" i="0">
-                <a:solidFill>
-                  <a:srgbClr val="1C1B19"/>
-                </a:solidFill>
-                <a:latin typeface="Source Serif 4"/>
-              </a:rPr>
-              <a:t>Identity and belonging.</a:t>
-            </a:r>
-          </a:p>
-          <a:p>
-            <a:pPr algn="l">
-              <a:spcAft>
-                <a:spcPts val="585"/>
-              </a:spcAft>
-            </a:pPr>
-            <a:r>
-              <a:rPr sz="1300" b="0" i="0">
-                <a:solidFill>
-                  <a:srgbClr val="1C1B19"/>
-                </a:solidFill>
-                <a:latin typeface="Source Serif 4"/>
-              </a:rPr>
-              <a:t>Students of color, LGBTQ+ students, and students new to the country may follow curiosity about their own history, language or community. Treat that as real intellectual curiosity, not a side interest.</a:t>
-            </a:r>
-          </a:p>
-          <a:p>
-            <a:pPr algn="l">
-              <a:spcAft>
-                <a:spcPts val="585"/>
-              </a:spcAft>
-            </a:pPr>
-            <a:r>
-              <a:rPr sz="1300" b="0" i="0">
-                <a:solidFill>
-                  <a:srgbClr val="1C1B19"/>
-                </a:solidFill>
-                <a:latin typeface="Source Serif 4"/>
-              </a:rPr>
-              <a:t/>
-            </a:r>
-          </a:p>
-          <a:p>
-            <a:pPr algn="l">
-              <a:spcAft>
-                <a:spcPts val="585"/>
-              </a:spcAft>
-            </a:pPr>
-            <a:r>
-              <a:rPr sz="1500" b="1" i="0">
-                <a:solidFill>
-                  <a:srgbClr val="1C1B19"/>
-                </a:solidFill>
-                <a:latin typeface="Source Serif 4"/>
-              </a:rPr>
-              <a:t>Language.</a:t>
-            </a:r>
-          </a:p>
-          <a:p>
-            <a:pPr algn="l">
-              <a:spcAft>
-                <a:spcPts val="585"/>
-              </a:spcAft>
-            </a:pPr>
-            <a:r>
-              <a:rPr sz="1300" b="0" i="0">
-                <a:solidFill>
-                  <a:srgbClr val="1C1B19"/>
-                </a:solidFill>
-                <a:latin typeface="Source Serif 4"/>
-              </a:rPr>
-              <a:t>English learners may be curious about plenty and quiet in English. Let them write their rabbit-hole card in any language, or draw it.</a:t>
-            </a:r>
-          </a:p>
-          <a:p>
-            <a:pPr algn="l">
-              <a:spcAft>
-                <a:spcPts val="585"/>
-              </a:spcAft>
-            </a:pPr>
-            <a:r>
-              <a:rPr sz="1300" b="0" i="0">
-                <a:solidFill>
-                  <a:srgbClr val="1C1B19"/>
-                </a:solidFill>
-                <a:latin typeface="Source Serif 4"/>
-              </a:rPr>
-              <a:t/>
-            </a:r>
-          </a:p>
-        </p:txBody>
-      </p:sp>
-    </p:spTree>
-  </p:cSld>
-  <p:clrMapOvr>
-    <a:masterClrMapping/>
-  </p:clrMapOvr>
-</p:sld>
-</file>
-
-<file path=ppt/slides/slide4.xml><?xml version="1.0" encoding="utf-8"?>
-<p:sld xmlns:a="http://schemas.openxmlformats.org/drawingml/2006/main" xmlns:p="http://schemas.openxmlformats.org/presentationml/2006/main" xmlns:r="http://schemas.openxmlformats.org/officeDocument/2006/relationships" show="0">
-  <p:cSld>
-    <p:bg>
-      <p:bgPr>
-        <a:solidFill>
-          <a:srgbClr val="EEEBE4"/>
-        </a:solidFill>
-        <a:effectLst/>
-      </p:bgPr>
-    </p:bg>
-    <p:spTree>
-      <p:nvGrpSpPr>
-        <p:cNvPr id="1" name=""/>
-        <p:cNvGrpSpPr/>
-        <p:nvPr/>
-      </p:nvGrpSpPr>
-      <p:grpSpPr/>
-      <p:sp>
-        <p:nvSpPr>
-          <p:cNvPr id="2" name="Rectangle 1"/>
+              <a:t>The grind loop</a:t>
+            </a:r>
+          </a:p>
+        </p:txBody>
+      </p:sp>
+      <p:sp>
+        <p:nvSpPr>
+          <p:cNvPr id="6" name="Rectangle 5"/>
           <p:cNvSpPr/>
           <p:nvPr/>
         </p:nvSpPr>
         <p:spPr>
           <a:xfrm>
-            <a:off x="0" y="0"/>
-            <a:ext cx="12191695" cy="384048"/>
+            <a:off x="822960" y="2743200"/>
+            <a:ext cx="1874519" cy="1005840"/>
           </a:xfrm>
           <a:prstGeom prst="rect">
             <a:avLst/>
           </a:prstGeom>
           <a:solidFill>
-            <a:srgbClr val="0B2D5B"/>
+            <a:srgbClr val="FFFFFF"/>
           </a:solidFill>
-          <a:ln>
-            <a:noFill/>
+          <a:ln w="15875">
+            <a:solidFill>
+              <a:srgbClr val="0B2D5B"/>
+            </a:solidFill>
           </a:ln>
           <a:effectLst/>
         </p:spPr>
@@ -6508,14 +7073,14 @@
       </p:sp>
       <p:sp>
         <p:nvSpPr>
-          <p:cNvPr id="3" name="TextBox 2"/>
+          <p:cNvPr id="7" name="TextBox 6"/>
           <p:cNvSpPr txBox="1"/>
           <p:nvPr/>
         </p:nvSpPr>
         <p:spPr>
           <a:xfrm>
-            <a:off x="548640" y="100584"/>
-            <a:ext cx="10972800" cy="274320"/>
+            <a:off x="822960" y="2743200"/>
+            <a:ext cx="1874519" cy="1005840"/>
           </a:xfrm>
           <a:prstGeom prst="rect">
             <a:avLst/>
@@ -6523,382 +7088,85 @@
           <a:noFill/>
         </p:spPr>
         <p:txBody>
-          <a:bodyPr wrap="square" anchor="t" lIns="0" rIns="0" tIns="0" bIns="0">
+          <a:bodyPr wrap="square" anchor="ctr" lIns="0" rIns="0" tIns="0" bIns="0">
             <a:spAutoFit/>
           </a:bodyPr>
           <a:lstStyle/>
           <a:p>
-            <a:pPr algn="l">
-              <a:spcAft>
-                <a:spcPts val="495"/>
-              </a:spcAft>
-            </a:pPr>
-            <a:r>
-              <a:rPr sz="1100" b="1" i="0">
-                <a:solidFill>
-                  <a:srgbClr val="FFFFFF"/>
-                </a:solidFill>
-                <a:latin typeface="Inter Tight"/>
-              </a:rPr>
-              <a:t>TEACHER PAGE  ·  skipped when you present  ·  Background</a:t>
-            </a:r>
-          </a:p>
-        </p:txBody>
-      </p:sp>
-      <p:sp>
-        <p:nvSpPr>
-          <p:cNvPr id="4" name="TextBox 3"/>
-          <p:cNvSpPr txBox="1"/>
+            <a:pPr algn="ctr">
+              <a:spcAft>
+                <a:spcPts val="900"/>
+              </a:spcAft>
+            </a:pPr>
+            <a:r>
+              <a:rPr sz="2000" b="1" i="0">
+                <a:solidFill>
+                  <a:srgbClr val="1C1B19"/>
+                </a:solidFill>
+                <a:latin typeface="Source Serif 4"/>
+              </a:rPr>
+              <a:t>Chase the grade</a:t>
+            </a:r>
+          </a:p>
+        </p:txBody>
+      </p:sp>
+      <p:cxnSp>
+        <p:nvCxnSpPr>
+          <p:cNvPr id="8" name="Connector 7"/>
+          <p:cNvCxnSpPr/>
           <p:nvPr/>
-        </p:nvSpPr>
-        <p:spPr>
-          <a:xfrm>
-            <a:off x="548640" y="685800"/>
-            <a:ext cx="10972800" cy="640080"/>
-          </a:xfrm>
-          <a:prstGeom prst="rect">
-            <a:avLst/>
-          </a:prstGeom>
-          <a:noFill/>
-        </p:spPr>
-        <p:txBody>
-          <a:bodyPr wrap="square" anchor="t" lIns="0" rIns="0" tIns="0" bIns="0">
-            <a:spAutoFit/>
-          </a:bodyPr>
-          <a:lstStyle/>
-          <a:p>
-            <a:pPr algn="l">
-              <a:spcAft>
-                <a:spcPts val="1350"/>
-              </a:spcAft>
-            </a:pPr>
-            <a:r>
-              <a:rPr sz="3000" b="1" i="0">
-                <a:solidFill>
-                  <a:srgbClr val="1C1B19"/>
-                </a:solidFill>
-                <a:latin typeface="Source Serif 4"/>
-              </a:rPr>
-              <a:t>What the research says</a:t>
-            </a:r>
-          </a:p>
-        </p:txBody>
-      </p:sp>
-      <p:sp>
-        <p:nvSpPr>
-          <p:cNvPr id="5" name="TextBox 4"/>
-          <p:cNvSpPr txBox="1"/>
-          <p:nvPr/>
-        </p:nvSpPr>
-        <p:spPr>
-          <a:xfrm>
-            <a:off x="548640" y="1463040"/>
-            <a:ext cx="5394960" cy="4937760"/>
-          </a:xfrm>
-          <a:prstGeom prst="rect">
-            <a:avLst/>
-          </a:prstGeom>
-          <a:noFill/>
-        </p:spPr>
-        <p:txBody>
-          <a:bodyPr wrap="square" anchor="t" lIns="0" rIns="0" tIns="0" bIns="0">
-            <a:spAutoFit/>
-          </a:bodyPr>
-          <a:lstStyle/>
-          <a:p>
-            <a:pPr algn="l">
-              <a:spcAft>
-                <a:spcPts val="585"/>
-              </a:spcAft>
-            </a:pPr>
-            <a:r>
-              <a:rPr sz="1300" b="0" i="0">
-                <a:solidFill>
-                  <a:srgbClr val="1C1B19"/>
-                </a:solidFill>
-                <a:latin typeface="Source Serif 4"/>
-              </a:rPr>
-              <a:t>When people were curious about a trivia question, they remembered the answer better, and also remembered unrelated faces shown while they were curious. Brain scans showed the reward and memory systems working together.</a:t>
-            </a:r>
-          </a:p>
-          <a:p>
-            <a:pPr algn="l">
-              <a:spcAft>
-                <a:spcPts val="585"/>
-              </a:spcAft>
-            </a:pPr>
-            <a:r>
-              <a:rPr sz="1050" b="0" i="0">
-                <a:solidFill>
-                  <a:srgbClr val="5D5A54"/>
-                </a:solidFill>
-                <a:latin typeface="Inter Tight"/>
-              </a:rPr>
-              <a:t>Gruber, Gelman &amp; Ranganath, Neuron, 2014</a:t>
-            </a:r>
-          </a:p>
-          <a:p>
-            <a:pPr algn="l">
-              <a:spcAft>
-                <a:spcPts val="585"/>
-              </a:spcAft>
-            </a:pPr>
-            <a:r>
-              <a:rPr sz="1300" b="0" i="0">
-                <a:solidFill>
-                  <a:srgbClr val="1C1B19"/>
-                </a:solidFill>
-                <a:latin typeface="Source Serif 4"/>
-              </a:rPr>
-              <a:t>In a meta-analysis, intellectual curiosity predicted academic performance about as strongly as conscientiousness, on top of intelligence.</a:t>
-            </a:r>
-          </a:p>
-          <a:p>
-            <a:pPr algn="l">
-              <a:spcAft>
-                <a:spcPts val="585"/>
-              </a:spcAft>
-            </a:pPr>
-            <a:r>
-              <a:rPr sz="1050" b="0" i="0">
-                <a:solidFill>
-                  <a:srgbClr val="5D5A54"/>
-                </a:solidFill>
-                <a:latin typeface="Inter Tight"/>
-              </a:rPr>
-              <a:t>von Stumm, Hell &amp; Chamorro-Premuzic, Perspectives on Psychological Science, 2011</a:t>
-            </a:r>
-          </a:p>
-          <a:p>
-            <a:pPr algn="l">
-              <a:spcAft>
-                <a:spcPts val="585"/>
-              </a:spcAft>
-            </a:pPr>
-            <a:r>
-              <a:rPr sz="1300" b="0" i="0">
-                <a:solidFill>
-                  <a:srgbClr val="1C1B19"/>
-                </a:solidFill>
-                <a:latin typeface="Source Serif 4"/>
-              </a:rPr>
-              <a:t>Adolescence is a period of heightened sensitivity to novelty and reward and flexible goal pursuit, which researchers describe as an opportunity for learning and exploration.</a:t>
-            </a:r>
-          </a:p>
-          <a:p>
-            <a:pPr algn="l">
-              <a:spcAft>
-                <a:spcPts val="585"/>
-              </a:spcAft>
-            </a:pPr>
-            <a:r>
-              <a:rPr sz="1050" b="0" i="0">
-                <a:solidFill>
-                  <a:srgbClr val="5D5A54"/>
-                </a:solidFill>
-                <a:latin typeface="Inter Tight"/>
-              </a:rPr>
-              <a:t>Crone &amp; Dahl, Nature Reviews Neuroscience, 2012; Dahl et al., Nature, 2018</a:t>
-            </a:r>
-          </a:p>
-          <a:p>
-            <a:pPr algn="l">
-              <a:spcAft>
-                <a:spcPts val="585"/>
-              </a:spcAft>
-            </a:pPr>
-            <a:r>
-              <a:rPr sz="1300" b="0" i="0">
-                <a:solidFill>
-                  <a:srgbClr val="1C1B19"/>
-                </a:solidFill>
-                <a:latin typeface="Source Serif 4"/>
-              </a:rPr>
-              <a:t>Students at high-pressure schools often describe "doing school": managing grades and activities in ways that crowd out engagement and learning.</a:t>
-            </a:r>
-          </a:p>
-          <a:p>
-            <a:pPr algn="l">
-              <a:spcAft>
-                <a:spcPts val="585"/>
-              </a:spcAft>
-            </a:pPr>
-            <a:r>
-              <a:rPr sz="1050" b="0" i="0">
-                <a:solidFill>
-                  <a:srgbClr val="5D5A54"/>
-                </a:solidFill>
-                <a:latin typeface="Inter Tight"/>
-              </a:rPr>
-              <a:t>Pope, "Doing School", Yale University Press, 2001</a:t>
-            </a:r>
-          </a:p>
-        </p:txBody>
-      </p:sp>
-      <p:sp>
-        <p:nvSpPr>
-          <p:cNvPr id="6" name="TextBox 5"/>
-          <p:cNvSpPr txBox="1"/>
-          <p:nvPr/>
-        </p:nvSpPr>
-        <p:spPr>
-          <a:xfrm>
-            <a:off x="6217920" y="1463040"/>
-            <a:ext cx="5394960" cy="4937760"/>
-          </a:xfrm>
-          <a:prstGeom prst="rect">
-            <a:avLst/>
-          </a:prstGeom>
-          <a:noFill/>
-        </p:spPr>
-        <p:txBody>
-          <a:bodyPr wrap="square" anchor="t" lIns="0" rIns="0" tIns="0" bIns="0">
-            <a:spAutoFit/>
-          </a:bodyPr>
-          <a:lstStyle/>
-          <a:p>
-            <a:pPr algn="l">
-              <a:spcAft>
-                <a:spcPts val="585"/>
-              </a:spcAft>
-            </a:pPr>
-            <a:r>
-              <a:rPr sz="1300" b="0" i="0">
-                <a:solidFill>
-                  <a:srgbClr val="1C1B19"/>
-                </a:solidFill>
-                <a:latin typeface="Source Serif 4"/>
-              </a:rPr>
-              <a:t>Students at high-achieving schools have been identified as an at-risk group, with higher rates of anxiety, depression and substance use than national norms, linked partly to achievement pressure.</a:t>
-            </a:r>
-          </a:p>
-          <a:p>
-            <a:pPr algn="l">
-              <a:spcAft>
-                <a:spcPts val="585"/>
-              </a:spcAft>
-            </a:pPr>
-            <a:r>
-              <a:rPr sz="1050" b="0" i="0">
-                <a:solidFill>
-                  <a:srgbClr val="5D5A54"/>
-                </a:solidFill>
-                <a:latin typeface="Inter Tight"/>
-              </a:rPr>
-              <a:t>Luthar, Kumar &amp; Zillmer, American Psychologist, 2020</a:t>
-            </a:r>
-          </a:p>
-          <a:p>
-            <a:pPr algn="l">
-              <a:spcAft>
-                <a:spcPts val="585"/>
-              </a:spcAft>
-            </a:pPr>
-            <a:r>
-              <a:rPr sz="1300" b="0" i="0">
-                <a:solidFill>
-                  <a:srgbClr val="1C1B19"/>
-                </a:solidFill>
-                <a:latin typeface="Source Serif 4"/>
-              </a:rPr>
-              <a:t>A report endorsed by dozens of college admissions deans urged admissions to value meaningful, sustained engagement over long activity lists.</a:t>
-            </a:r>
-          </a:p>
-          <a:p>
-            <a:pPr algn="l">
-              <a:spcAft>
-                <a:spcPts val="585"/>
-              </a:spcAft>
-            </a:pPr>
-            <a:r>
-              <a:rPr sz="1050" b="0" i="0">
-                <a:solidFill>
-                  <a:srgbClr val="5D5A54"/>
-                </a:solidFill>
-                <a:latin typeface="Inter Tight"/>
-              </a:rPr>
-              <a:t>Making Caring Common, Harvard Graduate School of Education, Turning the Tide, 2016</a:t>
-            </a:r>
-          </a:p>
-          <a:p>
-            <a:pPr algn="l">
-              <a:spcAft>
-                <a:spcPts val="585"/>
-              </a:spcAft>
-            </a:pPr>
-            <a:r>
-              <a:rPr sz="1300" b="0" i="0">
-                <a:solidFill>
-                  <a:srgbClr val="1C1B19"/>
-                </a:solidFill>
-                <a:latin typeface="Source Serif 4"/>
-              </a:rPr>
-              <a:t>Teens build initiative most in voluntary activities they care about, where they are focused and motivated at the same time.</a:t>
-            </a:r>
-          </a:p>
-          <a:p>
-            <a:pPr algn="l">
-              <a:spcAft>
-                <a:spcPts val="585"/>
-              </a:spcAft>
-            </a:pPr>
-            <a:r>
-              <a:rPr sz="1050" b="0" i="0">
-                <a:solidFill>
-                  <a:srgbClr val="5D5A54"/>
-                </a:solidFill>
-                <a:latin typeface="Inter Tight"/>
-              </a:rPr>
-              <a:t>Larson, American Psychologist, 2000</a:t>
-            </a:r>
-          </a:p>
-        </p:txBody>
-      </p:sp>
-    </p:spTree>
-  </p:cSld>
-  <p:clrMapOvr>
-    <a:masterClrMapping/>
-  </p:clrMapOvr>
-</p:sld>
-</file>
-
-<file path=ppt/slides/slide5.xml><?xml version="1.0" encoding="utf-8"?>
-<p:sld xmlns:a="http://schemas.openxmlformats.org/drawingml/2006/main" xmlns:p="http://schemas.openxmlformats.org/presentationml/2006/main" xmlns:r="http://schemas.openxmlformats.org/officeDocument/2006/relationships">
-  <p:cSld>
-    <p:bg>
-      <p:bgPr>
-        <a:solidFill>
-          <a:srgbClr val="0B2D5B"/>
-        </a:solidFill>
-        <a:effectLst/>
-      </p:bgPr>
-    </p:bg>
-    <p:spTree>
-      <p:nvGrpSpPr>
-        <p:cNvPr id="1" name=""/>
-        <p:cNvGrpSpPr/>
-        <p:nvPr/>
-      </p:nvGrpSpPr>
-      <p:grpSpPr/>
-      <p:sp>
-        <p:nvSpPr>
-          <p:cNvPr id="2" name="Rectangle 1"/>
+        </p:nvCxnSpPr>
+        <p:spPr>
+          <a:xfrm>
+            <a:off x="2752344" y="3246120"/>
+            <a:ext cx="896112" cy="0"/>
+          </a:xfrm>
+          <a:prstGeom prst="line">
+            <a:avLst/>
+          </a:prstGeom>
+          <a:ln w="31750">
+            <a:solidFill>
+              <a:srgbClr val="F47B20"/>
+            </a:solidFill>
+            <a:tailEnd type="triangle"/>
+          </a:ln>
+        </p:spPr>
+        <p:style>
+          <a:lnRef idx="2">
+            <a:schemeClr val="accent1"/>
+          </a:lnRef>
+          <a:fillRef idx="0">
+            <a:schemeClr val="accent1"/>
+          </a:fillRef>
+          <a:effectRef idx="1">
+            <a:schemeClr val="accent1"/>
+          </a:effectRef>
+          <a:fontRef idx="minor">
+            <a:schemeClr val="tx1"/>
+          </a:fontRef>
+        </p:style>
+      </p:cxnSp>
+      <p:sp>
+        <p:nvSpPr>
+          <p:cNvPr id="9" name="Rectangle 8"/>
           <p:cNvSpPr/>
           <p:nvPr/>
         </p:nvSpPr>
         <p:spPr>
           <a:xfrm>
-            <a:off x="548640" y="502920"/>
-            <a:ext cx="457200" cy="54864"/>
+            <a:off x="3703320" y="2743200"/>
+            <a:ext cx="1874519" cy="1005840"/>
           </a:xfrm>
           <a:prstGeom prst="rect">
             <a:avLst/>
           </a:prstGeom>
           <a:solidFill>
-            <a:srgbClr val="F47B20"/>
+            <a:srgbClr val="FFFFFF"/>
           </a:solidFill>
-          <a:ln>
-            <a:noFill/>
+          <a:ln w="15875">
+            <a:solidFill>
+              <a:srgbClr val="0B2D5B"/>
+            </a:solidFill>
           </a:ln>
           <a:effectLst/>
         </p:spPr>
@@ -6926,14 +7194,295 @@
       </p:sp>
       <p:sp>
         <p:nvSpPr>
-          <p:cNvPr id="3" name="TextBox 2"/>
+          <p:cNvPr id="10" name="TextBox 9"/>
           <p:cNvSpPr txBox="1"/>
           <p:nvPr/>
         </p:nvSpPr>
         <p:spPr>
           <a:xfrm>
-            <a:off x="1143000" y="393192"/>
-            <a:ext cx="8229600" cy="274320"/>
+            <a:off x="3703320" y="2743200"/>
+            <a:ext cx="1874519" cy="1005840"/>
+          </a:xfrm>
+          <a:prstGeom prst="rect">
+            <a:avLst/>
+          </a:prstGeom>
+          <a:noFill/>
+        </p:spPr>
+        <p:txBody>
+          <a:bodyPr wrap="square" anchor="ctr" lIns="0" rIns="0" tIns="0" bIns="0">
+            <a:spAutoFit/>
+          </a:bodyPr>
+          <a:lstStyle/>
+          <a:p>
+            <a:pPr algn="ctr">
+              <a:spcAft>
+                <a:spcPts val="900"/>
+              </a:spcAft>
+            </a:pPr>
+            <a:r>
+              <a:rPr sz="2000" b="1" i="0">
+                <a:solidFill>
+                  <a:srgbClr val="1C1B19"/>
+                </a:solidFill>
+                <a:latin typeface="Source Serif 4"/>
+              </a:rPr>
+              <a:t>Drop what you love</a:t>
+            </a:r>
+          </a:p>
+        </p:txBody>
+      </p:sp>
+      <p:cxnSp>
+        <p:nvCxnSpPr>
+          <p:cNvPr id="11" name="Connector 10"/>
+          <p:cNvCxnSpPr/>
+          <p:nvPr/>
+        </p:nvCxnSpPr>
+        <p:spPr>
+          <a:xfrm>
+            <a:off x="5632704" y="3246120"/>
+            <a:ext cx="896112" cy="0"/>
+          </a:xfrm>
+          <a:prstGeom prst="line">
+            <a:avLst/>
+          </a:prstGeom>
+          <a:ln w="31750">
+            <a:solidFill>
+              <a:srgbClr val="F47B20"/>
+            </a:solidFill>
+            <a:tailEnd type="triangle"/>
+          </a:ln>
+        </p:spPr>
+        <p:style>
+          <a:lnRef idx="2">
+            <a:schemeClr val="accent1"/>
+          </a:lnRef>
+          <a:fillRef idx="0">
+            <a:schemeClr val="accent1"/>
+          </a:fillRef>
+          <a:effectRef idx="1">
+            <a:schemeClr val="accent1"/>
+          </a:effectRef>
+          <a:fontRef idx="minor">
+            <a:schemeClr val="tx1"/>
+          </a:fontRef>
+        </p:style>
+      </p:cxnSp>
+      <p:sp>
+        <p:nvSpPr>
+          <p:cNvPr id="12" name="Rectangle 11"/>
+          <p:cNvSpPr/>
+          <p:nvPr/>
+        </p:nvSpPr>
+        <p:spPr>
+          <a:xfrm>
+            <a:off x="6583680" y="2743200"/>
+            <a:ext cx="1874519" cy="1005840"/>
+          </a:xfrm>
+          <a:prstGeom prst="rect">
+            <a:avLst/>
+          </a:prstGeom>
+          <a:solidFill>
+            <a:srgbClr val="FFFFFF"/>
+          </a:solidFill>
+          <a:ln w="15875">
+            <a:solidFill>
+              <a:srgbClr val="0B2D5B"/>
+            </a:solidFill>
+          </a:ln>
+          <a:effectLst/>
+        </p:spPr>
+        <p:style>
+          <a:lnRef idx="1">
+            <a:schemeClr val="accent1"/>
+          </a:lnRef>
+          <a:fillRef idx="3">
+            <a:schemeClr val="accent1"/>
+          </a:fillRef>
+          <a:effectRef idx="2">
+            <a:schemeClr val="accent1"/>
+          </a:effectRef>
+          <a:fontRef idx="minor">
+            <a:schemeClr val="lt1"/>
+          </a:fontRef>
+        </p:style>
+        <p:txBody>
+          <a:bodyPr rtlCol="0" anchor="ctr"/>
+          <a:lstStyle/>
+          <a:p>
+            <a:pPr algn="ctr"/>
+          </a:p>
+        </p:txBody>
+      </p:sp>
+      <p:sp>
+        <p:nvSpPr>
+          <p:cNvPr id="13" name="TextBox 12"/>
+          <p:cNvSpPr txBox="1"/>
+          <p:nvPr/>
+        </p:nvSpPr>
+        <p:spPr>
+          <a:xfrm>
+            <a:off x="6583680" y="2743200"/>
+            <a:ext cx="1874519" cy="1005840"/>
+          </a:xfrm>
+          <a:prstGeom prst="rect">
+            <a:avLst/>
+          </a:prstGeom>
+          <a:noFill/>
+        </p:spPr>
+        <p:txBody>
+          <a:bodyPr wrap="square" anchor="ctr" lIns="0" rIns="0" tIns="0" bIns="0">
+            <a:spAutoFit/>
+          </a:bodyPr>
+          <a:lstStyle/>
+          <a:p>
+            <a:pPr algn="ctr">
+              <a:spcAft>
+                <a:spcPts val="900"/>
+              </a:spcAft>
+            </a:pPr>
+            <a:r>
+              <a:rPr sz="2000" b="1" i="0">
+                <a:solidFill>
+                  <a:srgbClr val="1C1B19"/>
+                </a:solidFill>
+                <a:latin typeface="Source Serif 4"/>
+              </a:rPr>
+              <a:t>Less energy</a:t>
+            </a:r>
+          </a:p>
+        </p:txBody>
+      </p:sp>
+      <p:cxnSp>
+        <p:nvCxnSpPr>
+          <p:cNvPr id="14" name="Connector 13"/>
+          <p:cNvCxnSpPr/>
+          <p:nvPr/>
+        </p:nvCxnSpPr>
+        <p:spPr>
+          <a:xfrm>
+            <a:off x="8513064" y="3246120"/>
+            <a:ext cx="896112" cy="0"/>
+          </a:xfrm>
+          <a:prstGeom prst="line">
+            <a:avLst/>
+          </a:prstGeom>
+          <a:ln w="31750">
+            <a:solidFill>
+              <a:srgbClr val="F47B20"/>
+            </a:solidFill>
+            <a:tailEnd type="triangle"/>
+          </a:ln>
+        </p:spPr>
+        <p:style>
+          <a:lnRef idx="2">
+            <a:schemeClr val="accent1"/>
+          </a:lnRef>
+          <a:fillRef idx="0">
+            <a:schemeClr val="accent1"/>
+          </a:fillRef>
+          <a:effectRef idx="1">
+            <a:schemeClr val="accent1"/>
+          </a:effectRef>
+          <a:fontRef idx="minor">
+            <a:schemeClr val="tx1"/>
+          </a:fontRef>
+        </p:style>
+      </p:cxnSp>
+      <p:sp>
+        <p:nvSpPr>
+          <p:cNvPr id="15" name="Rectangle 14"/>
+          <p:cNvSpPr/>
+          <p:nvPr/>
+        </p:nvSpPr>
+        <p:spPr>
+          <a:xfrm>
+            <a:off x="9464040" y="2743200"/>
+            <a:ext cx="1874519" cy="1005840"/>
+          </a:xfrm>
+          <a:prstGeom prst="rect">
+            <a:avLst/>
+          </a:prstGeom>
+          <a:solidFill>
+            <a:srgbClr val="FFFFFF"/>
+          </a:solidFill>
+          <a:ln w="15875">
+            <a:solidFill>
+              <a:srgbClr val="0B2D5B"/>
+            </a:solidFill>
+          </a:ln>
+          <a:effectLst/>
+        </p:spPr>
+        <p:style>
+          <a:lnRef idx="1">
+            <a:schemeClr val="accent1"/>
+          </a:lnRef>
+          <a:fillRef idx="3">
+            <a:schemeClr val="accent1"/>
+          </a:fillRef>
+          <a:effectRef idx="2">
+            <a:schemeClr val="accent1"/>
+          </a:effectRef>
+          <a:fontRef idx="minor">
+            <a:schemeClr val="lt1"/>
+          </a:fontRef>
+        </p:style>
+        <p:txBody>
+          <a:bodyPr rtlCol="0" anchor="ctr"/>
+          <a:lstStyle/>
+          <a:p>
+            <a:pPr algn="ctr"/>
+          </a:p>
+        </p:txBody>
+      </p:sp>
+      <p:sp>
+        <p:nvSpPr>
+          <p:cNvPr id="16" name="TextBox 15"/>
+          <p:cNvSpPr txBox="1"/>
+          <p:nvPr/>
+        </p:nvSpPr>
+        <p:spPr>
+          <a:xfrm>
+            <a:off x="9464040" y="2743200"/>
+            <a:ext cx="1874519" cy="1005840"/>
+          </a:xfrm>
+          <a:prstGeom prst="rect">
+            <a:avLst/>
+          </a:prstGeom>
+          <a:noFill/>
+        </p:spPr>
+        <p:txBody>
+          <a:bodyPr wrap="square" anchor="ctr" lIns="0" rIns="0" tIns="0" bIns="0">
+            <a:spAutoFit/>
+          </a:bodyPr>
+          <a:lstStyle/>
+          <a:p>
+            <a:pPr algn="ctr">
+              <a:spcAft>
+                <a:spcPts val="900"/>
+              </a:spcAft>
+            </a:pPr>
+            <a:r>
+              <a:rPr sz="2000" b="1" i="0">
+                <a:solidFill>
+                  <a:srgbClr val="1C1B19"/>
+                </a:solidFill>
+                <a:latin typeface="Source Serif 4"/>
+              </a:rPr>
+              <a:t>Grind harder</a:t>
+            </a:r>
+          </a:p>
+        </p:txBody>
+      </p:sp>
+      <p:sp>
+        <p:nvSpPr>
+          <p:cNvPr id="17" name="TextBox 16"/>
+          <p:cNvSpPr txBox="1"/>
+          <p:nvPr/>
+        </p:nvSpPr>
+        <p:spPr>
+          <a:xfrm>
+            <a:off x="822960" y="4160520"/>
+            <a:ext cx="10515600" cy="457200"/>
           </a:xfrm>
           <a:prstGeom prst="rect">
             <a:avLst/>
@@ -6946,33 +7495,33 @@
           </a:bodyPr>
           <a:lstStyle/>
           <a:p>
-            <a:pPr algn="l">
-              <a:spcAft>
-                <a:spcPts val="540"/>
-              </a:spcAft>
-            </a:pPr>
-            <a:r>
-              <a:rPr sz="1200" b="1" i="0">
-                <a:solidFill>
-                  <a:srgbClr val="5D5A54"/>
+            <a:pPr algn="ctr">
+              <a:spcAft>
+                <a:spcPts val="810"/>
+              </a:spcAft>
+            </a:pPr>
+            <a:r>
+              <a:rPr sz="1800" b="1" i="0">
+                <a:solidFill>
+                  <a:srgbClr val="F47B20"/>
                 </a:solidFill>
                 <a:latin typeface="Inter Tight"/>
               </a:rPr>
-              <a:t>STAY CURIOUS</a:t>
-            </a:r>
-          </a:p>
-        </p:txBody>
-      </p:sp>
-      <p:sp>
-        <p:nvSpPr>
-          <p:cNvPr id="4" name="TextBox 3"/>
+              <a:t>↺  and around again</a:t>
+            </a:r>
+          </a:p>
+        </p:txBody>
+      </p:sp>
+      <p:sp>
+        <p:nvSpPr>
+          <p:cNvPr id="18" name="TextBox 17"/>
           <p:cNvSpPr txBox="1"/>
           <p:nvPr/>
         </p:nvSpPr>
         <p:spPr>
           <a:xfrm>
-            <a:off x="8229600" y="6400800"/>
-            <a:ext cx="3410712" cy="274320"/>
+            <a:off x="822960" y="4846320"/>
+            <a:ext cx="10515600" cy="1188720"/>
           </a:xfrm>
           <a:prstGeom prst="rect">
             <a:avLst/>
@@ -6985,136 +7534,19 @@
           </a:bodyPr>
           <a:lstStyle/>
           <a:p>
-            <a:pPr algn="r">
-              <a:spcAft>
-                <a:spcPts val="450"/>
-              </a:spcAft>
-            </a:pPr>
-            <a:r>
-              <a:rPr sz="1000" b="0" i="0">
+            <a:pPr algn="ctr">
+              <a:spcAft>
+                <a:spcPts val="900"/>
+              </a:spcAft>
+            </a:pPr>
+            <a:r>
+              <a:rPr sz="2000" b="0" i="1">
                 <a:solidFill>
                   <a:srgbClr val="5D5A54"/>
                 </a:solidFill>
-                <a:latin typeface="Inter Tight"/>
-              </a:rPr>
-              <a:t>Beaver Counseling</a:t>
-            </a:r>
-          </a:p>
-        </p:txBody>
-      </p:sp>
-      <p:sp>
-        <p:nvSpPr>
-          <p:cNvPr id="5" name="TextBox 4"/>
-          <p:cNvSpPr txBox="1"/>
-          <p:nvPr/>
-        </p:nvSpPr>
-        <p:spPr>
-          <a:xfrm>
-            <a:off x="822960" y="2011680"/>
-            <a:ext cx="10515600" cy="1463040"/>
-          </a:xfrm>
-          <a:prstGeom prst="rect">
-            <a:avLst/>
-          </a:prstGeom>
-          <a:noFill/>
-        </p:spPr>
-        <p:txBody>
-          <a:bodyPr wrap="square" anchor="b" lIns="0" rIns="0" tIns="0" bIns="0">
-            <a:spAutoFit/>
-          </a:bodyPr>
-          <a:lstStyle/>
-          <a:p>
-            <a:pPr algn="l">
-              <a:spcAft>
-                <a:spcPts val="2700"/>
-              </a:spcAft>
-            </a:pPr>
-            <a:r>
-              <a:rPr sz="6000" b="1" i="0">
-                <a:solidFill>
-                  <a:srgbClr val="FFFFFF"/>
-                </a:solidFill>
                 <a:latin typeface="Source Serif 4"/>
               </a:rPr>
-              <a:t>Stay Curious</a:t>
-            </a:r>
-          </a:p>
-        </p:txBody>
-      </p:sp>
-      <p:sp>
-        <p:nvSpPr>
-          <p:cNvPr id="6" name="TextBox 5"/>
-          <p:cNvSpPr txBox="1"/>
-          <p:nvPr/>
-        </p:nvSpPr>
-        <p:spPr>
-          <a:xfrm>
-            <a:off x="822960" y="3611880"/>
-            <a:ext cx="10515600" cy="914400"/>
-          </a:xfrm>
-          <a:prstGeom prst="rect">
-            <a:avLst/>
-          </a:prstGeom>
-          <a:noFill/>
-        </p:spPr>
-        <p:txBody>
-          <a:bodyPr wrap="square" anchor="t" lIns="0" rIns="0" tIns="0" bIns="0">
-            <a:spAutoFit/>
-          </a:bodyPr>
-          <a:lstStyle/>
-          <a:p>
-            <a:pPr algn="l">
-              <a:spcAft>
-                <a:spcPts val="1080"/>
-              </a:spcAft>
-            </a:pPr>
-            <a:r>
-              <a:rPr sz="2400" b="0" i="1">
-                <a:solidFill>
-                  <a:srgbClr val="E8E4DA"/>
-                </a:solidFill>
-                <a:latin typeface="Source Serif 4"/>
-              </a:rPr>
-              <a:t>The grind gets you points. Curiosity gets you something to say.</a:t>
-            </a:r>
-          </a:p>
-        </p:txBody>
-      </p:sp>
-      <p:sp>
-        <p:nvSpPr>
-          <p:cNvPr id="7" name="TextBox 6"/>
-          <p:cNvSpPr txBox="1"/>
-          <p:nvPr/>
-        </p:nvSpPr>
-        <p:spPr>
-          <a:xfrm>
-            <a:off x="822960" y="6035040"/>
-            <a:ext cx="7315200" cy="365760"/>
-          </a:xfrm>
-          <a:prstGeom prst="rect">
-            <a:avLst/>
-          </a:prstGeom>
-          <a:noFill/>
-        </p:spPr>
-        <p:txBody>
-          <a:bodyPr wrap="square" anchor="t" lIns="0" rIns="0" tIns="0" bIns="0">
-            <a:spAutoFit/>
-          </a:bodyPr>
-          <a:lstStyle/>
-          <a:p>
-            <a:pPr algn="l">
-              <a:spcAft>
-                <a:spcPts val="585"/>
-              </a:spcAft>
-            </a:pPr>
-            <a:r>
-              <a:rPr sz="1300" b="0" i="0">
-                <a:solidFill>
-                  <a:srgbClr val="E8E4DA"/>
-                </a:solidFill>
-                <a:latin typeface="Inter Tight"/>
-              </a:rPr>
-              <a:t>Beaver Upper School · Counseling</a:t>
+              <a:t>It works for a while. Then it runs you.</a:t>
             </a:r>
           </a:p>
         </p:txBody>
@@ -7223,7 +7655,7 @@
                 </a:solidFill>
                 <a:latin typeface="Inter Tight"/>
               </a:rPr>
-              <a:t>RABBIT HOLES</a:t>
+              <a:t>YOUR BRAIN</a:t>
             </a:r>
           </a:p>
         </p:txBody>
@@ -7269,14 +7701,179 @@
       </p:sp>
       <p:sp>
         <p:nvSpPr>
-          <p:cNvPr id="5" name="Rectangle 4"/>
+          <p:cNvPr id="5" name="TextBox 4"/>
+          <p:cNvSpPr txBox="1"/>
+          <p:nvPr/>
+        </p:nvSpPr>
+        <p:spPr>
+          <a:xfrm>
+            <a:off x="822960" y="914400"/>
+            <a:ext cx="10515600" cy="365760"/>
+          </a:xfrm>
+          <a:prstGeom prst="rect">
+            <a:avLst/>
+          </a:prstGeom>
+          <a:noFill/>
+        </p:spPr>
+        <p:txBody>
+          <a:bodyPr wrap="square" anchor="t" lIns="0" rIns="0" tIns="0" bIns="0">
+            <a:spAutoFit/>
+          </a:bodyPr>
+          <a:lstStyle/>
+          <a:p>
+            <a:pPr algn="l">
+              <a:spcAft>
+                <a:spcPts val="630"/>
+              </a:spcAft>
+            </a:pPr>
+            <a:r>
+              <a:rPr sz="1400" b="1" i="0">
+                <a:solidFill>
+                  <a:srgbClr val="0B2D5B"/>
+                </a:solidFill>
+                <a:latin typeface="Inter Tight"/>
+              </a:rPr>
+              <a:t>Gruber et al., 2014  ·  von Stumm et al., 2011  ·  Dahl et al., 2018</a:t>
+            </a:r>
+          </a:p>
+        </p:txBody>
+      </p:sp>
+      <p:sp>
+        <p:nvSpPr>
+          <p:cNvPr id="6" name="TextBox 5"/>
+          <p:cNvSpPr txBox="1"/>
+          <p:nvPr/>
+        </p:nvSpPr>
+        <p:spPr>
+          <a:xfrm>
+            <a:off x="822960" y="1325880"/>
+            <a:ext cx="10515600" cy="1097280"/>
+          </a:xfrm>
+          <a:prstGeom prst="rect">
+            <a:avLst/>
+          </a:prstGeom>
+          <a:noFill/>
+        </p:spPr>
+        <p:txBody>
+          <a:bodyPr wrap="square" anchor="t" lIns="0" rIns="0" tIns="0" bIns="0">
+            <a:spAutoFit/>
+          </a:bodyPr>
+          <a:lstStyle/>
+          <a:p>
+            <a:pPr algn="l">
+              <a:spcAft>
+                <a:spcPts val="1440"/>
+              </a:spcAft>
+            </a:pPr>
+            <a:r>
+              <a:rPr sz="3200" b="1" i="0">
+                <a:solidFill>
+                  <a:srgbClr val="1C1B19"/>
+                </a:solidFill>
+                <a:latin typeface="Source Serif 4"/>
+              </a:rPr>
+              <a:t>Curious brains remember more.</a:t>
+            </a:r>
+          </a:p>
+        </p:txBody>
+      </p:sp>
+      <p:sp>
+        <p:nvSpPr>
+          <p:cNvPr id="7" name="TextBox 6"/>
+          <p:cNvSpPr txBox="1"/>
+          <p:nvPr/>
+        </p:nvSpPr>
+        <p:spPr>
+          <a:xfrm>
+            <a:off x="822960" y="2514600"/>
+            <a:ext cx="10515600" cy="2194560"/>
+          </a:xfrm>
+          <a:prstGeom prst="rect">
+            <a:avLst/>
+          </a:prstGeom>
+          <a:noFill/>
+        </p:spPr>
+        <p:txBody>
+          <a:bodyPr wrap="square" anchor="t" lIns="0" rIns="0" tIns="0" bIns="0">
+            <a:spAutoFit/>
+          </a:bodyPr>
+          <a:lstStyle/>
+          <a:p>
+            <a:pPr algn="l">
+              <a:spcAft>
+                <a:spcPts val="855"/>
+              </a:spcAft>
+            </a:pPr>
+            <a:r>
+              <a:rPr sz="1900" b="0" i="0">
+                <a:solidFill>
+                  <a:srgbClr val="1C1B19"/>
+                </a:solidFill>
+                <a:latin typeface="Source Serif 4"/>
+              </a:rPr>
+              <a:t>•  Curious about a question? You remember the answer better.</a:t>
+            </a:r>
+          </a:p>
+          <a:p>
+            <a:pPr algn="l">
+              <a:spcAft>
+                <a:spcPts val="855"/>
+              </a:spcAft>
+            </a:pPr>
+            <a:r>
+              <a:rPr sz="1900" b="0" i="0">
+                <a:solidFill>
+                  <a:srgbClr val="1C1B19"/>
+                </a:solidFill>
+                <a:latin typeface="Source Serif 4"/>
+              </a:rPr>
+              <a:t>•  You even remember unrelated things you saw while curious.</a:t>
+            </a:r>
+          </a:p>
+          <a:p>
+            <a:pPr algn="l">
+              <a:spcAft>
+                <a:spcPts val="855"/>
+              </a:spcAft>
+            </a:pPr>
+            <a:r>
+              <a:rPr sz="1900" b="0" i="0">
+                <a:solidFill>
+                  <a:srgbClr val="1C1B19"/>
+                </a:solidFill>
+                <a:latin typeface="Source Serif 4"/>
+              </a:rPr>
+              <a:t>•  Curiosity predicts grades about as well as working hard does.</a:t>
+            </a:r>
+          </a:p>
+          <a:p>
+            <a:pPr algn="l">
+              <a:spcAft>
+                <a:spcPts val="855"/>
+              </a:spcAft>
+            </a:pPr>
+            <a:r>
+              <a:rPr sz="1900" b="0" i="0">
+                <a:solidFill>
+                  <a:srgbClr val="1C1B19"/>
+                </a:solidFill>
+                <a:latin typeface="Source Serif 4"/>
+              </a:rPr>
+              <a:t>•  Teen brains are extra tuned to new things. That's a learning window.</a:t>
+            </a:r>
+          </a:p>
+        </p:txBody>
+      </p:sp>
+      <p:sp>
+        <p:nvSpPr>
+          <p:cNvPr id="8" name="Rectangle 7"/>
           <p:cNvSpPr/>
           <p:nvPr/>
         </p:nvSpPr>
         <p:spPr>
           <a:xfrm>
-            <a:off x="822960" y="1371600"/>
-            <a:ext cx="73152" cy="3566160"/>
+            <a:off x="822960" y="4892040"/>
+            <a:ext cx="73152" cy="1097280"/>
           </a:xfrm>
           <a:prstGeom prst="rect">
             <a:avLst/>
@@ -7313,53 +7910,14 @@
       </p:sp>
       <p:sp>
         <p:nvSpPr>
-          <p:cNvPr id="6" name="TextBox 5"/>
+          <p:cNvPr id="9" name="TextBox 8"/>
           <p:cNvSpPr txBox="1"/>
           <p:nvPr/>
         </p:nvSpPr>
         <p:spPr>
           <a:xfrm>
-            <a:off x="1188720" y="1371600"/>
-            <a:ext cx="10058400" cy="3566160"/>
-          </a:xfrm>
-          <a:prstGeom prst="rect">
-            <a:avLst/>
-          </a:prstGeom>
-          <a:noFill/>
-        </p:spPr>
-        <p:txBody>
-          <a:bodyPr wrap="square" anchor="ctr" lIns="0" rIns="0" tIns="0" bIns="0">
-            <a:spAutoFit/>
-          </a:bodyPr>
-          <a:lstStyle/>
-          <a:p>
-            <a:pPr algn="l">
-              <a:spcAft>
-                <a:spcPts val="1800"/>
-              </a:spcAft>
-            </a:pPr>
-            <a:r>
-              <a:rPr sz="4000" b="0" i="1">
-                <a:solidFill>
-                  <a:srgbClr val="1C1B19"/>
-                </a:solidFill>
-                <a:latin typeface="Source Serif 4"/>
-              </a:rPr>
-              <a:t>What's the last thing you looked up just because you wanted to know?</a:t>
-            </a:r>
-          </a:p>
-        </p:txBody>
-      </p:sp>
-      <p:sp>
-        <p:nvSpPr>
-          <p:cNvPr id="7" name="TextBox 6"/>
-          <p:cNvSpPr txBox="1"/>
-          <p:nvPr/>
-        </p:nvSpPr>
-        <p:spPr>
-          <a:xfrm>
-            <a:off x="1188720" y="5120640"/>
-            <a:ext cx="10058400" cy="914400"/>
+            <a:off x="1097280" y="4892040"/>
+            <a:ext cx="10241280" cy="1188720"/>
           </a:xfrm>
           <a:prstGeom prst="rect">
             <a:avLst/>
@@ -7374,17 +7932,33 @@
           <a:p>
             <a:pPr algn="l">
               <a:spcAft>
-                <a:spcPts val="810"/>
-              </a:spcAft>
-            </a:pPr>
-            <a:r>
-              <a:rPr sz="1800" b="0" i="0">
-                <a:solidFill>
-                  <a:srgbClr val="5D5A54"/>
+                <a:spcPts val="855"/>
+              </a:spcAft>
+            </a:pPr>
+            <a:r>
+              <a:rPr sz="1200" b="1" i="0">
+                <a:solidFill>
+                  <a:srgbClr val="F47B20"/>
                 </a:solidFill>
                 <a:latin typeface="Inter Tight"/>
               </a:rPr>
-              <a:t>One word or a few. Pass is fine.</a:t>
+              <a:t>IN CLASS</a:t>
+            </a:r>
+          </a:p>
+          <a:p>
+            <a:pPr algn="l">
+              <a:spcAft>
+                <a:spcPts val="855"/>
+              </a:spcAft>
+            </a:pPr>
+            <a:r>
+              <a:rPr sz="1900" b="0" i="0">
+                <a:solidFill>
+                  <a:srgbClr val="1C1B19"/>
+                </a:solidFill>
+                <a:latin typeface="Source Serif 4"/>
+              </a:rPr>
+              <a:t>Curiosity helps grades, too. Protecting it isn't a luxury.</a:t>
             </a:r>
           </a:p>
         </p:txBody>
@@ -7493,7 +8067,7 @@
                 </a:solidFill>
                 <a:latin typeface="Inter Tight"/>
               </a:rPr>
-              <a:t>SORT IT</a:t>
+              <a:t>SOMETHING TO SAY</a:t>
             </a:r>
           </a:p>
         </p:txBody>
@@ -7571,7 +8145,7 @@
                 </a:solidFill>
                 <a:latin typeface="Source Serif 4"/>
               </a:rPr>
-              <a:t>Grind or curiosity?</a:t>
+              <a:t>Two seniors. Who has more to say?</a:t>
             </a:r>
           </a:p>
         </p:txBody>
@@ -7585,7 +8159,7 @@
         <p:spPr>
           <a:xfrm>
             <a:off x="822960" y="2103120"/>
-            <a:ext cx="5120640" cy="3931920"/>
+            <a:ext cx="3322320" cy="3840480"/>
           </a:xfrm>
           <a:prstGeom prst="rect">
             <a:avLst/>
@@ -7630,8 +8204,8 @@
         </p:nvSpPr>
         <p:spPr>
           <a:xfrm>
-            <a:off x="1097280" y="2286000"/>
-            <a:ext cx="4572000" cy="457200"/>
+            <a:off x="1051560" y="2286000"/>
+            <a:ext cx="2865120" cy="365760"/>
           </a:xfrm>
           <a:prstGeom prst="rect">
             <a:avLst/>
@@ -7656,7 +8230,7 @@
                 </a:solidFill>
                 <a:latin typeface="Inter Tight"/>
               </a:rPr>
-              <a:t>GRIND</a:t>
+              <a:t>JORDAN</a:t>
             </a:r>
           </a:p>
         </p:txBody>
@@ -7669,8 +8243,8 @@
         </p:nvSpPr>
         <p:spPr>
           <a:xfrm>
-            <a:off x="1097280" y="2788920"/>
-            <a:ext cx="4572000" cy="3108960"/>
+            <a:off x="1051560" y="2743200"/>
+            <a:ext cx="2865120" cy="3017520"/>
           </a:xfrm>
           <a:prstGeom prst="rect">
             <a:avLst/>
@@ -7685,65 +8259,17 @@
           <a:p>
             <a:pPr algn="l">
               <a:spcAft>
-                <a:spcPts val="855"/>
-              </a:spcAft>
-            </a:pPr>
-            <a:r>
-              <a:rPr sz="1900" b="0" i="0">
+                <a:spcPts val="810"/>
+              </a:spcAft>
+            </a:pPr>
+            <a:r>
+              <a:rPr sz="1800" b="0" i="0">
                 <a:solidFill>
                   <a:srgbClr val="1C1B19"/>
                 </a:solidFill>
                 <a:latin typeface="Source Serif 4"/>
               </a:rPr>
-              <a:t>Studying only what's on the test</a:t>
-            </a:r>
-          </a:p>
-          <a:p>
-            <a:pPr algn="l">
-              <a:spcAft>
-                <a:spcPts val="855"/>
-              </a:spcAft>
-            </a:pPr>
-            <a:r>
-              <a:rPr sz="1900" b="0" i="0">
-                <a:solidFill>
-                  <a:srgbClr val="1C1B19"/>
-                </a:solidFill>
-                <a:latin typeface="Source Serif 4"/>
-              </a:rPr>
-              <a:t>Joining a club for the résumé</a:t>
-            </a:r>
-          </a:p>
-          <a:p>
-            <a:pPr algn="l">
-              <a:spcAft>
-                <a:spcPts val="855"/>
-              </a:spcAft>
-            </a:pPr>
-            <a:r>
-              <a:rPr sz="1900" b="0" i="0">
-                <a:solidFill>
-                  <a:srgbClr val="1C1B19"/>
-                </a:solidFill>
-                <a:latin typeface="Source Serif 4"/>
-              </a:rPr>
-              <a:t>Asking "will this be graded?"</a:t>
-            </a:r>
-          </a:p>
-          <a:p>
-            <a:pPr algn="l">
-              <a:spcAft>
-                <a:spcPts val="855"/>
-              </a:spcAft>
-            </a:pPr>
-            <a:r>
-              <a:rPr sz="1900" b="0" i="0">
-                <a:solidFill>
-                  <a:srgbClr val="1C1B19"/>
-                </a:solidFill>
-                <a:latin typeface="Source Serif 4"/>
-              </a:rPr>
-              <a:t>Picking the easy A</a:t>
+              <a:t>Eleven activities, officer in four. Hasn't kept any longer than a year. Asked about a favorite, Jordan pauses.</a:t>
             </a:r>
           </a:p>
         </p:txBody>
@@ -7756,8 +8282,8 @@
         </p:nvSpPr>
         <p:spPr>
           <a:xfrm>
-            <a:off x="6309360" y="2103120"/>
-            <a:ext cx="5120640" cy="3931920"/>
+            <a:off x="4419600" y="2103120"/>
+            <a:ext cx="3322320" cy="3840480"/>
           </a:xfrm>
           <a:prstGeom prst="rect">
             <a:avLst/>
@@ -7802,8 +8328,8 @@
         </p:nvSpPr>
         <p:spPr>
           <a:xfrm>
-            <a:off x="6583680" y="2286000"/>
-            <a:ext cx="4572000" cy="457200"/>
+            <a:off x="4648200" y="2286000"/>
+            <a:ext cx="2865120" cy="365760"/>
           </a:xfrm>
           <a:prstGeom prst="rect">
             <a:avLst/>
@@ -7828,7 +8354,7 @@
                 </a:solidFill>
                 <a:latin typeface="Inter Tight"/>
               </a:rPr>
-              <a:t>CURIOSITY</a:t>
+              <a:t>PRIYA</a:t>
             </a:r>
           </a:p>
         </p:txBody>
@@ -7841,8 +8367,8 @@
         </p:nvSpPr>
         <p:spPr>
           <a:xfrm>
-            <a:off x="6583680" y="2788920"/>
-            <a:ext cx="4572000" cy="3108960"/>
+            <a:off x="4648200" y="2743200"/>
+            <a:ext cx="2865120" cy="3017520"/>
           </a:xfrm>
           <a:prstGeom prst="rect">
             <a:avLst/>
@@ -7857,65 +8383,141 @@
           <a:p>
             <a:pPr algn="l">
               <a:spcAft>
-                <a:spcPts val="855"/>
-              </a:spcAft>
-            </a:pPr>
-            <a:r>
-              <a:rPr sz="1900" b="0" i="0">
+                <a:spcPts val="810"/>
+              </a:spcAft>
+            </a:pPr>
+            <a:r>
+              <a:rPr sz="1800" b="0" i="0">
                 <a:solidFill>
                   <a:srgbClr val="1C1B19"/>
                 </a:solidFill>
                 <a:latin typeface="Source Serif 4"/>
               </a:rPr>
-              <a:t>Asking "why does that work?"</a:t>
-            </a:r>
-          </a:p>
-          <a:p>
-            <a:pPr algn="l">
-              <a:spcAft>
-                <a:spcPts val="855"/>
-              </a:spcAft>
-            </a:pPr>
-            <a:r>
-              <a:rPr sz="1900" b="0" i="0">
+              <a:t>Two activities. Has spent three years restoring old bikes with her uncle and now fixes them for kids in her building.</a:t>
+            </a:r>
+          </a:p>
+        </p:txBody>
+      </p:sp>
+      <p:sp>
+        <p:nvSpPr>
+          <p:cNvPr id="12" name="Rectangle 11"/>
+          <p:cNvSpPr/>
+          <p:nvPr/>
+        </p:nvSpPr>
+        <p:spPr>
+          <a:xfrm>
+            <a:off x="8016239" y="2103120"/>
+            <a:ext cx="3322320" cy="3840480"/>
+          </a:xfrm>
+          <a:prstGeom prst="rect">
+            <a:avLst/>
+          </a:prstGeom>
+          <a:solidFill>
+            <a:srgbClr val="FFFFFF"/>
+          </a:solidFill>
+          <a:ln w="15875">
+            <a:solidFill>
+              <a:srgbClr val="D8D2C6"/>
+            </a:solidFill>
+          </a:ln>
+          <a:effectLst/>
+        </p:spPr>
+        <p:style>
+          <a:lnRef idx="1">
+            <a:schemeClr val="accent1"/>
+          </a:lnRef>
+          <a:fillRef idx="3">
+            <a:schemeClr val="accent1"/>
+          </a:fillRef>
+          <a:effectRef idx="2">
+            <a:schemeClr val="accent1"/>
+          </a:effectRef>
+          <a:fontRef idx="minor">
+            <a:schemeClr val="lt1"/>
+          </a:fontRef>
+        </p:style>
+        <p:txBody>
+          <a:bodyPr rtlCol="0" anchor="ctr"/>
+          <a:lstStyle/>
+          <a:p>
+            <a:pPr algn="ctr"/>
+          </a:p>
+        </p:txBody>
+      </p:sp>
+      <p:sp>
+        <p:nvSpPr>
+          <p:cNvPr id="13" name="TextBox 12"/>
+          <p:cNvSpPr txBox="1"/>
+          <p:nvPr/>
+        </p:nvSpPr>
+        <p:spPr>
+          <a:xfrm>
+            <a:off x="8244839" y="2286000"/>
+            <a:ext cx="2865120" cy="365760"/>
+          </a:xfrm>
+          <a:prstGeom prst="rect">
+            <a:avLst/>
+          </a:prstGeom>
+          <a:noFill/>
+        </p:spPr>
+        <p:txBody>
+          <a:bodyPr wrap="square" anchor="t" lIns="0" rIns="0" tIns="0" bIns="0">
+            <a:spAutoFit/>
+          </a:bodyPr>
+          <a:lstStyle/>
+          <a:p>
+            <a:pPr algn="l">
+              <a:spcAft>
+                <a:spcPts val="585"/>
+              </a:spcAft>
+            </a:pPr>
+            <a:r>
+              <a:rPr sz="1300" b="1" i="0">
+                <a:solidFill>
+                  <a:srgbClr val="0B2D5B"/>
+                </a:solidFill>
+                <a:latin typeface="Inter Tight"/>
+              </a:rPr>
+              <a:t>YOU</a:t>
+            </a:r>
+          </a:p>
+        </p:txBody>
+      </p:sp>
+      <p:sp>
+        <p:nvSpPr>
+          <p:cNvPr id="14" name="TextBox 13"/>
+          <p:cNvSpPr txBox="1"/>
+          <p:nvPr/>
+        </p:nvSpPr>
+        <p:spPr>
+          <a:xfrm>
+            <a:off x="8244839" y="2743200"/>
+            <a:ext cx="2865120" cy="3017520"/>
+          </a:xfrm>
+          <a:prstGeom prst="rect">
+            <a:avLst/>
+          </a:prstGeom>
+          <a:noFill/>
+        </p:spPr>
+        <p:txBody>
+          <a:bodyPr wrap="square" anchor="t" lIns="0" rIns="0" tIns="0" bIns="0">
+            <a:spAutoFit/>
+          </a:bodyPr>
+          <a:lstStyle/>
+          <a:p>
+            <a:pPr algn="l">
+              <a:spcAft>
+                <a:spcPts val="810"/>
+              </a:spcAft>
+            </a:pPr>
+            <a:r>
+              <a:rPr sz="1800" b="0" i="0">
                 <a:solidFill>
                   <a:srgbClr val="1C1B19"/>
                 </a:solidFill>
                 <a:latin typeface="Source Serif 4"/>
               </a:rPr>
-              <a:t>Reading past the assignment</a:t>
-            </a:r>
-          </a:p>
-          <a:p>
-            <a:pPr algn="l">
-              <a:spcAft>
-                <a:spcPts val="855"/>
-              </a:spcAft>
-            </a:pPr>
-            <a:r>
-              <a:rPr sz="1900" b="0" i="0">
-                <a:solidFill>
-                  <a:srgbClr val="1C1B19"/>
-                </a:solidFill>
-                <a:latin typeface="Source Serif 4"/>
-              </a:rPr>
-              <a:t>Sticking with a hobby for years</a:t>
-            </a:r>
-          </a:p>
-          <a:p>
-            <a:pPr algn="l">
-              <a:spcAft>
-                <a:spcPts val="855"/>
-              </a:spcAft>
-            </a:pPr>
-            <a:r>
-              <a:rPr sz="1900" b="0" i="0">
-                <a:solidFill>
-                  <a:srgbClr val="1C1B19"/>
-                </a:solidFill>
-                <a:latin typeface="Source Serif 4"/>
-              </a:rPr>
-              <a:t>Trying something you might be bad at</a:t>
+              <a:t>What's one thing you'd want to still be doing in two years, even if no one ever saw it?</a:t>
             </a:r>
           </a:p>
         </p:txBody>
@@ -8024,7 +8626,7 @@
                 </a:solidFill>
                 <a:latin typeface="Inter Tight"/>
               </a:rPr>
-              <a:t>HOW IT SQUEEZES OUT</a:t>
+              <a:t>BEFORE YOU GO</a:t>
             </a:r>
           </a:p>
         </p:txBody>
@@ -8076,7 +8678,7 @@
         </p:nvSpPr>
         <p:spPr>
           <a:xfrm>
-            <a:off x="822960" y="1005840"/>
+            <a:off x="822960" y="1188720"/>
             <a:ext cx="10515600" cy="914400"/>
           </a:xfrm>
           <a:prstGeom prst="rect">
@@ -8092,31 +8694,70 @@
           <a:p>
             <a:pPr algn="l">
               <a:spcAft>
-                <a:spcPts val="1530"/>
-              </a:spcAft>
-            </a:pPr>
-            <a:r>
-              <a:rPr sz="3400" b="1" i="0">
+                <a:spcPts val="1620"/>
+              </a:spcAft>
+            </a:pPr>
+            <a:r>
+              <a:rPr sz="3600" b="1" i="0">
                 <a:solidFill>
                   <a:srgbClr val="1C1B19"/>
                 </a:solidFill>
                 <a:latin typeface="Source Serif 4"/>
               </a:rPr>
-              <a:t>The grind loop</a:t>
-            </a:r>
-          </a:p>
-        </p:txBody>
-      </p:sp>
-      <p:sp>
-        <p:nvSpPr>
-          <p:cNvPr id="6" name="Rectangle 5"/>
+              <a:t>Feed one question this week.</a:t>
+            </a:r>
+          </a:p>
+        </p:txBody>
+      </p:sp>
+      <p:sp>
+        <p:nvSpPr>
+          <p:cNvPr id="6" name="TextBox 5"/>
+          <p:cNvSpPr txBox="1"/>
+          <p:nvPr/>
+        </p:nvSpPr>
+        <p:spPr>
+          <a:xfrm>
+            <a:off x="822960" y="2286000"/>
+            <a:ext cx="10515600" cy="1463040"/>
+          </a:xfrm>
+          <a:prstGeom prst="rect">
+            <a:avLst/>
+          </a:prstGeom>
+          <a:noFill/>
+        </p:spPr>
+        <p:txBody>
+          <a:bodyPr wrap="square" anchor="t" lIns="0" rIns="0" tIns="0" bIns="0">
+            <a:spAutoFit/>
+          </a:bodyPr>
+          <a:lstStyle/>
+          <a:p>
+            <a:pPr algn="l">
+              <a:spcAft>
+                <a:spcPts val="1080"/>
+              </a:spcAft>
+            </a:pPr>
+            <a:r>
+              <a:rPr sz="2400" b="0" i="0">
+                <a:solidFill>
+                  <a:srgbClr val="1C1B19"/>
+                </a:solidFill>
+                <a:latin typeface="Source Serif 4"/>
+              </a:rPr>
+              <a:t>Pick one from the student page. Keep it to yourself.</a:t>
+            </a:r>
+          </a:p>
+        </p:txBody>
+      </p:sp>
+      <p:sp>
+        <p:nvSpPr>
+          <p:cNvPr id="7" name="Rectangle 6"/>
           <p:cNvSpPr/>
           <p:nvPr/>
         </p:nvSpPr>
         <p:spPr>
           <a:xfrm>
-            <a:off x="822960" y="2743200"/>
-            <a:ext cx="1874519" cy="1005840"/>
+            <a:off x="822960" y="4023360"/>
+            <a:ext cx="10515600" cy="1371600"/>
           </a:xfrm>
           <a:prstGeom prst="rect">
             <a:avLst/>
@@ -8126,7 +8767,7 @@
           </a:solidFill>
           <a:ln w="15875">
             <a:solidFill>
-              <a:srgbClr val="0B2D5B"/>
+              <a:srgbClr val="1C1B19"/>
             </a:solidFill>
           </a:ln>
           <a:effectLst/>
@@ -8155,14 +8796,14 @@
       </p:sp>
       <p:sp>
         <p:nvSpPr>
-          <p:cNvPr id="7" name="TextBox 6"/>
+          <p:cNvPr id="8" name="TextBox 7"/>
           <p:cNvSpPr txBox="1"/>
           <p:nvPr/>
         </p:nvSpPr>
         <p:spPr>
           <a:xfrm>
-            <a:off x="822960" y="2743200"/>
-            <a:ext cx="1874519" cy="1005840"/>
+            <a:off x="1097280" y="4206240"/>
+            <a:ext cx="10058400" cy="365760"/>
           </a:xfrm>
           <a:prstGeom prst="rect">
             <a:avLst/>
@@ -8170,85 +8811,112 @@
           <a:noFill/>
         </p:spPr>
         <p:txBody>
-          <a:bodyPr wrap="square" anchor="ctr" lIns="0" rIns="0" tIns="0" bIns="0">
+          <a:bodyPr wrap="square" anchor="t" lIns="0" rIns="0" tIns="0" bIns="0">
             <a:spAutoFit/>
           </a:bodyPr>
           <a:lstStyle/>
           <a:p>
-            <a:pPr algn="ctr">
+            <a:pPr algn="l">
+              <a:spcAft>
+                <a:spcPts val="540"/>
+              </a:spcAft>
+            </a:pPr>
+            <a:r>
+              <a:rPr sz="1200" b="1" i="0">
+                <a:solidFill>
+                  <a:srgbClr val="0B2D5B"/>
+                </a:solidFill>
+                <a:latin typeface="Inter Tight"/>
+              </a:rPr>
+              <a:t>STUDENT PAGE</a:t>
+            </a:r>
+          </a:p>
+        </p:txBody>
+      </p:sp>
+      <p:sp>
+        <p:nvSpPr>
+          <p:cNvPr id="9" name="TextBox 8"/>
+          <p:cNvSpPr txBox="1"/>
+          <p:nvPr/>
+        </p:nvSpPr>
+        <p:spPr>
+          <a:xfrm>
+            <a:off x="1097280" y="4617720"/>
+            <a:ext cx="10058400" cy="640080"/>
+          </a:xfrm>
+          <a:prstGeom prst="rect">
+            <a:avLst/>
+          </a:prstGeom>
+          <a:noFill/>
+        </p:spPr>
+        <p:txBody>
+          <a:bodyPr wrap="square" anchor="t" lIns="0" rIns="0" tIns="0" bIns="0">
+            <a:spAutoFit/>
+          </a:bodyPr>
+          <a:lstStyle/>
+          <a:p>
+            <a:pPr algn="l">
               <a:spcAft>
                 <a:spcPts val="900"/>
               </a:spcAft>
             </a:pPr>
             <a:r>
-              <a:rPr sz="2000" b="1" i="0">
+              <a:rPr sz="2000" b="0" i="0">
                 <a:solidFill>
                   <a:srgbClr val="1C1B19"/>
                 </a:solidFill>
-                <a:latin typeface="Source Serif 4"/>
-              </a:rPr>
-              <a:t>Chase the grade</a:t>
-            </a:r>
-          </a:p>
-        </p:txBody>
-      </p:sp>
-      <p:cxnSp>
-        <p:nvCxnSpPr>
-          <p:cNvPr id="8" name="Connector 7"/>
-          <p:cNvCxnSpPr/>
-          <p:nvPr/>
-        </p:nvCxnSpPr>
-        <p:spPr>
-          <a:xfrm>
-            <a:off x="2752344" y="3246120"/>
-            <a:ext cx="896112" cy="0"/>
-          </a:xfrm>
-          <a:prstGeom prst="line">
-            <a:avLst/>
-          </a:prstGeom>
-          <a:ln w="31750">
-            <a:solidFill>
-              <a:srgbClr val="F47B20"/>
-            </a:solidFill>
-            <a:tailEnd type="triangle"/>
-          </a:ln>
-        </p:spPr>
-        <p:style>
-          <a:lnRef idx="2">
-            <a:schemeClr val="accent1"/>
-          </a:lnRef>
-          <a:fillRef idx="0">
-            <a:schemeClr val="accent1"/>
-          </a:fillRef>
-          <a:effectRef idx="1">
-            <a:schemeClr val="accent1"/>
-          </a:effectRef>
-          <a:fontRef idx="minor">
-            <a:schemeClr val="tx1"/>
-          </a:fontRef>
-        </p:style>
-      </p:cxnSp>
-      <p:sp>
-        <p:nvSpPr>
-          <p:cNvPr id="9" name="Rectangle 8"/>
+                <a:latin typeface="Inter Tight"/>
+              </a:rPr>
+              <a:t>https://rmwtoolkit.github.io/bcds-toolkit/stay-curious-high-school.html</a:t>
+            </a:r>
+          </a:p>
+        </p:txBody>
+      </p:sp>
+    </p:spTree>
+  </p:cSld>
+  <p:clrMapOvr>
+    <a:masterClrMapping/>
+  </p:clrMapOvr>
+</p:sld>
+</file>
+
+<file path=ppt/slides/slide9.xml><?xml version="1.0" encoding="utf-8"?>
+<p:sld xmlns:a="http://schemas.openxmlformats.org/drawingml/2006/main" xmlns:p="http://schemas.openxmlformats.org/presentationml/2006/main" xmlns:r="http://schemas.openxmlformats.org/officeDocument/2006/relationships" show="0">
+  <p:cSld>
+    <p:bg>
+      <p:bgPr>
+        <a:solidFill>
+          <a:srgbClr val="EEEBE4"/>
+        </a:solidFill>
+        <a:effectLst/>
+      </p:bgPr>
+    </p:bg>
+    <p:spTree>
+      <p:nvGrpSpPr>
+        <p:cNvPr id="1" name=""/>
+        <p:cNvGrpSpPr/>
+        <p:nvPr/>
+      </p:nvGrpSpPr>
+      <p:grpSpPr/>
+      <p:sp>
+        <p:nvSpPr>
+          <p:cNvPr id="2" name="Rectangle 1"/>
           <p:cNvSpPr/>
           <p:nvPr/>
         </p:nvSpPr>
         <p:spPr>
           <a:xfrm>
-            <a:off x="3703320" y="2743200"/>
-            <a:ext cx="1874519" cy="1005840"/>
+            <a:off x="0" y="0"/>
+            <a:ext cx="12191695" cy="384048"/>
           </a:xfrm>
           <a:prstGeom prst="rect">
             <a:avLst/>
           </a:prstGeom>
           <a:solidFill>
-            <a:srgbClr val="FFFFFF"/>
+            <a:srgbClr val="0B2D5B"/>
           </a:solidFill>
-          <a:ln w="15875">
-            <a:solidFill>
-              <a:srgbClr val="0B2D5B"/>
-            </a:solidFill>
+          <a:ln>
+            <a:noFill/>
           </a:ln>
           <a:effectLst/>
         </p:spPr>
@@ -8276,295 +8944,14 @@
       </p:sp>
       <p:sp>
         <p:nvSpPr>
-          <p:cNvPr id="10" name="TextBox 9"/>
+          <p:cNvPr id="3" name="TextBox 2"/>
           <p:cNvSpPr txBox="1"/>
           <p:nvPr/>
         </p:nvSpPr>
         <p:spPr>
           <a:xfrm>
-            <a:off x="3703320" y="2743200"/>
-            <a:ext cx="1874519" cy="1005840"/>
-          </a:xfrm>
-          <a:prstGeom prst="rect">
-            <a:avLst/>
-          </a:prstGeom>
-          <a:noFill/>
-        </p:spPr>
-        <p:txBody>
-          <a:bodyPr wrap="square" anchor="ctr" lIns="0" rIns="0" tIns="0" bIns="0">
-            <a:spAutoFit/>
-          </a:bodyPr>
-          <a:lstStyle/>
-          <a:p>
-            <a:pPr algn="ctr">
-              <a:spcAft>
-                <a:spcPts val="900"/>
-              </a:spcAft>
-            </a:pPr>
-            <a:r>
-              <a:rPr sz="2000" b="1" i="0">
-                <a:solidFill>
-                  <a:srgbClr val="1C1B19"/>
-                </a:solidFill>
-                <a:latin typeface="Source Serif 4"/>
-              </a:rPr>
-              <a:t>Drop what you love</a:t>
-            </a:r>
-          </a:p>
-        </p:txBody>
-      </p:sp>
-      <p:cxnSp>
-        <p:nvCxnSpPr>
-          <p:cNvPr id="11" name="Connector 10"/>
-          <p:cNvCxnSpPr/>
-          <p:nvPr/>
-        </p:nvCxnSpPr>
-        <p:spPr>
-          <a:xfrm>
-            <a:off x="5632704" y="3246120"/>
-            <a:ext cx="896112" cy="0"/>
-          </a:xfrm>
-          <a:prstGeom prst="line">
-            <a:avLst/>
-          </a:prstGeom>
-          <a:ln w="31750">
-            <a:solidFill>
-              <a:srgbClr val="F47B20"/>
-            </a:solidFill>
-            <a:tailEnd type="triangle"/>
-          </a:ln>
-        </p:spPr>
-        <p:style>
-          <a:lnRef idx="2">
-            <a:schemeClr val="accent1"/>
-          </a:lnRef>
-          <a:fillRef idx="0">
-            <a:schemeClr val="accent1"/>
-          </a:fillRef>
-          <a:effectRef idx="1">
-            <a:schemeClr val="accent1"/>
-          </a:effectRef>
-          <a:fontRef idx="minor">
-            <a:schemeClr val="tx1"/>
-          </a:fontRef>
-        </p:style>
-      </p:cxnSp>
-      <p:sp>
-        <p:nvSpPr>
-          <p:cNvPr id="12" name="Rectangle 11"/>
-          <p:cNvSpPr/>
-          <p:nvPr/>
-        </p:nvSpPr>
-        <p:spPr>
-          <a:xfrm>
-            <a:off x="6583680" y="2743200"/>
-            <a:ext cx="1874519" cy="1005840"/>
-          </a:xfrm>
-          <a:prstGeom prst="rect">
-            <a:avLst/>
-          </a:prstGeom>
-          <a:solidFill>
-            <a:srgbClr val="FFFFFF"/>
-          </a:solidFill>
-          <a:ln w="15875">
-            <a:solidFill>
-              <a:srgbClr val="0B2D5B"/>
-            </a:solidFill>
-          </a:ln>
-          <a:effectLst/>
-        </p:spPr>
-        <p:style>
-          <a:lnRef idx="1">
-            <a:schemeClr val="accent1"/>
-          </a:lnRef>
-          <a:fillRef idx="3">
-            <a:schemeClr val="accent1"/>
-          </a:fillRef>
-          <a:effectRef idx="2">
-            <a:schemeClr val="accent1"/>
-          </a:effectRef>
-          <a:fontRef idx="minor">
-            <a:schemeClr val="lt1"/>
-          </a:fontRef>
-        </p:style>
-        <p:txBody>
-          <a:bodyPr rtlCol="0" anchor="ctr"/>
-          <a:lstStyle/>
-          <a:p>
-            <a:pPr algn="ctr"/>
-          </a:p>
-        </p:txBody>
-      </p:sp>
-      <p:sp>
-        <p:nvSpPr>
-          <p:cNvPr id="13" name="TextBox 12"/>
-          <p:cNvSpPr txBox="1"/>
-          <p:nvPr/>
-        </p:nvSpPr>
-        <p:spPr>
-          <a:xfrm>
-            <a:off x="6583680" y="2743200"/>
-            <a:ext cx="1874519" cy="1005840"/>
-          </a:xfrm>
-          <a:prstGeom prst="rect">
-            <a:avLst/>
-          </a:prstGeom>
-          <a:noFill/>
-        </p:spPr>
-        <p:txBody>
-          <a:bodyPr wrap="square" anchor="ctr" lIns="0" rIns="0" tIns="0" bIns="0">
-            <a:spAutoFit/>
-          </a:bodyPr>
-          <a:lstStyle/>
-          <a:p>
-            <a:pPr algn="ctr">
-              <a:spcAft>
-                <a:spcPts val="900"/>
-              </a:spcAft>
-            </a:pPr>
-            <a:r>
-              <a:rPr sz="2000" b="1" i="0">
-                <a:solidFill>
-                  <a:srgbClr val="1C1B19"/>
-                </a:solidFill>
-                <a:latin typeface="Source Serif 4"/>
-              </a:rPr>
-              <a:t>Less energy</a:t>
-            </a:r>
-          </a:p>
-        </p:txBody>
-      </p:sp>
-      <p:cxnSp>
-        <p:nvCxnSpPr>
-          <p:cNvPr id="14" name="Connector 13"/>
-          <p:cNvCxnSpPr/>
-          <p:nvPr/>
-        </p:nvCxnSpPr>
-        <p:spPr>
-          <a:xfrm>
-            <a:off x="8513064" y="3246120"/>
-            <a:ext cx="896112" cy="0"/>
-          </a:xfrm>
-          <a:prstGeom prst="line">
-            <a:avLst/>
-          </a:prstGeom>
-          <a:ln w="31750">
-            <a:solidFill>
-              <a:srgbClr val="F47B20"/>
-            </a:solidFill>
-            <a:tailEnd type="triangle"/>
-          </a:ln>
-        </p:spPr>
-        <p:style>
-          <a:lnRef idx="2">
-            <a:schemeClr val="accent1"/>
-          </a:lnRef>
-          <a:fillRef idx="0">
-            <a:schemeClr val="accent1"/>
-          </a:fillRef>
-          <a:effectRef idx="1">
-            <a:schemeClr val="accent1"/>
-          </a:effectRef>
-          <a:fontRef idx="minor">
-            <a:schemeClr val="tx1"/>
-          </a:fontRef>
-        </p:style>
-      </p:cxnSp>
-      <p:sp>
-        <p:nvSpPr>
-          <p:cNvPr id="15" name="Rectangle 14"/>
-          <p:cNvSpPr/>
-          <p:nvPr/>
-        </p:nvSpPr>
-        <p:spPr>
-          <a:xfrm>
-            <a:off x="9464040" y="2743200"/>
-            <a:ext cx="1874519" cy="1005840"/>
-          </a:xfrm>
-          <a:prstGeom prst="rect">
-            <a:avLst/>
-          </a:prstGeom>
-          <a:solidFill>
-            <a:srgbClr val="FFFFFF"/>
-          </a:solidFill>
-          <a:ln w="15875">
-            <a:solidFill>
-              <a:srgbClr val="0B2D5B"/>
-            </a:solidFill>
-          </a:ln>
-          <a:effectLst/>
-        </p:spPr>
-        <p:style>
-          <a:lnRef idx="1">
-            <a:schemeClr val="accent1"/>
-          </a:lnRef>
-          <a:fillRef idx="3">
-            <a:schemeClr val="accent1"/>
-          </a:fillRef>
-          <a:effectRef idx="2">
-            <a:schemeClr val="accent1"/>
-          </a:effectRef>
-          <a:fontRef idx="minor">
-            <a:schemeClr val="lt1"/>
-          </a:fontRef>
-        </p:style>
-        <p:txBody>
-          <a:bodyPr rtlCol="0" anchor="ctr"/>
-          <a:lstStyle/>
-          <a:p>
-            <a:pPr algn="ctr"/>
-          </a:p>
-        </p:txBody>
-      </p:sp>
-      <p:sp>
-        <p:nvSpPr>
-          <p:cNvPr id="16" name="TextBox 15"/>
-          <p:cNvSpPr txBox="1"/>
-          <p:nvPr/>
-        </p:nvSpPr>
-        <p:spPr>
-          <a:xfrm>
-            <a:off x="9464040" y="2743200"/>
-            <a:ext cx="1874519" cy="1005840"/>
-          </a:xfrm>
-          <a:prstGeom prst="rect">
-            <a:avLst/>
-          </a:prstGeom>
-          <a:noFill/>
-        </p:spPr>
-        <p:txBody>
-          <a:bodyPr wrap="square" anchor="ctr" lIns="0" rIns="0" tIns="0" bIns="0">
-            <a:spAutoFit/>
-          </a:bodyPr>
-          <a:lstStyle/>
-          <a:p>
-            <a:pPr algn="ctr">
-              <a:spcAft>
-                <a:spcPts val="900"/>
-              </a:spcAft>
-            </a:pPr>
-            <a:r>
-              <a:rPr sz="2000" b="1" i="0">
-                <a:solidFill>
-                  <a:srgbClr val="1C1B19"/>
-                </a:solidFill>
-                <a:latin typeface="Source Serif 4"/>
-              </a:rPr>
-              <a:t>Grind harder</a:t>
-            </a:r>
-          </a:p>
-        </p:txBody>
-      </p:sp>
-      <p:sp>
-        <p:nvSpPr>
-          <p:cNvPr id="17" name="TextBox 16"/>
-          <p:cNvSpPr txBox="1"/>
-          <p:nvPr/>
-        </p:nvSpPr>
-        <p:spPr>
-          <a:xfrm>
-            <a:off x="822960" y="4160520"/>
-            <a:ext cx="10515600" cy="457200"/>
+            <a:off x="548640" y="100584"/>
+            <a:ext cx="10972800" cy="274320"/>
           </a:xfrm>
           <a:prstGeom prst="rect">
             <a:avLst/>
@@ -8577,33 +8964,33 @@
           </a:bodyPr>
           <a:lstStyle/>
           <a:p>
-            <a:pPr algn="ctr">
-              <a:spcAft>
-                <a:spcPts val="810"/>
-              </a:spcAft>
-            </a:pPr>
-            <a:r>
-              <a:rPr sz="1800" b="1" i="0">
-                <a:solidFill>
-                  <a:srgbClr val="F47B20"/>
+            <a:pPr algn="l">
+              <a:spcAft>
+                <a:spcPts val="495"/>
+              </a:spcAft>
+            </a:pPr>
+            <a:r>
+              <a:rPr sz="1100" b="1" i="0">
+                <a:solidFill>
+                  <a:srgbClr val="FFFFFF"/>
                 </a:solidFill>
                 <a:latin typeface="Inter Tight"/>
               </a:rPr>
-              <a:t>↺  and around again</a:t>
-            </a:r>
-          </a:p>
-        </p:txBody>
-      </p:sp>
-      <p:sp>
-        <p:nvSpPr>
-          <p:cNvPr id="18" name="TextBox 17"/>
+              <a:t>TEACHER PAGE  ·  skipped when you present  ·  Lesson plan</a:t>
+            </a:r>
+          </a:p>
+        </p:txBody>
+      </p:sp>
+      <p:sp>
+        <p:nvSpPr>
+          <p:cNvPr id="4" name="TextBox 3"/>
           <p:cNvSpPr txBox="1"/>
           <p:nvPr/>
         </p:nvSpPr>
         <p:spPr>
           <a:xfrm>
-            <a:off x="822960" y="4846320"/>
-            <a:ext cx="10515600" cy="1188720"/>
+            <a:off x="548640" y="685800"/>
+            <a:ext cx="10972800" cy="731520"/>
           </a:xfrm>
           <a:prstGeom prst="rect">
             <a:avLst/>
@@ -8616,103 +9003,33 @@
           </a:bodyPr>
           <a:lstStyle/>
           <a:p>
-            <a:pPr algn="ctr">
-              <a:spcAft>
-                <a:spcPts val="900"/>
-              </a:spcAft>
-            </a:pPr>
-            <a:r>
-              <a:rPr sz="2000" b="0" i="1">
-                <a:solidFill>
-                  <a:srgbClr val="5D5A54"/>
+            <a:pPr algn="l">
+              <a:spcAft>
+                <a:spcPts val="1530"/>
+              </a:spcAft>
+            </a:pPr>
+            <a:r>
+              <a:rPr sz="3400" b="1" i="0">
+                <a:solidFill>
+                  <a:srgbClr val="1C1B19"/>
                 </a:solidFill>
                 <a:latin typeface="Source Serif 4"/>
               </a:rPr>
-              <a:t>It works for a while. Then it runs you.</a:t>
-            </a:r>
-          </a:p>
-        </p:txBody>
-      </p:sp>
-    </p:spTree>
-  </p:cSld>
-  <p:clrMapOvr>
-    <a:masterClrMapping/>
-  </p:clrMapOvr>
-</p:sld>
-</file>
-
-<file path=ppt/slides/slide9.xml><?xml version="1.0" encoding="utf-8"?>
-<p:sld xmlns:a="http://schemas.openxmlformats.org/drawingml/2006/main" xmlns:p="http://schemas.openxmlformats.org/presentationml/2006/main" xmlns:r="http://schemas.openxmlformats.org/officeDocument/2006/relationships">
-  <p:cSld>
-    <p:bg>
-      <p:bgPr>
-        <a:solidFill>
-          <a:srgbClr val="F7F4EE"/>
-        </a:solidFill>
-        <a:effectLst/>
-      </p:bgPr>
-    </p:bg>
-    <p:spTree>
-      <p:nvGrpSpPr>
-        <p:cNvPr id="1" name=""/>
-        <p:cNvGrpSpPr/>
-        <p:nvPr/>
-      </p:nvGrpSpPr>
-      <p:grpSpPr/>
-      <p:sp>
-        <p:nvSpPr>
-          <p:cNvPr id="2" name="Rectangle 1"/>
-          <p:cNvSpPr/>
-          <p:nvPr/>
-        </p:nvSpPr>
-        <p:spPr>
-          <a:xfrm>
-            <a:off x="548640" y="502920"/>
-            <a:ext cx="457200" cy="54864"/>
-          </a:xfrm>
-          <a:prstGeom prst="rect">
-            <a:avLst/>
-          </a:prstGeom>
-          <a:solidFill>
-            <a:srgbClr val="F47B20"/>
-          </a:solidFill>
-          <a:ln>
-            <a:noFill/>
-          </a:ln>
-          <a:effectLst/>
-        </p:spPr>
-        <p:style>
-          <a:lnRef idx="1">
-            <a:schemeClr val="accent1"/>
-          </a:lnRef>
-          <a:fillRef idx="3">
-            <a:schemeClr val="accent1"/>
-          </a:fillRef>
-          <a:effectRef idx="2">
-            <a:schemeClr val="accent1"/>
-          </a:effectRef>
-          <a:fontRef idx="minor">
-            <a:schemeClr val="lt1"/>
-          </a:fontRef>
-        </p:style>
-        <p:txBody>
-          <a:bodyPr rtlCol="0" anchor="ctr"/>
-          <a:lstStyle/>
-          <a:p>
-            <a:pPr algn="ctr"/>
-          </a:p>
-        </p:txBody>
-      </p:sp>
-      <p:sp>
-        <p:nvSpPr>
-          <p:cNvPr id="3" name="TextBox 2"/>
+              <a:t>Stay Curious</a:t>
+            </a:r>
+          </a:p>
+        </p:txBody>
+      </p:sp>
+      <p:sp>
+        <p:nvSpPr>
+          <p:cNvPr id="5" name="TextBox 4"/>
           <p:cNvSpPr txBox="1"/>
           <p:nvPr/>
         </p:nvSpPr>
         <p:spPr>
           <a:xfrm>
-            <a:off x="1143000" y="393192"/>
-            <a:ext cx="8229600" cy="274320"/>
+            <a:off x="548640" y="1325880"/>
+            <a:ext cx="10972800" cy="365760"/>
           </a:xfrm>
           <a:prstGeom prst="rect">
             <a:avLst/>
@@ -8727,31 +9044,31 @@
           <a:p>
             <a:pPr algn="l">
               <a:spcAft>
-                <a:spcPts val="540"/>
-              </a:spcAft>
-            </a:pPr>
-            <a:r>
-              <a:rPr sz="1200" b="1" i="0">
+                <a:spcPts val="630"/>
+              </a:spcAft>
+            </a:pPr>
+            <a:r>
+              <a:rPr sz="1400" b="0" i="0">
                 <a:solidFill>
                   <a:srgbClr val="5D5A54"/>
                 </a:solidFill>
                 <a:latin typeface="Inter Tight"/>
               </a:rPr>
-              <a:t>YOUR BRAIN</a:t>
-            </a:r>
-          </a:p>
-        </p:txBody>
-      </p:sp>
-      <p:sp>
-        <p:nvSpPr>
-          <p:cNvPr id="4" name="TextBox 3"/>
+              <a:t>Upper School  ·  20 minutes (fits a 30-minute advisory, with time for your opening check-in; 10-minute version below)  ·  Any grade</a:t>
+            </a:r>
+          </a:p>
+        </p:txBody>
+      </p:sp>
+      <p:sp>
+        <p:nvSpPr>
+          <p:cNvPr id="6" name="TextBox 5"/>
           <p:cNvSpPr txBox="1"/>
           <p:nvPr/>
         </p:nvSpPr>
         <p:spPr>
           <a:xfrm>
-            <a:off x="8229600" y="6400800"/>
-            <a:ext cx="3410712" cy="274320"/>
+            <a:off x="548640" y="1828800"/>
+            <a:ext cx="5120640" cy="4389120"/>
           </a:xfrm>
           <a:prstGeom prst="rect">
             <a:avLst/>
@@ -8764,33 +9081,129 @@
           </a:bodyPr>
           <a:lstStyle/>
           <a:p>
-            <a:pPr algn="r">
-              <a:spcAft>
-                <a:spcPts val="450"/>
-              </a:spcAft>
-            </a:pPr>
-            <a:r>
-              <a:rPr sz="1000" b="0" i="0">
-                <a:solidFill>
-                  <a:srgbClr val="5D5A54"/>
+            <a:pPr algn="l">
+              <a:spcAft>
+                <a:spcPts val="675"/>
+              </a:spcAft>
+            </a:pPr>
+            <a:r>
+              <a:rPr sz="1100" b="1" i="0">
+                <a:solidFill>
+                  <a:srgbClr val="0B2D5B"/>
                 </a:solidFill>
                 <a:latin typeface="Inter Tight"/>
               </a:rPr>
-              <a:t>Beaver Counseling</a:t>
-            </a:r>
-          </a:p>
-        </p:txBody>
-      </p:sp>
-      <p:sp>
-        <p:nvSpPr>
-          <p:cNvPr id="5" name="TextBox 4"/>
+              <a:t>GOAL</a:t>
+            </a:r>
+          </a:p>
+          <a:p>
+            <a:pPr algn="l">
+              <a:spcAft>
+                <a:spcPts val="675"/>
+              </a:spcAft>
+            </a:pPr>
+            <a:r>
+              <a:rPr sz="1500" b="0" i="0">
+                <a:solidFill>
+                  <a:srgbClr val="1C1B19"/>
+                </a:solidFill>
+                <a:latin typeface="Source Serif 4"/>
+              </a:rPr>
+              <a:t>Students can name the difference between grinding for a grade and learning because they want to know, explain why curiosity matters for memory and for having something real to say, and pick one small way to feed their curiosity this week. Nobody is asked to share grades, college plans, or how much pressure they're under at home.</a:t>
+            </a:r>
+          </a:p>
+          <a:p>
+            <a:pPr algn="l">
+              <a:spcAft>
+                <a:spcPts val="675"/>
+              </a:spcAft>
+            </a:pPr>
+            <a:r>
+              <a:rPr sz="1500" b="0" i="0">
+                <a:solidFill>
+                  <a:srgbClr val="1C1B19"/>
+                </a:solidFill>
+                <a:latin typeface="Source Serif 4"/>
+              </a:rPr>
+              <a:t/>
+            </a:r>
+          </a:p>
+          <a:p>
+            <a:pPr algn="l">
+              <a:spcAft>
+                <a:spcPts val="675"/>
+              </a:spcAft>
+            </a:pPr>
+            <a:r>
+              <a:rPr sz="1100" b="1" i="0">
+                <a:solidFill>
+                  <a:srgbClr val="0B2D5B"/>
+                </a:solidFill>
+                <a:latin typeface="Inter Tight"/>
+              </a:rPr>
+              <a:t>MATERIALS</a:t>
+            </a:r>
+          </a:p>
+          <a:p>
+            <a:pPr algn="l">
+              <a:spcAft>
+                <a:spcPts val="675"/>
+              </a:spcAft>
+            </a:pPr>
+            <a:r>
+              <a:rPr sz="1500" b="0" i="0">
+                <a:solidFill>
+                  <a:srgbClr val="1C1B19"/>
+                </a:solidFill>
+                <a:latin typeface="Source Serif 4"/>
+              </a:rPr>
+              <a:t>Sticky notes or index cards, two per student</a:t>
+            </a:r>
+          </a:p>
+          <a:p>
+            <a:pPr algn="l">
+              <a:spcAft>
+                <a:spcPts val="675"/>
+              </a:spcAft>
+            </a:pPr>
+            <a:r>
+              <a:rPr sz="1500" b="0" i="0">
+                <a:solidFill>
+                  <a:srgbClr val="1C1B19"/>
+                </a:solidFill>
+                <a:latin typeface="Source Serif 4"/>
+              </a:rPr>
+              <a:t>A board or chart paper with two columns: Grind and Curiosity</a:t>
+            </a:r>
+          </a:p>
+          <a:p>
+            <a:pPr algn="l">
+              <a:spcAft>
+                <a:spcPts val="675"/>
+              </a:spcAft>
+            </a:pPr>
+            <a:r>
+              <a:rPr sz="1500" b="0" i="0">
+                <a:solidFill>
+                  <a:srgbClr val="1C1B19"/>
+                </a:solidFill>
+                <a:latin typeface="Source Serif 4"/>
+              </a:rPr>
+              <a:t>The student page link (last slide) to share after advisory</a:t>
+            </a:r>
+          </a:p>
+        </p:txBody>
+      </p:sp>
+      <p:sp>
+        <p:nvSpPr>
+          <p:cNvPr id="7" name="TextBox 6"/>
           <p:cNvSpPr txBox="1"/>
           <p:nvPr/>
         </p:nvSpPr>
         <p:spPr>
           <a:xfrm>
-            <a:off x="822960" y="914400"/>
-            <a:ext cx="10515600" cy="365760"/>
+            <a:off x="6126480" y="1828800"/>
+            <a:ext cx="5486400" cy="4389120"/>
           </a:xfrm>
           <a:prstGeom prst="rect">
             <a:avLst/>
@@ -8809,238 +9222,186 @@
               </a:spcAft>
             </a:pPr>
             <a:r>
-              <a:rPr sz="1400" b="1" i="0">
+              <a:rPr sz="1100" b="1" i="0">
                 <a:solidFill>
                   <a:srgbClr val="0B2D5B"/>
                 </a:solidFill>
                 <a:latin typeface="Inter Tight"/>
               </a:rPr>
-              <a:t>Gruber et al., 2014  ·  von Stumm et al., 2011  ·  Dahl et al., 2018</a:t>
-            </a:r>
-          </a:p>
-        </p:txBody>
-      </p:sp>
-      <p:sp>
-        <p:nvSpPr>
-          <p:cNvPr id="6" name="TextBox 5"/>
-          <p:cNvSpPr txBox="1"/>
-          <p:nvPr/>
-        </p:nvSpPr>
-        <p:spPr>
-          <a:xfrm>
-            <a:off x="822960" y="1325880"/>
-            <a:ext cx="10515600" cy="1097280"/>
-          </a:xfrm>
-          <a:prstGeom prst="rect">
-            <a:avLst/>
-          </a:prstGeom>
-          <a:noFill/>
-        </p:spPr>
-        <p:txBody>
-          <a:bodyPr wrap="square" anchor="t" lIns="0" rIns="0" tIns="0" bIns="0">
-            <a:spAutoFit/>
-          </a:bodyPr>
-          <a:lstStyle/>
-          <a:p>
-            <a:pPr algn="l">
-              <a:spcAft>
-                <a:spcPts val="1440"/>
-              </a:spcAft>
-            </a:pPr>
-            <a:r>
-              <a:rPr sz="3200" b="1" i="0">
+              <a:t>FLOW</a:t>
+            </a:r>
+          </a:p>
+          <a:p>
+            <a:pPr algn="l">
+              <a:spcAft>
+                <a:spcPts val="630"/>
+              </a:spcAft>
+            </a:pPr>
+            <a:r>
+              <a:rPr sz="1300" b="1" i="0">
+                <a:solidFill>
+                  <a:srgbClr val="F47B20"/>
+                </a:solidFill>
+                <a:latin typeface="Inter Tight"/>
+              </a:rPr>
+              <a:t>4 min   </a:t>
+            </a:r>
+            <a:r>
+              <a:rPr sz="1400" b="0" i="0">
                 <a:solidFill>
                   <a:srgbClr val="1C1B19"/>
                 </a:solidFill>
                 <a:latin typeface="Source Serif 4"/>
               </a:rPr>
-              <a:t>Curious brains remember more.</a:t>
-            </a:r>
-          </a:p>
-        </p:txBody>
-      </p:sp>
-      <p:sp>
-        <p:nvSpPr>
-          <p:cNvPr id="7" name="TextBox 6"/>
-          <p:cNvSpPr txBox="1"/>
-          <p:nvPr/>
-        </p:nvSpPr>
-        <p:spPr>
-          <a:xfrm>
-            <a:off x="822960" y="2514600"/>
-            <a:ext cx="10515600" cy="2194560"/>
-          </a:xfrm>
-          <a:prstGeom prst="rect">
-            <a:avLst/>
-          </a:prstGeom>
-          <a:noFill/>
-        </p:spPr>
-        <p:txBody>
-          <a:bodyPr wrap="square" anchor="t" lIns="0" rIns="0" tIns="0" bIns="0">
-            <a:spAutoFit/>
-          </a:bodyPr>
-          <a:lstStyle/>
-          <a:p>
-            <a:pPr algn="l">
-              <a:spcAft>
-                <a:spcPts val="855"/>
-              </a:spcAft>
-            </a:pPr>
-            <a:r>
-              <a:rPr sz="1900" b="0" i="0">
+              <a:t>Rabbit holes: what did you last look up just because?</a:t>
+            </a:r>
+          </a:p>
+          <a:p>
+            <a:pPr algn="l">
+              <a:spcAft>
+                <a:spcPts val="630"/>
+              </a:spcAft>
+            </a:pPr>
+            <a:r>
+              <a:rPr sz="1300" b="1" i="0">
+                <a:solidFill>
+                  <a:srgbClr val="F47B20"/>
+                </a:solidFill>
+                <a:latin typeface="Inter Tight"/>
+              </a:rPr>
+              <a:t>5 min   </a:t>
+            </a:r>
+            <a:r>
+              <a:rPr sz="1400" b="0" i="0">
                 <a:solidFill>
                   <a:srgbClr val="1C1B19"/>
                 </a:solidFill>
                 <a:latin typeface="Source Serif 4"/>
               </a:rPr>
-              <a:t>•  Curious about a question? You remember the answer better.</a:t>
-            </a:r>
-          </a:p>
-          <a:p>
-            <a:pPr algn="l">
-              <a:spcAft>
-                <a:spcPts val="855"/>
-              </a:spcAft>
-            </a:pPr>
-            <a:r>
-              <a:rPr sz="1900" b="0" i="0">
+              <a:t>Grind or curiosity? (sort the cards)</a:t>
+            </a:r>
+          </a:p>
+          <a:p>
+            <a:pPr algn="l">
+              <a:spcAft>
+                <a:spcPts val="630"/>
+              </a:spcAft>
+            </a:pPr>
+            <a:r>
+              <a:rPr sz="1300" b="1" i="0">
+                <a:solidFill>
+                  <a:srgbClr val="F47B20"/>
+                </a:solidFill>
+                <a:latin typeface="Inter Tight"/>
+              </a:rPr>
+              <a:t>4 min   </a:t>
+            </a:r>
+            <a:r>
+              <a:rPr sz="1400" b="0" i="0">
                 <a:solidFill>
                   <a:srgbClr val="1C1B19"/>
                 </a:solidFill>
                 <a:latin typeface="Source Serif 4"/>
               </a:rPr>
-              <a:t>•  You even remember unrelated things you saw while curious.</a:t>
-            </a:r>
-          </a:p>
-          <a:p>
-            <a:pPr algn="l">
-              <a:spcAft>
-                <a:spcPts val="855"/>
-              </a:spcAft>
-            </a:pPr>
-            <a:r>
-              <a:rPr sz="1900" b="0" i="0">
+              <a:t>Why curiosity matters: memory and the teen brain</a:t>
+            </a:r>
+          </a:p>
+          <a:p>
+            <a:pPr algn="l">
+              <a:spcAft>
+                <a:spcPts val="630"/>
+              </a:spcAft>
+            </a:pPr>
+            <a:r>
+              <a:rPr sz="1300" b="1" i="0">
+                <a:solidFill>
+                  <a:srgbClr val="F47B20"/>
+                </a:solidFill>
+                <a:latin typeface="Inter Tight"/>
+              </a:rPr>
+              <a:t>4 min   </a:t>
+            </a:r>
+            <a:r>
+              <a:rPr sz="1400" b="0" i="0">
                 <a:solidFill>
                   <a:srgbClr val="1C1B19"/>
                 </a:solidFill>
                 <a:latin typeface="Source Serif 4"/>
               </a:rPr>
-              <a:t>•  Curiosity predicts grades about as well as working hard does.</a:t>
-            </a:r>
-          </a:p>
-          <a:p>
-            <a:pPr algn="l">
-              <a:spcAft>
-                <a:spcPts val="855"/>
-              </a:spcAft>
-            </a:pPr>
-            <a:r>
-              <a:rPr sz="1900" b="0" i="0">
+              <a:t>Something to say: two seniors</a:t>
+            </a:r>
+          </a:p>
+          <a:p>
+            <a:pPr algn="l">
+              <a:spcAft>
+                <a:spcPts val="630"/>
+              </a:spcAft>
+            </a:pPr>
+            <a:r>
+              <a:rPr sz="1300" b="1" i="0">
+                <a:solidFill>
+                  <a:srgbClr val="F47B20"/>
+                </a:solidFill>
+                <a:latin typeface="Inter Tight"/>
+              </a:rPr>
+              <a:t>3 min   </a:t>
+            </a:r>
+            <a:r>
+              <a:rPr sz="1400" b="0" i="0">
                 <a:solidFill>
                   <a:srgbClr val="1C1B19"/>
                 </a:solidFill>
                 <a:latin typeface="Source Serif 4"/>
               </a:rPr>
-              <a:t>•  Teen brains are extra tuned to new things. That's a learning window.</a:t>
-            </a:r>
-          </a:p>
-        </p:txBody>
-      </p:sp>
-      <p:sp>
-        <p:nvSpPr>
-          <p:cNvPr id="8" name="Rectangle 7"/>
-          <p:cNvSpPr/>
-          <p:nvPr/>
-        </p:nvSpPr>
-        <p:spPr>
-          <a:xfrm>
-            <a:off x="822960" y="4892040"/>
-            <a:ext cx="73152" cy="1097280"/>
-          </a:xfrm>
-          <a:prstGeom prst="rect">
-            <a:avLst/>
-          </a:prstGeom>
-          <a:solidFill>
-            <a:srgbClr val="F47B20"/>
-          </a:solidFill>
-          <a:ln>
-            <a:noFill/>
-          </a:ln>
-          <a:effectLst/>
-        </p:spPr>
-        <p:style>
-          <a:lnRef idx="1">
-            <a:schemeClr val="accent1"/>
-          </a:lnRef>
-          <a:fillRef idx="3">
-            <a:schemeClr val="accent1"/>
-          </a:fillRef>
-          <a:effectRef idx="2">
-            <a:schemeClr val="accent1"/>
-          </a:effectRef>
-          <a:fontRef idx="minor">
-            <a:schemeClr val="lt1"/>
-          </a:fontRef>
-        </p:style>
-        <p:txBody>
-          <a:bodyPr rtlCol="0" anchor="ctr"/>
-          <a:lstStyle/>
-          <a:p>
-            <a:pPr algn="ctr"/>
-          </a:p>
-        </p:txBody>
-      </p:sp>
-      <p:sp>
-        <p:nvSpPr>
-          <p:cNvPr id="9" name="TextBox 8"/>
-          <p:cNvSpPr txBox="1"/>
-          <p:nvPr/>
-        </p:nvSpPr>
-        <p:spPr>
-          <a:xfrm>
-            <a:off x="1097280" y="4892040"/>
-            <a:ext cx="10241280" cy="1188720"/>
-          </a:xfrm>
-          <a:prstGeom prst="rect">
-            <a:avLst/>
-          </a:prstGeom>
-          <a:noFill/>
-        </p:spPr>
-        <p:txBody>
-          <a:bodyPr wrap="square" anchor="t" lIns="0" rIns="0" tIns="0" bIns="0">
-            <a:spAutoFit/>
-          </a:bodyPr>
-          <a:lstStyle/>
-          <a:p>
-            <a:pPr algn="l">
-              <a:spcAft>
-                <a:spcPts val="855"/>
-              </a:spcAft>
-            </a:pPr>
-            <a:r>
-              <a:rPr sz="1200" b="1" i="0">
-                <a:solidFill>
-                  <a:srgbClr val="F47B20"/>
+              <a:t>Pick one, privately, and the student page link</a:t>
+            </a:r>
+          </a:p>
+          <a:p>
+            <a:pPr algn="l">
+              <a:spcAft>
+                <a:spcPts val="630"/>
+              </a:spcAft>
+            </a:pPr>
+            <a:r>
+              <a:rPr sz="1400" b="0" i="0">
+                <a:solidFill>
+                  <a:srgbClr val="1C1B19"/>
+                </a:solidFill>
+                <a:latin typeface="Source Serif 4"/>
+              </a:rPr>
+              <a:t/>
+            </a:r>
+          </a:p>
+          <a:p>
+            <a:pPr algn="l">
+              <a:spcAft>
+                <a:spcPts val="630"/>
+              </a:spcAft>
+            </a:pPr>
+            <a:r>
+              <a:rPr sz="1100" b="1" i="0">
+                <a:solidFill>
+                  <a:srgbClr val="0B2D5B"/>
                 </a:solidFill>
                 <a:latin typeface="Inter Tight"/>
               </a:rPr>
-              <a:t>IN CLASS</a:t>
-            </a:r>
-          </a:p>
-          <a:p>
-            <a:pPr algn="l">
-              <a:spcAft>
-                <a:spcPts val="855"/>
-              </a:spcAft>
-            </a:pPr>
-            <a:r>
-              <a:rPr sz="1900" b="0" i="0">
+              <a:t>SHORT ON TIME (10-MINUTE CHECK-IN)</a:t>
+            </a:r>
+          </a:p>
+          <a:p>
+            <a:pPr algn="l">
+              <a:spcAft>
+                <a:spcPts val="630"/>
+              </a:spcAft>
+            </a:pPr>
+            <a:r>
+              <a:rPr sz="1400" b="0" i="0">
                 <a:solidFill>
                   <a:srgbClr val="1C1B19"/>
                 </a:solidFill>
                 <a:latin typeface="Source Serif 4"/>
               </a:rPr>
-              <a:t>Curiosity helps grades, too. Protecting it isn't a luxury.</a:t>
+              <a:t>Rabbit holes go-around (3), the grind loop slide (3), pick one small way to feed curiosity this week (3), share the link (1).</a:t>
             </a:r>
           </a:p>
         </p:txBody>

--- a/decks/stay-curious-lesson-v2.pptx
+++ b/decks/stay-curious-lesson-v2.pptx
@@ -6033,6 +6033,45 @@
                 <a:latin typeface="Inter Tight"/>
               </a:rPr>
               <a:t>Beaver Upper School · Counseling</a:t>
+            </a:r>
+          </a:p>
+        </p:txBody>
+      </p:sp>
+      <p:sp>
+        <p:nvSpPr>
+          <p:cNvPr id="8" name="TextBox 7"/>
+          <p:cNvSpPr txBox="1"/>
+          <p:nvPr/>
+        </p:nvSpPr>
+        <p:spPr>
+          <a:xfrm>
+            <a:off x="6766560" y="5897880"/>
+            <a:ext cx="4846320" cy="640080"/>
+          </a:xfrm>
+          <a:prstGeom prst="rect">
+            <a:avLst/>
+          </a:prstGeom>
+          <a:noFill/>
+        </p:spPr>
+        <p:txBody>
+          <a:bodyPr wrap="square" anchor="t" lIns="0" rIns="0" tIns="0" bIns="0">
+            <a:spAutoFit/>
+          </a:bodyPr>
+          <a:lstStyle/>
+          <a:p>
+            <a:pPr algn="r">
+              <a:spcAft>
+                <a:spcPts val="495"/>
+              </a:spcAft>
+            </a:pPr>
+            <a:r>
+              <a:rPr sz="1100" b="0" i="0">
+                <a:solidFill>
+                  <a:srgbClr val="E8E4DA"/>
+                </a:solidFill>
+                <a:latin typeface="Inter Tight"/>
+              </a:rPr>
+              <a:t>Written by Dr. Rick Wilson, with AI-assisted drafting. Every lesson is reviewed and edited by Dr. Wilson.</a:t>
             </a:r>
           </a:p>
         </p:txBody>
